--- a/4/РОП/Практики_1-8/Презентации/РОП_Практическая_8_АлбахтинИВ.pptx
+++ b/4/РОП/Практики_1-8/Презентации/РОП_Практическая_8_АлбахтинИВ.pptx
@@ -2,18 +2,18 @@
 <file path=ppt/presentation.xml><?xml version="1.0" encoding="utf-8"?>
 <p:presentation xmlns:p="http://schemas.openxmlformats.org/presentationml/2006/main">
   <p:sldMasterIdLst>
-    <p:sldMasterId xmlns:r="http://schemas.openxmlformats.org/officeDocument/2006/relationships" id="2147483648" r:id="R194ed1d56c1a421f"/>
+    <p:sldMasterId xmlns:r="http://schemas.openxmlformats.org/officeDocument/2006/relationships" id="2147483648" r:id="R4e3698a57c9f42bb"/>
   </p:sldMasterIdLst>
   <p:notesMasterIdLst>
-    <p:notesMasterId xmlns:r="http://schemas.openxmlformats.org/officeDocument/2006/relationships" r:id="R21a73980ee9f44d4"/>
+    <p:notesMasterId xmlns:r="http://schemas.openxmlformats.org/officeDocument/2006/relationships" r:id="R7c974051afab4a29"/>
   </p:notesMasterIdLst>
   <p:sldIdLst>
-    <p:sldId xmlns:r="http://schemas.openxmlformats.org/officeDocument/2006/relationships" id="256" r:id="R70a4459cb3cc4c9c"/>
-    <p:sldId xmlns:r="http://schemas.openxmlformats.org/officeDocument/2006/relationships" id="257" r:id="R2f10d98c56564b50"/>
-    <p:sldId xmlns:r="http://schemas.openxmlformats.org/officeDocument/2006/relationships" id="258" r:id="Rc5ff3366880f432f"/>
-    <p:sldId xmlns:r="http://schemas.openxmlformats.org/officeDocument/2006/relationships" id="259" r:id="Rb4dfe161bd0144f8"/>
-    <p:sldId xmlns:r="http://schemas.openxmlformats.org/officeDocument/2006/relationships" id="260" r:id="R699095559d234601"/>
-    <p:sldId xmlns:r="http://schemas.openxmlformats.org/officeDocument/2006/relationships" id="261" r:id="Rd4a3351f336040a0"/>
+    <p:sldId xmlns:r="http://schemas.openxmlformats.org/officeDocument/2006/relationships" id="256" r:id="Rd954e009a28246aa"/>
+    <p:sldId xmlns:r="http://schemas.openxmlformats.org/officeDocument/2006/relationships" id="257" r:id="Re19b8139a50d4cdf"/>
+    <p:sldId xmlns:r="http://schemas.openxmlformats.org/officeDocument/2006/relationships" id="258" r:id="Rbf9576ba641f41b7"/>
+    <p:sldId xmlns:r="http://schemas.openxmlformats.org/officeDocument/2006/relationships" id="259" r:id="R9a960383170243ab"/>
+    <p:sldId xmlns:r="http://schemas.openxmlformats.org/officeDocument/2006/relationships" id="260" r:id="Rc72b1c5e11cf4691"/>
+    <p:sldId xmlns:r="http://schemas.openxmlformats.org/officeDocument/2006/relationships" id="261" r:id="R97a81dc4d9344ac7"/>
   </p:sldIdLst>
   <p:sldSz cx="12192000" cy="6858000"/>
   <p:notesSz cx="6858000" cy="9144000"/>
@@ -895,7 +895,7 @@
   </p:cSld>
   <p:clrMap bg1="lt1" tx1="dk1" bg2="lt2" tx2="dk2" accent1="accent1" accent2="accent2" accent3="accent3" accent4="accent4" accent5="accent5" accent6="accent6" hlink="hlink" folHlink="folHlink"/>
   <p:sldLayoutIdLst>
-    <p:sldLayoutId xmlns:r="http://schemas.openxmlformats.org/officeDocument/2006/relationships" id="2147483649" r:id="R8627133812cf4516"/>
+    <p:sldLayoutId xmlns:r="http://schemas.openxmlformats.org/officeDocument/2006/relationships" id="2147483649" r:id="R495ec2172879485c"/>
   </p:sldLayoutIdLst>
   <p:txStyles>
     <p:titleStyle>
@@ -1446,19 +1446,19 @@
           <p:cNvPr id="5" name="">
             <a:extLst xmlns:a="http://schemas.openxmlformats.org/drawingml/2006/main">
               <a:ext uri="{FF2B5EF4-FFF2-40B4-BE49-F238E27FC236}">
-                <a16:creationId xmlns:a16="http://schemas.microsoft.com/office/drawing/2014/main" id="{2DD49D1D-8B13-4E41-B79A-3A40D0D9B507}"/>
-              </a:ext>
-            </a:extLst>
-          </p:cNvPr>
-          <p:cNvSpPr>
-            <a:spLocks xmlns:a="http://schemas.openxmlformats.org/drawingml/2006/main" noGrp="1"/>
-          </p:cNvSpPr>
-          <p:nvPr/>
-        </p:nvSpPr>
-        <p:spPr>
-          <a:xfrm xmlns:a="http://schemas.openxmlformats.org/drawingml/2006/main">
-            <a:off x="552450" y="333375"/>
-            <a:ext cx="11049000" cy="857250"/>
+                <a16:creationId xmlns:a16="http://schemas.microsoft.com/office/drawing/2014/main" id="{C98B4BF4-55D6-4B43-8BAB-9C25DD1FE954}"/>
+              </a:ext>
+            </a:extLst>
+          </p:cNvPr>
+          <p:cNvSpPr>
+            <a:spLocks xmlns:a="http://schemas.openxmlformats.org/drawingml/2006/main" noGrp="1"/>
+          </p:cNvSpPr>
+          <p:nvPr/>
+        </p:nvSpPr>
+        <p:spPr>
+          <a:xfrm xmlns:a="http://schemas.openxmlformats.org/drawingml/2006/main">
+            <a:off x="552450" y="266700"/>
+            <a:ext cx="11049000" cy="742950"/>
           </a:xfrm>
           <a:prstGeom xmlns:a="http://schemas.openxmlformats.org/drawingml/2006/main" prst="rect">
             <a:avLst/>
@@ -1469,13 +1469,13 @@
           </a:ln>
         </p:spPr>
         <p:txBody>
-          <a:bodyPr xmlns:a="http://schemas.openxmlformats.org/drawingml/2006/main">
+          <a:bodyPr xmlns:a="http://schemas.openxmlformats.org/drawingml/2006/main" anchor="ctr">
             <a:noAutofit/>
           </a:bodyPr>
           <a:lstStyle xmlns:a="http://schemas.openxmlformats.org/drawingml/2006/main"/>
           <a:p xmlns:a="http://schemas.openxmlformats.org/drawingml/2006/main">
-            <a:pPr>
-              <a:defRPr sz="3150" b="1">
+            <a:pPr algn="l">
+              <a:defRPr sz="2700" b="1">
                 <a:solidFill>
                   <a:srgbClr val="161616"/>
                 </a:solidFill>
@@ -1485,7 +1485,7 @@
               </a:defRPr>
             </a:pPr>
             <a:r>
-              <a:rPr sz="3150" b="1">
+              <a:rPr sz="2700" b="1">
                 <a:solidFill>
                   <a:srgbClr val="161616"/>
                 </a:solidFill>
@@ -1503,7 +1503,7 @@
           <p:cNvPr id="2" name="">
             <a:extLst xmlns:a="http://schemas.openxmlformats.org/drawingml/2006/main">
               <a:ext uri="{FF2B5EF4-FFF2-40B4-BE49-F238E27FC236}">
-                <a16:creationId xmlns:a16="http://schemas.microsoft.com/office/drawing/2014/main" id="{6606FD65-E8DD-4196-804D-643F941ECB79}"/>
+                <a16:creationId xmlns:a16="http://schemas.microsoft.com/office/drawing/2014/main" id="{5C72A839-F658-4B46-A6A4-E7769F60F48C}"/>
               </a:ext>
             </a:extLst>
           </p:cNvPr>
@@ -1560,7 +1560,7 @@
           <p:cNvPr id="3" name="">
             <a:extLst xmlns:a="http://schemas.openxmlformats.org/drawingml/2006/main">
               <a:ext uri="{FF2B5EF4-FFF2-40B4-BE49-F238E27FC236}">
-                <a16:creationId xmlns:a16="http://schemas.microsoft.com/office/drawing/2014/main" id="{FF282AF8-401E-4CEA-9151-41F9C42FB43B}"/>
+                <a16:creationId xmlns:a16="http://schemas.microsoft.com/office/drawing/2014/main" id="{73111CBA-C65A-4710-8D56-8988C651D4FA}"/>
               </a:ext>
             </a:extLst>
           </p:cNvPr>
@@ -1617,7 +1617,7 @@
           <p:cNvPr id="4" name="">
             <a:extLst xmlns:a="http://schemas.openxmlformats.org/drawingml/2006/main">
               <a:ext uri="{FF2B5EF4-FFF2-40B4-BE49-F238E27FC236}">
-                <a16:creationId xmlns:a16="http://schemas.microsoft.com/office/drawing/2014/main" id="{50B76722-2C51-415A-AE26-F347300293E9}"/>
+                <a16:creationId xmlns:a16="http://schemas.microsoft.com/office/drawing/2014/main" id="{258CDA84-17F6-4F98-8BD5-1FB985B66CAA}"/>
               </a:ext>
             </a:extLst>
           </p:cNvPr>
@@ -1695,7 +1695,7 @@
     </p:spTree>
     <p:extLst>
       <p:ext uri="{BB962C8B-B14F-4D97-AF65-F5344CB8AC3E}">
-        <p14:creationId xmlns:p14="http://schemas.microsoft.com/office/powerpoint/2010/main" val="1887809820"/>
+        <p14:creationId xmlns:p14="http://schemas.microsoft.com/office/powerpoint/2010/main" val="445576041"/>
       </p:ext>
     </p:extLst>
   </p:cSld>
@@ -1726,19 +1726,19 @@
           <p:cNvPr id="21" name="">
             <a:extLst xmlns:a="http://schemas.openxmlformats.org/drawingml/2006/main">
               <a:ext uri="{FF2B5EF4-FFF2-40B4-BE49-F238E27FC236}">
-                <a16:creationId xmlns:a16="http://schemas.microsoft.com/office/drawing/2014/main" id="{6D6407A8-FF9D-4BB3-8A6C-DFD574AB5A54}"/>
-              </a:ext>
-            </a:extLst>
-          </p:cNvPr>
-          <p:cNvSpPr>
-            <a:spLocks xmlns:a="http://schemas.openxmlformats.org/drawingml/2006/main" noGrp="1"/>
-          </p:cNvSpPr>
-          <p:nvPr/>
-        </p:nvSpPr>
-        <p:spPr>
-          <a:xfrm xmlns:a="http://schemas.openxmlformats.org/drawingml/2006/main">
-            <a:off x="552450" y="333375"/>
-            <a:ext cx="11049000" cy="857250"/>
+                <a16:creationId xmlns:a16="http://schemas.microsoft.com/office/drawing/2014/main" id="{A3384AC1-8578-45E0-929B-054A87DD3B4D}"/>
+              </a:ext>
+            </a:extLst>
+          </p:cNvPr>
+          <p:cNvSpPr>
+            <a:spLocks xmlns:a="http://schemas.openxmlformats.org/drawingml/2006/main" noGrp="1"/>
+          </p:cNvSpPr>
+          <p:nvPr/>
+        </p:nvSpPr>
+        <p:spPr>
+          <a:xfrm xmlns:a="http://schemas.openxmlformats.org/drawingml/2006/main">
+            <a:off x="552450" y="266700"/>
+            <a:ext cx="11049000" cy="742950"/>
           </a:xfrm>
           <a:prstGeom xmlns:a="http://schemas.openxmlformats.org/drawingml/2006/main" prst="rect">
             <a:avLst/>
@@ -1749,13 +1749,13 @@
           </a:ln>
         </p:spPr>
         <p:txBody>
-          <a:bodyPr xmlns:a="http://schemas.openxmlformats.org/drawingml/2006/main">
+          <a:bodyPr xmlns:a="http://schemas.openxmlformats.org/drawingml/2006/main" anchor="ctr">
             <a:noAutofit/>
           </a:bodyPr>
           <a:lstStyle xmlns:a="http://schemas.openxmlformats.org/drawingml/2006/main"/>
           <a:p xmlns:a="http://schemas.openxmlformats.org/drawingml/2006/main">
-            <a:pPr>
-              <a:defRPr sz="3150" b="1">
+            <a:pPr algn="l">
+              <a:defRPr sz="2700" b="1">
                 <a:solidFill>
                   <a:srgbClr val="161616"/>
                 </a:solidFill>
@@ -1765,7 +1765,7 @@
               </a:defRPr>
             </a:pPr>
             <a:r>
-              <a:rPr sz="3150" b="1">
+              <a:rPr sz="2700" b="1">
                 <a:solidFill>
                   <a:srgbClr val="161616"/>
                 </a:solidFill>
@@ -1783,7 +1783,7 @@
           <p:cNvPr id="2" name="">
             <a:extLst xmlns:a="http://schemas.openxmlformats.org/drawingml/2006/main">
               <a:ext uri="{FF2B5EF4-FFF2-40B4-BE49-F238E27FC236}">
-                <a16:creationId xmlns:a16="http://schemas.microsoft.com/office/drawing/2014/main" id="{CE673380-BFAA-400D-B5C4-CBBD59CB0316}"/>
+                <a16:creationId xmlns:a16="http://schemas.microsoft.com/office/drawing/2014/main" id="{8754E850-A399-4789-97FF-54617F585BED}"/>
               </a:ext>
             </a:extLst>
           </p:cNvPr>
@@ -1836,7 +1836,7 @@
           <p:cNvPr id="3" name="">
             <a:extLst xmlns:a="http://schemas.openxmlformats.org/drawingml/2006/main">
               <a:ext uri="{FF2B5EF4-FFF2-40B4-BE49-F238E27FC236}">
-                <a16:creationId xmlns:a16="http://schemas.microsoft.com/office/drawing/2014/main" id="{379D462C-886E-4272-A1EA-58770CA0B740}"/>
+                <a16:creationId xmlns:a16="http://schemas.microsoft.com/office/drawing/2014/main" id="{0BDDFA89-0079-49F6-B451-01B72D8B11A2}"/>
               </a:ext>
             </a:extLst>
           </p:cNvPr>
@@ -1865,7 +1865,7 @@
           <p:cNvPr id="4" name="">
             <a:extLst xmlns:a="http://schemas.openxmlformats.org/drawingml/2006/main">
               <a:ext uri="{FF2B5EF4-FFF2-40B4-BE49-F238E27FC236}">
-                <a16:creationId xmlns:a16="http://schemas.microsoft.com/office/drawing/2014/main" id="{66F9F565-0381-44CE-9D78-E7FD610C0FC2}"/>
+                <a16:creationId xmlns:a16="http://schemas.microsoft.com/office/drawing/2014/main" id="{2421DE23-F428-4893-8917-987C4417EAF3}"/>
               </a:ext>
             </a:extLst>
           </p:cNvPr>
@@ -1918,7 +1918,7 @@
           <p:cNvPr id="5" name="">
             <a:extLst xmlns:a="http://schemas.openxmlformats.org/drawingml/2006/main">
               <a:ext uri="{FF2B5EF4-FFF2-40B4-BE49-F238E27FC236}">
-                <a16:creationId xmlns:a16="http://schemas.microsoft.com/office/drawing/2014/main" id="{B871F778-2488-4128-A51E-DDECF58CB1EF}"/>
+                <a16:creationId xmlns:a16="http://schemas.microsoft.com/office/drawing/2014/main" id="{3891EA69-2D10-4E8C-B8E0-8E76DAA9FE52}"/>
               </a:ext>
             </a:extLst>
           </p:cNvPr>
@@ -1947,7 +1947,7 @@
           <p:cNvPr id="6" name="">
             <a:extLst xmlns:a="http://schemas.openxmlformats.org/drawingml/2006/main">
               <a:ext uri="{FF2B5EF4-FFF2-40B4-BE49-F238E27FC236}">
-                <a16:creationId xmlns:a16="http://schemas.microsoft.com/office/drawing/2014/main" id="{8E5881B1-636A-4448-8C38-CE5732F266B6}"/>
+                <a16:creationId xmlns:a16="http://schemas.microsoft.com/office/drawing/2014/main" id="{5FEF5CA9-F861-4D83-A9C0-85767DBCF8FC}"/>
               </a:ext>
             </a:extLst>
           </p:cNvPr>
@@ -2000,7 +2000,7 @@
           <p:cNvPr id="7" name="">
             <a:extLst xmlns:a="http://schemas.openxmlformats.org/drawingml/2006/main">
               <a:ext uri="{FF2B5EF4-FFF2-40B4-BE49-F238E27FC236}">
-                <a16:creationId xmlns:a16="http://schemas.microsoft.com/office/drawing/2014/main" id="{64D7CE08-F85B-49CF-B603-B7FBB9D77939}"/>
+                <a16:creationId xmlns:a16="http://schemas.microsoft.com/office/drawing/2014/main" id="{6583FFC6-C95D-435A-A6DC-787BE2F25546}"/>
               </a:ext>
             </a:extLst>
           </p:cNvPr>
@@ -2029,7 +2029,7 @@
           <p:cNvPr id="8" name="">
             <a:extLst xmlns:a="http://schemas.openxmlformats.org/drawingml/2006/main">
               <a:ext uri="{FF2B5EF4-FFF2-40B4-BE49-F238E27FC236}">
-                <a16:creationId xmlns:a16="http://schemas.microsoft.com/office/drawing/2014/main" id="{1AE88E3A-AB7C-4768-833D-67EE7B267C5B}"/>
+                <a16:creationId xmlns:a16="http://schemas.microsoft.com/office/drawing/2014/main" id="{11FA420C-8C53-4D6C-B79F-2543FE3E431A}"/>
               </a:ext>
             </a:extLst>
           </p:cNvPr>
@@ -2082,7 +2082,7 @@
           <p:cNvPr id="9" name="">
             <a:extLst xmlns:a="http://schemas.openxmlformats.org/drawingml/2006/main">
               <a:ext uri="{FF2B5EF4-FFF2-40B4-BE49-F238E27FC236}">
-                <a16:creationId xmlns:a16="http://schemas.microsoft.com/office/drawing/2014/main" id="{6D24271E-5C05-4A92-B58C-56766A536E51}"/>
+                <a16:creationId xmlns:a16="http://schemas.microsoft.com/office/drawing/2014/main" id="{1F530DC7-91D6-40A2-B3CC-45CFB68C42BE}"/>
               </a:ext>
             </a:extLst>
           </p:cNvPr>
@@ -2111,7 +2111,7 @@
           <p:cNvPr id="10" name="">
             <a:extLst xmlns:a="http://schemas.openxmlformats.org/drawingml/2006/main">
               <a:ext uri="{FF2B5EF4-FFF2-40B4-BE49-F238E27FC236}">
-                <a16:creationId xmlns:a16="http://schemas.microsoft.com/office/drawing/2014/main" id="{4F3F0298-F044-460C-BE96-456671A18B4B}"/>
+                <a16:creationId xmlns:a16="http://schemas.microsoft.com/office/drawing/2014/main" id="{00CBAA62-1412-4601-857A-7B712EF4385D}"/>
               </a:ext>
             </a:extLst>
           </p:cNvPr>
@@ -2141,7 +2141,7 @@
           <p:cNvPr id="11" name="">
             <a:extLst xmlns:a="http://schemas.openxmlformats.org/drawingml/2006/main">
               <a:ext uri="{FF2B5EF4-FFF2-40B4-BE49-F238E27FC236}">
-                <a16:creationId xmlns:a16="http://schemas.microsoft.com/office/drawing/2014/main" id="{BE6C887C-7965-40F7-A394-7ED19EF8F95F}"/>
+                <a16:creationId xmlns:a16="http://schemas.microsoft.com/office/drawing/2014/main" id="{41804227-5DAB-4510-B75D-1D481F0A56A7}"/>
               </a:ext>
             </a:extLst>
           </p:cNvPr>
@@ -2198,7 +2198,7 @@
           <p:cNvPr id="12" name="">
             <a:extLst xmlns:a="http://schemas.openxmlformats.org/drawingml/2006/main">
               <a:ext uri="{FF2B5EF4-FFF2-40B4-BE49-F238E27FC236}">
-                <a16:creationId xmlns:a16="http://schemas.microsoft.com/office/drawing/2014/main" id="{E411ED92-44DA-4A0D-B627-FF6AB43C9A3C}"/>
+                <a16:creationId xmlns:a16="http://schemas.microsoft.com/office/drawing/2014/main" id="{5DFC9221-0F0B-42FA-ABD9-206201058D10}"/>
               </a:ext>
             </a:extLst>
           </p:cNvPr>
@@ -2228,7 +2228,7 @@
           <p:cNvPr id="13" name="">
             <a:extLst xmlns:a="http://schemas.openxmlformats.org/drawingml/2006/main">
               <a:ext uri="{FF2B5EF4-FFF2-40B4-BE49-F238E27FC236}">
-                <a16:creationId xmlns:a16="http://schemas.microsoft.com/office/drawing/2014/main" id="{A76AAB69-E970-471A-89D6-61020611F0B1}"/>
+                <a16:creationId xmlns:a16="http://schemas.microsoft.com/office/drawing/2014/main" id="{BC44E413-47F6-4071-AAE4-B8CB8B468A31}"/>
               </a:ext>
             </a:extLst>
           </p:cNvPr>
@@ -2285,7 +2285,7 @@
           <p:cNvPr id="14" name="">
             <a:extLst xmlns:a="http://schemas.openxmlformats.org/drawingml/2006/main">
               <a:ext uri="{FF2B5EF4-FFF2-40B4-BE49-F238E27FC236}">
-                <a16:creationId xmlns:a16="http://schemas.microsoft.com/office/drawing/2014/main" id="{C3EC1DFE-1783-4953-8984-48FE88CC393D}"/>
+                <a16:creationId xmlns:a16="http://schemas.microsoft.com/office/drawing/2014/main" id="{75C05846-EE6E-403B-97F4-DFCE796BEB28}"/>
               </a:ext>
             </a:extLst>
           </p:cNvPr>
@@ -2315,7 +2315,7 @@
           <p:cNvPr id="15" name="">
             <a:extLst xmlns:a="http://schemas.openxmlformats.org/drawingml/2006/main">
               <a:ext uri="{FF2B5EF4-FFF2-40B4-BE49-F238E27FC236}">
-                <a16:creationId xmlns:a16="http://schemas.microsoft.com/office/drawing/2014/main" id="{D179C29D-35C5-4A78-8803-777DB8FE9703}"/>
+                <a16:creationId xmlns:a16="http://schemas.microsoft.com/office/drawing/2014/main" id="{93D0D044-8715-4050-9EA9-00ACC167A176}"/>
               </a:ext>
             </a:extLst>
           </p:cNvPr>
@@ -2372,7 +2372,7 @@
           <p:cNvPr id="16" name="">
             <a:extLst xmlns:a="http://schemas.openxmlformats.org/drawingml/2006/main">
               <a:ext uri="{FF2B5EF4-FFF2-40B4-BE49-F238E27FC236}">
-                <a16:creationId xmlns:a16="http://schemas.microsoft.com/office/drawing/2014/main" id="{96D4F473-D2C3-4AD1-9BC0-3358B788AD10}"/>
+                <a16:creationId xmlns:a16="http://schemas.microsoft.com/office/drawing/2014/main" id="{CB75BEE4-0593-409B-9E21-9E7FC66FA740}"/>
               </a:ext>
             </a:extLst>
           </p:cNvPr>
@@ -2402,7 +2402,7 @@
           <p:cNvPr id="17" name="">
             <a:extLst xmlns:a="http://schemas.openxmlformats.org/drawingml/2006/main">
               <a:ext uri="{FF2B5EF4-FFF2-40B4-BE49-F238E27FC236}">
-                <a16:creationId xmlns:a16="http://schemas.microsoft.com/office/drawing/2014/main" id="{FFC08EF5-45EA-4E93-A185-D37C7354E6CD}"/>
+                <a16:creationId xmlns:a16="http://schemas.microsoft.com/office/drawing/2014/main" id="{C938962F-7B60-437E-B169-BFB2BBD278F9}"/>
               </a:ext>
             </a:extLst>
           </p:cNvPr>
@@ -2459,7 +2459,7 @@
           <p:cNvPr id="18" name="">
             <a:extLst xmlns:a="http://schemas.openxmlformats.org/drawingml/2006/main">
               <a:ext uri="{FF2B5EF4-FFF2-40B4-BE49-F238E27FC236}">
-                <a16:creationId xmlns:a16="http://schemas.microsoft.com/office/drawing/2014/main" id="{430DED9F-9250-4802-BCA7-A5E3DFD99759}"/>
+                <a16:creationId xmlns:a16="http://schemas.microsoft.com/office/drawing/2014/main" id="{6E6C7CE2-3BCF-407B-86DA-D6283D3C1887}"/>
               </a:ext>
             </a:extLst>
           </p:cNvPr>
@@ -2489,7 +2489,7 @@
           <p:cNvPr id="19" name="">
             <a:extLst xmlns:a="http://schemas.openxmlformats.org/drawingml/2006/main">
               <a:ext uri="{FF2B5EF4-FFF2-40B4-BE49-F238E27FC236}">
-                <a16:creationId xmlns:a16="http://schemas.microsoft.com/office/drawing/2014/main" id="{2B8ABD1A-4A73-4B46-B3A4-A8AC09FD6C80}"/>
+                <a16:creationId xmlns:a16="http://schemas.microsoft.com/office/drawing/2014/main" id="{1969EA0E-8499-49C6-933C-DA407D06A8B7}"/>
               </a:ext>
             </a:extLst>
           </p:cNvPr>
@@ -2546,7 +2546,7 @@
           <p:cNvPr id="20" name="">
             <a:extLst xmlns:a="http://schemas.openxmlformats.org/drawingml/2006/main">
               <a:ext uri="{FF2B5EF4-FFF2-40B4-BE49-F238E27FC236}">
-                <a16:creationId xmlns:a16="http://schemas.microsoft.com/office/drawing/2014/main" id="{5125B60F-C36A-4DB9-B9FA-3DA4D464358B}"/>
+                <a16:creationId xmlns:a16="http://schemas.microsoft.com/office/drawing/2014/main" id="{40000280-E197-4055-AE0E-E01E123100FE}"/>
               </a:ext>
             </a:extLst>
           </p:cNvPr>
@@ -2601,7 +2601,7 @@
     </p:spTree>
     <p:extLst>
       <p:ext uri="{BB962C8B-B14F-4D97-AF65-F5344CB8AC3E}">
-        <p14:creationId xmlns:p14="http://schemas.microsoft.com/office/powerpoint/2010/main" val="511959745"/>
+        <p14:creationId xmlns:p14="http://schemas.microsoft.com/office/powerpoint/2010/main" val="1566217843"/>
       </p:ext>
     </p:extLst>
   </p:cSld>
@@ -2632,19 +2632,19 @@
           <p:cNvPr id="21" name="">
             <a:extLst xmlns:a="http://schemas.openxmlformats.org/drawingml/2006/main">
               <a:ext uri="{FF2B5EF4-FFF2-40B4-BE49-F238E27FC236}">
-                <a16:creationId xmlns:a16="http://schemas.microsoft.com/office/drawing/2014/main" id="{F102F08F-FCEC-440E-BABF-14DCE9C44B8C}"/>
-              </a:ext>
-            </a:extLst>
-          </p:cNvPr>
-          <p:cNvSpPr>
-            <a:spLocks xmlns:a="http://schemas.openxmlformats.org/drawingml/2006/main" noGrp="1"/>
-          </p:cNvSpPr>
-          <p:nvPr/>
-        </p:nvSpPr>
-        <p:spPr>
-          <a:xfrm xmlns:a="http://schemas.openxmlformats.org/drawingml/2006/main">
-            <a:off x="552450" y="333375"/>
-            <a:ext cx="11049000" cy="857250"/>
+                <a16:creationId xmlns:a16="http://schemas.microsoft.com/office/drawing/2014/main" id="{2D4C8C03-3A8C-4D33-806A-16F08E1127F0}"/>
+              </a:ext>
+            </a:extLst>
+          </p:cNvPr>
+          <p:cNvSpPr>
+            <a:spLocks xmlns:a="http://schemas.openxmlformats.org/drawingml/2006/main" noGrp="1"/>
+          </p:cNvSpPr>
+          <p:nvPr/>
+        </p:nvSpPr>
+        <p:spPr>
+          <a:xfrm xmlns:a="http://schemas.openxmlformats.org/drawingml/2006/main">
+            <a:off x="552450" y="266700"/>
+            <a:ext cx="11049000" cy="742950"/>
           </a:xfrm>
           <a:prstGeom xmlns:a="http://schemas.openxmlformats.org/drawingml/2006/main" prst="rect">
             <a:avLst/>
@@ -2655,13 +2655,13 @@
           </a:ln>
         </p:spPr>
         <p:txBody>
-          <a:bodyPr xmlns:a="http://schemas.openxmlformats.org/drawingml/2006/main">
+          <a:bodyPr xmlns:a="http://schemas.openxmlformats.org/drawingml/2006/main" anchor="ctr">
             <a:noAutofit/>
           </a:bodyPr>
           <a:lstStyle xmlns:a="http://schemas.openxmlformats.org/drawingml/2006/main"/>
           <a:p xmlns:a="http://schemas.openxmlformats.org/drawingml/2006/main">
-            <a:pPr>
-              <a:defRPr sz="3150" b="1">
+            <a:pPr algn="l">
+              <a:defRPr sz="2700" b="1">
                 <a:solidFill>
                   <a:srgbClr val="161616"/>
                 </a:solidFill>
@@ -2671,7 +2671,7 @@
               </a:defRPr>
             </a:pPr>
             <a:r>
-              <a:rPr sz="3150" b="1">
+              <a:rPr sz="2700" b="1">
                 <a:solidFill>
                   <a:srgbClr val="161616"/>
                 </a:solidFill>
@@ -2689,7 +2689,7 @@
           <p:cNvPr id="2" name="">
             <a:extLst xmlns:a="http://schemas.openxmlformats.org/drawingml/2006/main">
               <a:ext uri="{FF2B5EF4-FFF2-40B4-BE49-F238E27FC236}">
-                <a16:creationId xmlns:a16="http://schemas.microsoft.com/office/drawing/2014/main" id="{7A264605-C5E6-4636-9981-6D6CE3A63979}"/>
+                <a16:creationId xmlns:a16="http://schemas.microsoft.com/office/drawing/2014/main" id="{3DCEF8D5-1BFB-4F1C-9CC9-CA073997F12A}"/>
               </a:ext>
             </a:extLst>
           </p:cNvPr>
@@ -2742,7 +2742,7 @@
           <p:cNvPr id="3" name="">
             <a:extLst xmlns:a="http://schemas.openxmlformats.org/drawingml/2006/main">
               <a:ext uri="{FF2B5EF4-FFF2-40B4-BE49-F238E27FC236}">
-                <a16:creationId xmlns:a16="http://schemas.microsoft.com/office/drawing/2014/main" id="{C5E54D82-B2CC-406E-9A7D-24C58EA02AD3}"/>
+                <a16:creationId xmlns:a16="http://schemas.microsoft.com/office/drawing/2014/main" id="{13158C77-AA88-486A-BCCE-0736CC79B701}"/>
               </a:ext>
             </a:extLst>
           </p:cNvPr>
@@ -2771,7 +2771,7 @@
           <p:cNvPr id="4" name="">
             <a:extLst xmlns:a="http://schemas.openxmlformats.org/drawingml/2006/main">
               <a:ext uri="{FF2B5EF4-FFF2-40B4-BE49-F238E27FC236}">
-                <a16:creationId xmlns:a16="http://schemas.microsoft.com/office/drawing/2014/main" id="{193BF334-B505-4E46-9A46-851C4A386262}"/>
+                <a16:creationId xmlns:a16="http://schemas.microsoft.com/office/drawing/2014/main" id="{64B1FDF2-3CE5-443F-954C-6F0968F88E99}"/>
               </a:ext>
             </a:extLst>
           </p:cNvPr>
@@ -2824,7 +2824,7 @@
           <p:cNvPr id="5" name="">
             <a:extLst xmlns:a="http://schemas.openxmlformats.org/drawingml/2006/main">
               <a:ext uri="{FF2B5EF4-FFF2-40B4-BE49-F238E27FC236}">
-                <a16:creationId xmlns:a16="http://schemas.microsoft.com/office/drawing/2014/main" id="{908A4055-36C0-453B-A6AE-EB09C992D24A}"/>
+                <a16:creationId xmlns:a16="http://schemas.microsoft.com/office/drawing/2014/main" id="{004C9D5E-654A-47FB-B1D4-F924A100CE28}"/>
               </a:ext>
             </a:extLst>
           </p:cNvPr>
@@ -2853,7 +2853,7 @@
           <p:cNvPr id="6" name="">
             <a:extLst xmlns:a="http://schemas.openxmlformats.org/drawingml/2006/main">
               <a:ext uri="{FF2B5EF4-FFF2-40B4-BE49-F238E27FC236}">
-                <a16:creationId xmlns:a16="http://schemas.microsoft.com/office/drawing/2014/main" id="{00992C9B-7698-445D-AFB7-6153837AF01A}"/>
+                <a16:creationId xmlns:a16="http://schemas.microsoft.com/office/drawing/2014/main" id="{6CB619CE-4462-45C5-A923-013B0D825025}"/>
               </a:ext>
             </a:extLst>
           </p:cNvPr>
@@ -2906,7 +2906,7 @@
           <p:cNvPr id="7" name="">
             <a:extLst xmlns:a="http://schemas.openxmlformats.org/drawingml/2006/main">
               <a:ext uri="{FF2B5EF4-FFF2-40B4-BE49-F238E27FC236}">
-                <a16:creationId xmlns:a16="http://schemas.microsoft.com/office/drawing/2014/main" id="{A634C02E-6AAE-486C-91DE-75F97DEB8504}"/>
+                <a16:creationId xmlns:a16="http://schemas.microsoft.com/office/drawing/2014/main" id="{F2D792CA-2113-4434-9103-73F19298B0A7}"/>
               </a:ext>
             </a:extLst>
           </p:cNvPr>
@@ -2935,7 +2935,7 @@
           <p:cNvPr id="8" name="">
             <a:extLst xmlns:a="http://schemas.openxmlformats.org/drawingml/2006/main">
               <a:ext uri="{FF2B5EF4-FFF2-40B4-BE49-F238E27FC236}">
-                <a16:creationId xmlns:a16="http://schemas.microsoft.com/office/drawing/2014/main" id="{70E753F9-CFB8-4462-9F0E-9B0BEDF63B46}"/>
+                <a16:creationId xmlns:a16="http://schemas.microsoft.com/office/drawing/2014/main" id="{46492849-11FC-4323-88CF-AA7C29C95095}"/>
               </a:ext>
             </a:extLst>
           </p:cNvPr>
@@ -2988,7 +2988,7 @@
           <p:cNvPr id="9" name="">
             <a:extLst xmlns:a="http://schemas.openxmlformats.org/drawingml/2006/main">
               <a:ext uri="{FF2B5EF4-FFF2-40B4-BE49-F238E27FC236}">
-                <a16:creationId xmlns:a16="http://schemas.microsoft.com/office/drawing/2014/main" id="{A88B0503-DBF0-49FA-9A99-A4E73DD64C83}"/>
+                <a16:creationId xmlns:a16="http://schemas.microsoft.com/office/drawing/2014/main" id="{723E73FE-E5DB-44D5-A988-6CDFEB7403C0}"/>
               </a:ext>
             </a:extLst>
           </p:cNvPr>
@@ -3017,7 +3017,7 @@
           <p:cNvPr id="10" name="">
             <a:extLst xmlns:a="http://schemas.openxmlformats.org/drawingml/2006/main">
               <a:ext uri="{FF2B5EF4-FFF2-40B4-BE49-F238E27FC236}">
-                <a16:creationId xmlns:a16="http://schemas.microsoft.com/office/drawing/2014/main" id="{FC3EFE8D-8984-4F0B-9DC7-A10362444713}"/>
+                <a16:creationId xmlns:a16="http://schemas.microsoft.com/office/drawing/2014/main" id="{E79241D4-FB6A-45F0-88FC-25B9ECF7E0E7}"/>
               </a:ext>
             </a:extLst>
           </p:cNvPr>
@@ -3047,7 +3047,7 @@
           <p:cNvPr id="11" name="">
             <a:extLst xmlns:a="http://schemas.openxmlformats.org/drawingml/2006/main">
               <a:ext uri="{FF2B5EF4-FFF2-40B4-BE49-F238E27FC236}">
-                <a16:creationId xmlns:a16="http://schemas.microsoft.com/office/drawing/2014/main" id="{9E52CA73-7E1F-472A-80E5-2E487685C45B}"/>
+                <a16:creationId xmlns:a16="http://schemas.microsoft.com/office/drawing/2014/main" id="{08CC0646-2D73-4956-9015-1BB14B33876C}"/>
               </a:ext>
             </a:extLst>
           </p:cNvPr>
@@ -3104,7 +3104,7 @@
           <p:cNvPr id="12" name="">
             <a:extLst xmlns:a="http://schemas.openxmlformats.org/drawingml/2006/main">
               <a:ext uri="{FF2B5EF4-FFF2-40B4-BE49-F238E27FC236}">
-                <a16:creationId xmlns:a16="http://schemas.microsoft.com/office/drawing/2014/main" id="{FBFC9E3A-603E-48F8-852D-B410806218BE}"/>
+                <a16:creationId xmlns:a16="http://schemas.microsoft.com/office/drawing/2014/main" id="{8D5A142E-250D-4C45-BC9A-EE89F60A148A}"/>
               </a:ext>
             </a:extLst>
           </p:cNvPr>
@@ -3134,7 +3134,7 @@
           <p:cNvPr id="13" name="">
             <a:extLst xmlns:a="http://schemas.openxmlformats.org/drawingml/2006/main">
               <a:ext uri="{FF2B5EF4-FFF2-40B4-BE49-F238E27FC236}">
-                <a16:creationId xmlns:a16="http://schemas.microsoft.com/office/drawing/2014/main" id="{DDE30CE1-9B1B-401C-83EC-CBC06F9E66FE}"/>
+                <a16:creationId xmlns:a16="http://schemas.microsoft.com/office/drawing/2014/main" id="{79F16F68-A036-4C24-A6BE-72BB1259A935}"/>
               </a:ext>
             </a:extLst>
           </p:cNvPr>
@@ -3191,7 +3191,7 @@
           <p:cNvPr id="14" name="">
             <a:extLst xmlns:a="http://schemas.openxmlformats.org/drawingml/2006/main">
               <a:ext uri="{FF2B5EF4-FFF2-40B4-BE49-F238E27FC236}">
-                <a16:creationId xmlns:a16="http://schemas.microsoft.com/office/drawing/2014/main" id="{4E757D74-C3D1-4843-BC48-BDFCB0D7036E}"/>
+                <a16:creationId xmlns:a16="http://schemas.microsoft.com/office/drawing/2014/main" id="{7957AAA6-15F4-4114-8143-1063E9E9B02C}"/>
               </a:ext>
             </a:extLst>
           </p:cNvPr>
@@ -3221,7 +3221,7 @@
           <p:cNvPr id="15" name="">
             <a:extLst xmlns:a="http://schemas.openxmlformats.org/drawingml/2006/main">
               <a:ext uri="{FF2B5EF4-FFF2-40B4-BE49-F238E27FC236}">
-                <a16:creationId xmlns:a16="http://schemas.microsoft.com/office/drawing/2014/main" id="{3F97E6A2-6CC1-42B9-B3CA-A04AB238125E}"/>
+                <a16:creationId xmlns:a16="http://schemas.microsoft.com/office/drawing/2014/main" id="{E7BD7052-EF57-4329-B63A-0C59EABB558A}"/>
               </a:ext>
             </a:extLst>
           </p:cNvPr>
@@ -3278,7 +3278,7 @@
           <p:cNvPr id="16" name="">
             <a:extLst xmlns:a="http://schemas.openxmlformats.org/drawingml/2006/main">
               <a:ext uri="{FF2B5EF4-FFF2-40B4-BE49-F238E27FC236}">
-                <a16:creationId xmlns:a16="http://schemas.microsoft.com/office/drawing/2014/main" id="{B6E41DD6-D5BB-43AB-9DA4-9C233F857B56}"/>
+                <a16:creationId xmlns:a16="http://schemas.microsoft.com/office/drawing/2014/main" id="{5F26E3C3-A9DC-4B6D-AE69-C3C40B17EA77}"/>
               </a:ext>
             </a:extLst>
           </p:cNvPr>
@@ -3308,7 +3308,7 @@
           <p:cNvPr id="17" name="">
             <a:extLst xmlns:a="http://schemas.openxmlformats.org/drawingml/2006/main">
               <a:ext uri="{FF2B5EF4-FFF2-40B4-BE49-F238E27FC236}">
-                <a16:creationId xmlns:a16="http://schemas.microsoft.com/office/drawing/2014/main" id="{BA772FCC-0ADA-4ADD-B62E-B80A2B68B424}"/>
+                <a16:creationId xmlns:a16="http://schemas.microsoft.com/office/drawing/2014/main" id="{3A05D7C3-D6C8-4828-BD9F-8F023E64DE76}"/>
               </a:ext>
             </a:extLst>
           </p:cNvPr>
@@ -3365,7 +3365,7 @@
           <p:cNvPr id="18" name="">
             <a:extLst xmlns:a="http://schemas.openxmlformats.org/drawingml/2006/main">
               <a:ext uri="{FF2B5EF4-FFF2-40B4-BE49-F238E27FC236}">
-                <a16:creationId xmlns:a16="http://schemas.microsoft.com/office/drawing/2014/main" id="{982373C7-D512-4389-9940-218B88BCDAAE}"/>
+                <a16:creationId xmlns:a16="http://schemas.microsoft.com/office/drawing/2014/main" id="{354067F3-08C8-4D85-BE9E-397BBEE94743}"/>
               </a:ext>
             </a:extLst>
           </p:cNvPr>
@@ -3395,7 +3395,7 @@
           <p:cNvPr id="19" name="">
             <a:extLst xmlns:a="http://schemas.openxmlformats.org/drawingml/2006/main">
               <a:ext uri="{FF2B5EF4-FFF2-40B4-BE49-F238E27FC236}">
-                <a16:creationId xmlns:a16="http://schemas.microsoft.com/office/drawing/2014/main" id="{611222F8-FE63-4478-925F-7CA4E1754679}"/>
+                <a16:creationId xmlns:a16="http://schemas.microsoft.com/office/drawing/2014/main" id="{1F6FD0A4-40BD-4558-AA1B-988ABCDD5005}"/>
               </a:ext>
             </a:extLst>
           </p:cNvPr>
@@ -3452,7 +3452,7 @@
           <p:cNvPr id="20" name="">
             <a:extLst xmlns:a="http://schemas.openxmlformats.org/drawingml/2006/main">
               <a:ext uri="{FF2B5EF4-FFF2-40B4-BE49-F238E27FC236}">
-                <a16:creationId xmlns:a16="http://schemas.microsoft.com/office/drawing/2014/main" id="{96315A2A-E510-4651-92B1-5D89DF8F67DC}"/>
+                <a16:creationId xmlns:a16="http://schemas.microsoft.com/office/drawing/2014/main" id="{76237A29-2434-484D-B292-FD5CFE2CA25F}"/>
               </a:ext>
             </a:extLst>
           </p:cNvPr>
@@ -3507,7 +3507,7 @@
     </p:spTree>
     <p:extLst>
       <p:ext uri="{BB962C8B-B14F-4D97-AF65-F5344CB8AC3E}">
-        <p14:creationId xmlns:p14="http://schemas.microsoft.com/office/powerpoint/2010/main" val="2088531491"/>
+        <p14:creationId xmlns:p14="http://schemas.microsoft.com/office/powerpoint/2010/main" val="1970608996"/>
       </p:ext>
     </p:extLst>
   </p:cSld>
@@ -3538,19 +3538,19 @@
           <p:cNvPr id="3" name="">
             <a:extLst xmlns:a="http://schemas.openxmlformats.org/drawingml/2006/main">
               <a:ext uri="{FF2B5EF4-FFF2-40B4-BE49-F238E27FC236}">
-                <a16:creationId xmlns:a16="http://schemas.microsoft.com/office/drawing/2014/main" id="{784E3E2A-4EB9-4864-BF6E-859B08252AEC}"/>
-              </a:ext>
-            </a:extLst>
-          </p:cNvPr>
-          <p:cNvSpPr>
-            <a:spLocks xmlns:a="http://schemas.openxmlformats.org/drawingml/2006/main" noGrp="1"/>
-          </p:cNvSpPr>
-          <p:nvPr/>
-        </p:nvSpPr>
-        <p:spPr>
-          <a:xfrm xmlns:a="http://schemas.openxmlformats.org/drawingml/2006/main">
-            <a:off x="552450" y="333375"/>
-            <a:ext cx="11049000" cy="857250"/>
+                <a16:creationId xmlns:a16="http://schemas.microsoft.com/office/drawing/2014/main" id="{17F39BA5-1E4C-4B80-93C7-6F6EF249C39C}"/>
+              </a:ext>
+            </a:extLst>
+          </p:cNvPr>
+          <p:cNvSpPr>
+            <a:spLocks xmlns:a="http://schemas.openxmlformats.org/drawingml/2006/main" noGrp="1"/>
+          </p:cNvSpPr>
+          <p:nvPr/>
+        </p:nvSpPr>
+        <p:spPr>
+          <a:xfrm xmlns:a="http://schemas.openxmlformats.org/drawingml/2006/main">
+            <a:off x="552450" y="266700"/>
+            <a:ext cx="11049000" cy="742950"/>
           </a:xfrm>
           <a:prstGeom xmlns:a="http://schemas.openxmlformats.org/drawingml/2006/main" prst="rect">
             <a:avLst/>
@@ -3561,13 +3561,13 @@
           </a:ln>
         </p:spPr>
         <p:txBody>
-          <a:bodyPr xmlns:a="http://schemas.openxmlformats.org/drawingml/2006/main">
+          <a:bodyPr xmlns:a="http://schemas.openxmlformats.org/drawingml/2006/main" anchor="ctr">
             <a:noAutofit/>
           </a:bodyPr>
           <a:lstStyle xmlns:a="http://schemas.openxmlformats.org/drawingml/2006/main"/>
           <a:p xmlns:a="http://schemas.openxmlformats.org/drawingml/2006/main">
-            <a:pPr>
-              <a:defRPr sz="3150" b="1">
+            <a:pPr algn="l">
+              <a:defRPr sz="2700" b="1">
                 <a:solidFill>
                   <a:srgbClr val="161616"/>
                 </a:solidFill>
@@ -3577,7 +3577,7 @@
               </a:defRPr>
             </a:pPr>
             <a:r>
-              <a:rPr sz="3150" b="1">
+              <a:rPr sz="2700" b="1">
                 <a:solidFill>
                   <a:srgbClr val="161616"/>
                 </a:solidFill>
@@ -3796,7 +3796,7 @@
                           <a:ea typeface="Arial"/>
                           <a:cs typeface="Arial"/>
                         </a:rPr>
-                        <a:t>BOM и массовая замена</a:t>
+                        <a:t>модельный ряд и массовая замена</a:t>
                       </a:r>
                     </a:p>
                   </a:txBody>
@@ -4060,7 +4060,7 @@
     </p:spTree>
     <p:extLst>
       <p:ext uri="{BB962C8B-B14F-4D97-AF65-F5344CB8AC3E}">
-        <p14:creationId xmlns:p14="http://schemas.microsoft.com/office/powerpoint/2010/main" val="1535324018"/>
+        <p14:creationId xmlns:p14="http://schemas.microsoft.com/office/powerpoint/2010/main" val="80720"/>
       </p:ext>
     </p:extLst>
   </p:cSld>
@@ -4091,19 +4091,19 @@
           <p:cNvPr id="3" name="">
             <a:extLst xmlns:a="http://schemas.openxmlformats.org/drawingml/2006/main">
               <a:ext uri="{FF2B5EF4-FFF2-40B4-BE49-F238E27FC236}">
-                <a16:creationId xmlns:a16="http://schemas.microsoft.com/office/drawing/2014/main" id="{8B82D11C-9183-4B4C-82E1-0C8DD08714E9}"/>
-              </a:ext>
-            </a:extLst>
-          </p:cNvPr>
-          <p:cNvSpPr>
-            <a:spLocks xmlns:a="http://schemas.openxmlformats.org/drawingml/2006/main" noGrp="1"/>
-          </p:cNvSpPr>
-          <p:nvPr/>
-        </p:nvSpPr>
-        <p:spPr>
-          <a:xfrm xmlns:a="http://schemas.openxmlformats.org/drawingml/2006/main">
-            <a:off x="552450" y="333375"/>
-            <a:ext cx="11049000" cy="857250"/>
+                <a16:creationId xmlns:a16="http://schemas.microsoft.com/office/drawing/2014/main" id="{CB3EA5DD-9BF7-4573-9212-04B66560F407}"/>
+              </a:ext>
+            </a:extLst>
+          </p:cNvPr>
+          <p:cNvSpPr>
+            <a:spLocks xmlns:a="http://schemas.openxmlformats.org/drawingml/2006/main" noGrp="1"/>
+          </p:cNvSpPr>
+          <p:nvPr/>
+        </p:nvSpPr>
+        <p:spPr>
+          <a:xfrm xmlns:a="http://schemas.openxmlformats.org/drawingml/2006/main">
+            <a:off x="552450" y="266700"/>
+            <a:ext cx="11049000" cy="742950"/>
           </a:xfrm>
           <a:prstGeom xmlns:a="http://schemas.openxmlformats.org/drawingml/2006/main" prst="rect">
             <a:avLst/>
@@ -4114,13 +4114,13 @@
           </a:ln>
         </p:spPr>
         <p:txBody>
-          <a:bodyPr xmlns:a="http://schemas.openxmlformats.org/drawingml/2006/main">
+          <a:bodyPr xmlns:a="http://schemas.openxmlformats.org/drawingml/2006/main" anchor="ctr">
             <a:noAutofit/>
           </a:bodyPr>
           <a:lstStyle xmlns:a="http://schemas.openxmlformats.org/drawingml/2006/main"/>
           <a:p xmlns:a="http://schemas.openxmlformats.org/drawingml/2006/main">
-            <a:pPr>
-              <a:defRPr sz="3150" b="1">
+            <a:pPr algn="l">
+              <a:defRPr sz="2700" b="1">
                 <a:solidFill>
                   <a:srgbClr val="161616"/>
                 </a:solidFill>
@@ -4130,7 +4130,7 @@
               </a:defRPr>
             </a:pPr>
             <a:r>
-              <a:rPr sz="3150" b="1">
+              <a:rPr sz="2700" b="1">
                 <a:solidFill>
                   <a:srgbClr val="161616"/>
                 </a:solidFill>
@@ -4226,7 +4226,7 @@
                           <a:ea typeface="Arial"/>
                           <a:cs typeface="Arial"/>
                         </a:rPr>
-                        <a:t>Временный отказ</a:t>
+                        <a:t>Временный отказ: операция не принята</a:t>
                       </a:r>
                     </a:p>
                   </a:txBody>
@@ -4250,7 +4250,7 @@
                           <a:ea typeface="Arial"/>
                           <a:cs typeface="Arial"/>
                         </a:rPr>
-                        <a:t>Ограниченный повтор, не больше трёх</a:t>
+                        <a:t>До трёх повторов актуальной версии</a:t>
                       </a:r>
                     </a:p>
                   </a:txBody>
@@ -4300,7 +4300,7 @@
                           <a:ea typeface="Arial"/>
                           <a:cs typeface="Arial"/>
                         </a:rPr>
-                        <a:t>UNCERTAIN и сверка</a:t>
+                        <a:t>UNCERTAIN и сверка до решения</a:t>
                       </a:r>
                     </a:p>
                   </a:txBody>
@@ -4418,7 +4418,7 @@
     </p:spTree>
     <p:extLst>
       <p:ext uri="{BB962C8B-B14F-4D97-AF65-F5344CB8AC3E}">
-        <p14:creationId xmlns:p14="http://schemas.microsoft.com/office/powerpoint/2010/main" val="1671583879"/>
+        <p14:creationId xmlns:p14="http://schemas.microsoft.com/office/powerpoint/2010/main" val="57975275"/>
       </p:ext>
     </p:extLst>
   </p:cSld>
@@ -4449,19 +4449,19 @@
           <p:cNvPr id="6" name="">
             <a:extLst xmlns:a="http://schemas.openxmlformats.org/drawingml/2006/main">
               <a:ext uri="{FF2B5EF4-FFF2-40B4-BE49-F238E27FC236}">
-                <a16:creationId xmlns:a16="http://schemas.microsoft.com/office/drawing/2014/main" id="{F4653AC8-9C55-4C70-B12B-4AFED1737B07}"/>
-              </a:ext>
-            </a:extLst>
-          </p:cNvPr>
-          <p:cNvSpPr>
-            <a:spLocks xmlns:a="http://schemas.openxmlformats.org/drawingml/2006/main" noGrp="1"/>
-          </p:cNvSpPr>
-          <p:nvPr/>
-        </p:nvSpPr>
-        <p:spPr>
-          <a:xfrm xmlns:a="http://schemas.openxmlformats.org/drawingml/2006/main">
-            <a:off x="552450" y="333375"/>
-            <a:ext cx="11049000" cy="857250"/>
+                <a16:creationId xmlns:a16="http://schemas.microsoft.com/office/drawing/2014/main" id="{CD75C6BB-3392-4101-A21E-1CBD6F59F6DA}"/>
+              </a:ext>
+            </a:extLst>
+          </p:cNvPr>
+          <p:cNvSpPr>
+            <a:spLocks xmlns:a="http://schemas.openxmlformats.org/drawingml/2006/main" noGrp="1"/>
+          </p:cNvSpPr>
+          <p:nvPr/>
+        </p:nvSpPr>
+        <p:spPr>
+          <a:xfrm xmlns:a="http://schemas.openxmlformats.org/drawingml/2006/main">
+            <a:off x="552450" y="266700"/>
+            <a:ext cx="11049000" cy="742950"/>
           </a:xfrm>
           <a:prstGeom xmlns:a="http://schemas.openxmlformats.org/drawingml/2006/main" prst="rect">
             <a:avLst/>
@@ -4472,13 +4472,13 @@
           </a:ln>
         </p:spPr>
         <p:txBody>
-          <a:bodyPr xmlns:a="http://schemas.openxmlformats.org/drawingml/2006/main">
+          <a:bodyPr xmlns:a="http://schemas.openxmlformats.org/drawingml/2006/main" anchor="ctr">
             <a:noAutofit/>
           </a:bodyPr>
           <a:lstStyle xmlns:a="http://schemas.openxmlformats.org/drawingml/2006/main"/>
           <a:p xmlns:a="http://schemas.openxmlformats.org/drawingml/2006/main">
-            <a:pPr>
-              <a:defRPr sz="3150" b="1">
+            <a:pPr algn="l">
+              <a:defRPr sz="2700" b="1">
                 <a:solidFill>
                   <a:srgbClr val="161616"/>
                 </a:solidFill>
@@ -4488,7 +4488,7 @@
               </a:defRPr>
             </a:pPr>
             <a:r>
-              <a:rPr sz="3150" b="1">
+              <a:rPr sz="2700" b="1">
                 <a:solidFill>
                   <a:srgbClr val="161616"/>
                 </a:solidFill>
@@ -4506,7 +4506,7 @@
           <p:cNvPr id="2" name="">
             <a:extLst xmlns:a="http://schemas.openxmlformats.org/drawingml/2006/main">
               <a:ext uri="{FF2B5EF4-FFF2-40B4-BE49-F238E27FC236}">
-                <a16:creationId xmlns:a16="http://schemas.microsoft.com/office/drawing/2014/main" id="{E61262DD-0EC4-464C-B593-09E53B72507A}"/>
+                <a16:creationId xmlns:a16="http://schemas.microsoft.com/office/drawing/2014/main" id="{5455C53B-FBCC-4C01-B497-ACD504D7B750}"/>
               </a:ext>
             </a:extLst>
           </p:cNvPr>
@@ -4563,7 +4563,7 @@
           <p:cNvPr id="3" name="">
             <a:extLst xmlns:a="http://schemas.openxmlformats.org/drawingml/2006/main">
               <a:ext uri="{FF2B5EF4-FFF2-40B4-BE49-F238E27FC236}">
-                <a16:creationId xmlns:a16="http://schemas.microsoft.com/office/drawing/2014/main" id="{0572BC15-5197-49ED-908C-6045485E60FD}"/>
+                <a16:creationId xmlns:a16="http://schemas.microsoft.com/office/drawing/2014/main" id="{916AFC91-9137-4B84-A29E-717E22DD1248}"/>
               </a:ext>
             </a:extLst>
           </p:cNvPr>
@@ -4620,7 +4620,7 @@
           <p:cNvPr id="4" name="">
             <a:extLst xmlns:a="http://schemas.openxmlformats.org/drawingml/2006/main">
               <a:ext uri="{FF2B5EF4-FFF2-40B4-BE49-F238E27FC236}">
-                <a16:creationId xmlns:a16="http://schemas.microsoft.com/office/drawing/2014/main" id="{50A802ED-B193-4DB6-A800-F8C0EB297532}"/>
+                <a16:creationId xmlns:a16="http://schemas.microsoft.com/office/drawing/2014/main" id="{8FA128F9-F668-4A87-A2EF-19B57F823825}"/>
               </a:ext>
             </a:extLst>
           </p:cNvPr>
@@ -4677,7 +4677,7 @@
           <p:cNvPr id="5" name="">
             <a:extLst xmlns:a="http://schemas.openxmlformats.org/drawingml/2006/main">
               <a:ext uri="{FF2B5EF4-FFF2-40B4-BE49-F238E27FC236}">
-                <a16:creationId xmlns:a16="http://schemas.microsoft.com/office/drawing/2014/main" id="{EA5EB16D-92CE-4BBD-A1A8-3DB9120A4B04}"/>
+                <a16:creationId xmlns:a16="http://schemas.microsoft.com/office/drawing/2014/main" id="{8055B35E-984E-4B68-B3E5-F065A163AD30}"/>
               </a:ext>
             </a:extLst>
           </p:cNvPr>
@@ -4732,7 +4732,7 @@
     </p:spTree>
     <p:extLst>
       <p:ext uri="{BB962C8B-B14F-4D97-AF65-F5344CB8AC3E}">
-        <p14:creationId xmlns:p14="http://schemas.microsoft.com/office/powerpoint/2010/main" val="1810982054"/>
+        <p14:creationId xmlns:p14="http://schemas.microsoft.com/office/powerpoint/2010/main" val="1126086528"/>
       </p:ext>
     </p:extLst>
   </p:cSld>

--- a/4/РОП/Практики_1-8/Презентации/РОП_Практическая_8_АлбахтинИВ.pptx
+++ b/4/РОП/Практики_1-8/Презентации/РОП_Практическая_8_АлбахтинИВ.pptx
@@ -2,18 +2,18 @@
 <file path=ppt/presentation.xml><?xml version="1.0" encoding="utf-8"?>
 <p:presentation xmlns:p="http://schemas.openxmlformats.org/presentationml/2006/main">
   <p:sldMasterIdLst>
-    <p:sldMasterId xmlns:r="http://schemas.openxmlformats.org/officeDocument/2006/relationships" id="2147483648" r:id="R4e3698a57c9f42bb"/>
+    <p:sldMasterId xmlns:r="http://schemas.openxmlformats.org/officeDocument/2006/relationships" id="2147483648" r:id="Rc76a6e7b8b174cab"/>
   </p:sldMasterIdLst>
   <p:notesMasterIdLst>
-    <p:notesMasterId xmlns:r="http://schemas.openxmlformats.org/officeDocument/2006/relationships" r:id="R7c974051afab4a29"/>
+    <p:notesMasterId xmlns:r="http://schemas.openxmlformats.org/officeDocument/2006/relationships" r:id="R276cf85ccfb94846"/>
   </p:notesMasterIdLst>
   <p:sldIdLst>
-    <p:sldId xmlns:r="http://schemas.openxmlformats.org/officeDocument/2006/relationships" id="256" r:id="Rd954e009a28246aa"/>
-    <p:sldId xmlns:r="http://schemas.openxmlformats.org/officeDocument/2006/relationships" id="257" r:id="Re19b8139a50d4cdf"/>
-    <p:sldId xmlns:r="http://schemas.openxmlformats.org/officeDocument/2006/relationships" id="258" r:id="Rbf9576ba641f41b7"/>
-    <p:sldId xmlns:r="http://schemas.openxmlformats.org/officeDocument/2006/relationships" id="259" r:id="R9a960383170243ab"/>
-    <p:sldId xmlns:r="http://schemas.openxmlformats.org/officeDocument/2006/relationships" id="260" r:id="Rc72b1c5e11cf4691"/>
-    <p:sldId xmlns:r="http://schemas.openxmlformats.org/officeDocument/2006/relationships" id="261" r:id="R97a81dc4d9344ac7"/>
+    <p:sldId xmlns:r="http://schemas.openxmlformats.org/officeDocument/2006/relationships" id="256" r:id="R430b7aecc48b4b07"/>
+    <p:sldId xmlns:r="http://schemas.openxmlformats.org/officeDocument/2006/relationships" id="257" r:id="R0a7a889178534c43"/>
+    <p:sldId xmlns:r="http://schemas.openxmlformats.org/officeDocument/2006/relationships" id="258" r:id="R429333c18aaf4254"/>
+    <p:sldId xmlns:r="http://schemas.openxmlformats.org/officeDocument/2006/relationships" id="259" r:id="Re8088098be74401e"/>
+    <p:sldId xmlns:r="http://schemas.openxmlformats.org/officeDocument/2006/relationships" id="260" r:id="Rf73cbe5829214376"/>
+    <p:sldId xmlns:r="http://schemas.openxmlformats.org/officeDocument/2006/relationships" id="261" r:id="R53118e3855ab49c3"/>
   </p:sldIdLst>
   <p:sldSz cx="12192000" cy="6858000"/>
   <p:notesSz cx="6858000" cy="9144000"/>
@@ -203,16 +203,16 @@
         <a:srgbClr val="96607D"/>
       </a:folHlink>
     </a:clrScheme>
-    <a:fontScheme name="Office">
+    <a:fontScheme name="">
       <a:majorFont>
-        <a:latin typeface="Calibri Light"/>
-        <a:ea typeface="Calibri Light"/>
-        <a:cs typeface="Calibri Light"/>
+        <a:latin typeface="Aptos"/>
+        <a:ea typeface=""/>
+        <a:cs typeface=""/>
       </a:majorFont>
       <a:minorFont>
-        <a:latin typeface="Calibri"/>
-        <a:ea typeface="Calibri"/>
-        <a:cs typeface="Calibri"/>
+        <a:latin typeface="Aptos"/>
+        <a:ea typeface=""/>
+        <a:cs typeface=""/>
       </a:minorFont>
     </a:fontScheme>
     <a:fmtScheme name="ChatGPT">
@@ -869,6 +869,1661 @@
       <p:grpSpPr>
         <a:xfrm xmlns:a="http://schemas.openxmlformats.org/drawingml/2006/main"/>
       </p:grpSpPr>
+      <p:sp>
+        <p:nvSpPr>
+          <p:cNvPr id="3" name="Title">
+            <a:extLst xmlns:a="http://schemas.openxmlformats.org/drawingml/2006/main">
+              <a:ext uri="{FF2B5EF4-FFF2-40B4-BE49-F238E27FC236}">
+                <a16:creationId xmlns:a16="http://schemas.microsoft.com/office/drawing/2014/main" id="{A050FFC0-4572-4C42-AC38-96EC39CAF8E7}"/>
+              </a:ext>
+            </a:extLst>
+          </p:cNvPr>
+          <p:cNvSpPr>
+            <a:spLocks xmlns:a="http://schemas.openxmlformats.org/drawingml/2006/main" noGrp="1"/>
+          </p:cNvSpPr>
+          <p:nvPr>
+            <p:ph type="title" idx="0"/>
+          </p:nvPr>
+        </p:nvSpPr>
+        <p:spPr>
+          <a:xfrm xmlns:a="http://schemas.openxmlformats.org/drawingml/2006/main">
+            <a:off x="1219200" y="2590800"/>
+            <a:ext cx="9753600" cy="990600"/>
+          </a:xfrm>
+          <a:prstGeom xmlns:a="http://schemas.openxmlformats.org/drawingml/2006/main" prst="rect">
+            <a:avLst/>
+          </a:prstGeom>
+          <a:noFill xmlns:a="http://schemas.openxmlformats.org/drawingml/2006/main"/>
+          <a:ln xmlns:a="http://schemas.openxmlformats.org/drawingml/2006/main">
+            <a:noFill/>
+            <a:prstDash val="solid"/>
+          </a:ln>
+        </p:spPr>
+        <p:txBody>
+          <a:bodyPr xmlns:a="http://schemas.openxmlformats.org/drawingml/2006/main" wrap="square" lIns="0" tIns="0" rIns="0" bIns="0" anchor="ctr">
+            <a:normAutofit/>
+          </a:bodyPr>
+          <a:lstStyle xmlns:a="http://schemas.openxmlformats.org/drawingml/2006/main">
+            <a:defPPr algn="ctr">
+              <a:defRPr sz="4800" b="1">
+                <a:solidFill>
+                  <a:schemeClr val="tx1"/>
+                </a:solidFill>
+                <a:latin typeface="+mj-lt"/>
+                <a:ea typeface="+mj-lt"/>
+                <a:cs typeface="+mj-lt"/>
+              </a:defRPr>
+            </a:defPPr>
+            <a:lvl1pPr marL="0" indent="0">
+              <a:lnSpc>
+                <a:spcPct val="110000"/>
+              </a:lnSpc>
+              <a:spcBef>
+                <a:spcPts val="0"/>
+              </a:spcBef>
+              <a:spcAft>
+                <a:spcPts val="0"/>
+              </a:spcAft>
+              <a:buNone/>
+            </a:lvl1pPr>
+            <a:lvl2pPr marL="0" indent="0">
+              <a:lnSpc>
+                <a:spcPct val="110000"/>
+              </a:lnSpc>
+              <a:spcBef>
+                <a:spcPts val="0"/>
+              </a:spcBef>
+              <a:spcAft>
+                <a:spcPts val="0"/>
+              </a:spcAft>
+              <a:buNone/>
+            </a:lvl2pPr>
+            <a:lvl3pPr marL="0" indent="0">
+              <a:lnSpc>
+                <a:spcPct val="110000"/>
+              </a:lnSpc>
+              <a:spcBef>
+                <a:spcPts val="0"/>
+              </a:spcBef>
+              <a:spcAft>
+                <a:spcPts val="0"/>
+              </a:spcAft>
+              <a:buNone/>
+            </a:lvl3pPr>
+            <a:lvl4pPr marL="0" indent="0">
+              <a:lnSpc>
+                <a:spcPct val="110000"/>
+              </a:lnSpc>
+              <a:spcBef>
+                <a:spcPts val="0"/>
+              </a:spcBef>
+              <a:spcAft>
+                <a:spcPts val="0"/>
+              </a:spcAft>
+              <a:buNone/>
+            </a:lvl4pPr>
+            <a:lvl5pPr marL="0" indent="0">
+              <a:lnSpc>
+                <a:spcPct val="110000"/>
+              </a:lnSpc>
+              <a:spcBef>
+                <a:spcPts val="0"/>
+              </a:spcBef>
+              <a:spcAft>
+                <a:spcPts val="0"/>
+              </a:spcAft>
+              <a:buNone/>
+            </a:lvl5pPr>
+            <a:lvl6pPr marL="0" indent="0">
+              <a:lnSpc>
+                <a:spcPct val="110000"/>
+              </a:lnSpc>
+              <a:spcBef>
+                <a:spcPts val="0"/>
+              </a:spcBef>
+              <a:spcAft>
+                <a:spcPts val="0"/>
+              </a:spcAft>
+              <a:buNone/>
+            </a:lvl6pPr>
+            <a:lvl7pPr marL="0" indent="0">
+              <a:lnSpc>
+                <a:spcPct val="110000"/>
+              </a:lnSpc>
+              <a:spcBef>
+                <a:spcPts val="0"/>
+              </a:spcBef>
+              <a:spcAft>
+                <a:spcPts val="0"/>
+              </a:spcAft>
+              <a:buNone/>
+            </a:lvl7pPr>
+            <a:lvl8pPr marL="0" indent="0">
+              <a:lnSpc>
+                <a:spcPct val="110000"/>
+              </a:lnSpc>
+              <a:spcBef>
+                <a:spcPts val="0"/>
+              </a:spcBef>
+              <a:spcAft>
+                <a:spcPts val="0"/>
+              </a:spcAft>
+              <a:buNone/>
+            </a:lvl8pPr>
+            <a:lvl9pPr marL="0" indent="0">
+              <a:lnSpc>
+                <a:spcPct val="110000"/>
+              </a:lnSpc>
+              <a:spcBef>
+                <a:spcPts val="0"/>
+              </a:spcBef>
+              <a:spcAft>
+                <a:spcPts val="0"/>
+              </a:spcAft>
+              <a:buNone/>
+            </a:lvl9pPr>
+          </a:lstStyle>
+          <a:p xmlns:a="http://schemas.openxmlformats.org/drawingml/2006/main"/>
+        </p:txBody>
+      </p:sp>
+      <p:sp>
+        <p:nvSpPr>
+          <p:cNvPr id="2" name="Subtitle">
+            <a:extLst xmlns:a="http://schemas.openxmlformats.org/drawingml/2006/main">
+              <a:ext uri="{FF2B5EF4-FFF2-40B4-BE49-F238E27FC236}">
+                <a16:creationId xmlns:a16="http://schemas.microsoft.com/office/drawing/2014/main" id="{4DA0BB4B-2F4A-4777-BE0D-86A2E5E7C9C0}"/>
+              </a:ext>
+            </a:extLst>
+          </p:cNvPr>
+          <p:cNvSpPr>
+            <a:spLocks xmlns:a="http://schemas.openxmlformats.org/drawingml/2006/main" noGrp="1"/>
+          </p:cNvSpPr>
+          <p:nvPr>
+            <p:ph type="subTitle" idx="1"/>
+          </p:nvPr>
+        </p:nvSpPr>
+        <p:spPr>
+          <a:xfrm xmlns:a="http://schemas.openxmlformats.org/drawingml/2006/main">
+            <a:off x="1828800" y="3771900"/>
+            <a:ext cx="8534400" cy="762000"/>
+          </a:xfrm>
+          <a:prstGeom xmlns:a="http://schemas.openxmlformats.org/drawingml/2006/main" prst="rect">
+            <a:avLst/>
+          </a:prstGeom>
+          <a:noFill xmlns:a="http://schemas.openxmlformats.org/drawingml/2006/main"/>
+          <a:ln xmlns:a="http://schemas.openxmlformats.org/drawingml/2006/main">
+            <a:noFill/>
+            <a:prstDash val="solid"/>
+          </a:ln>
+        </p:spPr>
+        <p:txBody>
+          <a:bodyPr xmlns:a="http://schemas.openxmlformats.org/drawingml/2006/main" wrap="square" lIns="0" tIns="0" rIns="0" bIns="0" anchor="ctr">
+            <a:normAutofit/>
+          </a:bodyPr>
+          <a:lstStyle xmlns:a="http://schemas.openxmlformats.org/drawingml/2006/main">
+            <a:defPPr algn="ctr">
+              <a:defRPr sz="2100" b="0">
+                <a:solidFill>
+                  <a:schemeClr val="tx1"/>
+                </a:solidFill>
+                <a:latin typeface="+mn-lt"/>
+                <a:ea typeface="+mn-lt"/>
+                <a:cs typeface="+mn-lt"/>
+              </a:defRPr>
+            </a:defPPr>
+            <a:lvl1pPr marL="0" indent="0">
+              <a:lnSpc>
+                <a:spcPct val="110000"/>
+              </a:lnSpc>
+              <a:spcBef>
+                <a:spcPts val="0"/>
+              </a:spcBef>
+              <a:spcAft>
+                <a:spcPts val="0"/>
+              </a:spcAft>
+              <a:buNone/>
+            </a:lvl1pPr>
+            <a:lvl2pPr marL="0" indent="0">
+              <a:lnSpc>
+                <a:spcPct val="110000"/>
+              </a:lnSpc>
+              <a:spcBef>
+                <a:spcPts val="0"/>
+              </a:spcBef>
+              <a:spcAft>
+                <a:spcPts val="0"/>
+              </a:spcAft>
+              <a:buNone/>
+            </a:lvl2pPr>
+            <a:lvl3pPr marL="0" indent="0">
+              <a:lnSpc>
+                <a:spcPct val="110000"/>
+              </a:lnSpc>
+              <a:spcBef>
+                <a:spcPts val="0"/>
+              </a:spcBef>
+              <a:spcAft>
+                <a:spcPts val="0"/>
+              </a:spcAft>
+              <a:buNone/>
+            </a:lvl3pPr>
+            <a:lvl4pPr marL="0" indent="0">
+              <a:lnSpc>
+                <a:spcPct val="110000"/>
+              </a:lnSpc>
+              <a:spcBef>
+                <a:spcPts val="0"/>
+              </a:spcBef>
+              <a:spcAft>
+                <a:spcPts val="0"/>
+              </a:spcAft>
+              <a:buNone/>
+            </a:lvl4pPr>
+            <a:lvl5pPr marL="0" indent="0">
+              <a:lnSpc>
+                <a:spcPct val="110000"/>
+              </a:lnSpc>
+              <a:spcBef>
+                <a:spcPts val="0"/>
+              </a:spcBef>
+              <a:spcAft>
+                <a:spcPts val="0"/>
+              </a:spcAft>
+              <a:buNone/>
+            </a:lvl5pPr>
+            <a:lvl6pPr marL="0" indent="0">
+              <a:lnSpc>
+                <a:spcPct val="110000"/>
+              </a:lnSpc>
+              <a:spcBef>
+                <a:spcPts val="0"/>
+              </a:spcBef>
+              <a:spcAft>
+                <a:spcPts val="0"/>
+              </a:spcAft>
+              <a:buNone/>
+            </a:lvl6pPr>
+            <a:lvl7pPr marL="0" indent="0">
+              <a:lnSpc>
+                <a:spcPct val="110000"/>
+              </a:lnSpc>
+              <a:spcBef>
+                <a:spcPts val="0"/>
+              </a:spcBef>
+              <a:spcAft>
+                <a:spcPts val="0"/>
+              </a:spcAft>
+              <a:buNone/>
+            </a:lvl7pPr>
+            <a:lvl8pPr marL="0" indent="0">
+              <a:lnSpc>
+                <a:spcPct val="110000"/>
+              </a:lnSpc>
+              <a:spcBef>
+                <a:spcPts val="0"/>
+              </a:spcBef>
+              <a:spcAft>
+                <a:spcPts val="0"/>
+              </a:spcAft>
+              <a:buNone/>
+            </a:lvl8pPr>
+            <a:lvl9pPr marL="0" indent="0">
+              <a:lnSpc>
+                <a:spcPct val="110000"/>
+              </a:lnSpc>
+              <a:spcBef>
+                <a:spcPts val="0"/>
+              </a:spcBef>
+              <a:spcAft>
+                <a:spcPts val="0"/>
+              </a:spcAft>
+              <a:buNone/>
+            </a:lvl9pPr>
+          </a:lstStyle>
+          <a:p xmlns:a="http://schemas.openxmlformats.org/drawingml/2006/main"/>
+        </p:txBody>
+      </p:sp>
+    </p:spTree>
+  </p:cSld>
+</p:sldLayout>
+</file>
+
+<file path=ppt/slideLayouts/slideLayout2.xml><?xml version="1.0" encoding="utf-8"?>
+<p:sldLayout xmlns:p="http://schemas.openxmlformats.org/presentationml/2006/main">
+  <p:cSld name="Section Header">
+    <p:spTree>
+      <p:nvGrpSpPr>
+        <p:cNvPr id="1" name=""/>
+        <p:cNvGrpSpPr/>
+        <p:nvPr/>
+      </p:nvGrpSpPr>
+      <p:grpSpPr>
+        <a:xfrm xmlns:a="http://schemas.openxmlformats.org/drawingml/2006/main"/>
+      </p:grpSpPr>
+      <p:sp>
+        <p:nvSpPr>
+          <p:cNvPr id="2" name="Section title">
+            <a:extLst xmlns:a="http://schemas.openxmlformats.org/drawingml/2006/main">
+              <a:ext uri="{FF2B5EF4-FFF2-40B4-BE49-F238E27FC236}">
+                <a16:creationId xmlns:a16="http://schemas.microsoft.com/office/drawing/2014/main" id="{178360DC-08EC-43E7-8AAE-46A10A16258C}"/>
+              </a:ext>
+            </a:extLst>
+          </p:cNvPr>
+          <p:cNvSpPr>
+            <a:spLocks xmlns:a="http://schemas.openxmlformats.org/drawingml/2006/main" noGrp="1"/>
+          </p:cNvSpPr>
+          <p:nvPr>
+            <p:ph type="title" idx="0"/>
+          </p:nvPr>
+        </p:nvSpPr>
+        <p:spPr>
+          <a:xfrm xmlns:a="http://schemas.openxmlformats.org/drawingml/2006/main">
+            <a:off x="1219200" y="2857500"/>
+            <a:ext cx="9753600" cy="1143000"/>
+          </a:xfrm>
+          <a:prstGeom xmlns:a="http://schemas.openxmlformats.org/drawingml/2006/main" prst="rect">
+            <a:avLst/>
+          </a:prstGeom>
+          <a:noFill xmlns:a="http://schemas.openxmlformats.org/drawingml/2006/main"/>
+          <a:ln xmlns:a="http://schemas.openxmlformats.org/drawingml/2006/main">
+            <a:noFill/>
+            <a:prstDash val="solid"/>
+          </a:ln>
+        </p:spPr>
+        <p:txBody>
+          <a:bodyPr xmlns:a="http://schemas.openxmlformats.org/drawingml/2006/main" wrap="square" lIns="0" tIns="0" rIns="0" bIns="0" anchor="ctr">
+            <a:normAutofit/>
+          </a:bodyPr>
+          <a:lstStyle xmlns:a="http://schemas.openxmlformats.org/drawingml/2006/main">
+            <a:defPPr algn="ctr">
+              <a:defRPr sz="4200" b="1">
+                <a:solidFill>
+                  <a:schemeClr val="tx1"/>
+                </a:solidFill>
+                <a:latin typeface="+mj-lt"/>
+                <a:ea typeface="+mj-lt"/>
+                <a:cs typeface="+mj-lt"/>
+              </a:defRPr>
+            </a:defPPr>
+            <a:lvl1pPr marL="0" indent="0">
+              <a:lnSpc>
+                <a:spcPct val="110000"/>
+              </a:lnSpc>
+              <a:spcBef>
+                <a:spcPts val="0"/>
+              </a:spcBef>
+              <a:spcAft>
+                <a:spcPts val="0"/>
+              </a:spcAft>
+              <a:buNone/>
+            </a:lvl1pPr>
+            <a:lvl2pPr marL="0" indent="0">
+              <a:lnSpc>
+                <a:spcPct val="110000"/>
+              </a:lnSpc>
+              <a:spcBef>
+                <a:spcPts val="0"/>
+              </a:spcBef>
+              <a:spcAft>
+                <a:spcPts val="0"/>
+              </a:spcAft>
+              <a:buNone/>
+            </a:lvl2pPr>
+            <a:lvl3pPr marL="0" indent="0">
+              <a:lnSpc>
+                <a:spcPct val="110000"/>
+              </a:lnSpc>
+              <a:spcBef>
+                <a:spcPts val="0"/>
+              </a:spcBef>
+              <a:spcAft>
+                <a:spcPts val="0"/>
+              </a:spcAft>
+              <a:buNone/>
+            </a:lvl3pPr>
+            <a:lvl4pPr marL="0" indent="0">
+              <a:lnSpc>
+                <a:spcPct val="110000"/>
+              </a:lnSpc>
+              <a:spcBef>
+                <a:spcPts val="0"/>
+              </a:spcBef>
+              <a:spcAft>
+                <a:spcPts val="0"/>
+              </a:spcAft>
+              <a:buNone/>
+            </a:lvl4pPr>
+            <a:lvl5pPr marL="0" indent="0">
+              <a:lnSpc>
+                <a:spcPct val="110000"/>
+              </a:lnSpc>
+              <a:spcBef>
+                <a:spcPts val="0"/>
+              </a:spcBef>
+              <a:spcAft>
+                <a:spcPts val="0"/>
+              </a:spcAft>
+              <a:buNone/>
+            </a:lvl5pPr>
+            <a:lvl6pPr marL="0" indent="0">
+              <a:lnSpc>
+                <a:spcPct val="110000"/>
+              </a:lnSpc>
+              <a:spcBef>
+                <a:spcPts val="0"/>
+              </a:spcBef>
+              <a:spcAft>
+                <a:spcPts val="0"/>
+              </a:spcAft>
+              <a:buNone/>
+            </a:lvl6pPr>
+            <a:lvl7pPr marL="0" indent="0">
+              <a:lnSpc>
+                <a:spcPct val="110000"/>
+              </a:lnSpc>
+              <a:spcBef>
+                <a:spcPts val="0"/>
+              </a:spcBef>
+              <a:spcAft>
+                <a:spcPts val="0"/>
+              </a:spcAft>
+              <a:buNone/>
+            </a:lvl7pPr>
+            <a:lvl8pPr marL="0" indent="0">
+              <a:lnSpc>
+                <a:spcPct val="110000"/>
+              </a:lnSpc>
+              <a:spcBef>
+                <a:spcPts val="0"/>
+              </a:spcBef>
+              <a:spcAft>
+                <a:spcPts val="0"/>
+              </a:spcAft>
+              <a:buNone/>
+            </a:lvl8pPr>
+            <a:lvl9pPr marL="0" indent="0">
+              <a:lnSpc>
+                <a:spcPct val="110000"/>
+              </a:lnSpc>
+              <a:spcBef>
+                <a:spcPts val="0"/>
+              </a:spcBef>
+              <a:spcAft>
+                <a:spcPts val="0"/>
+              </a:spcAft>
+              <a:buNone/>
+            </a:lvl9pPr>
+          </a:lstStyle>
+          <a:p xmlns:a="http://schemas.openxmlformats.org/drawingml/2006/main"/>
+        </p:txBody>
+      </p:sp>
+    </p:spTree>
+  </p:cSld>
+</p:sldLayout>
+</file>
+
+<file path=ppt/slideLayouts/slideLayout3.xml><?xml version="1.0" encoding="utf-8"?>
+<p:sldLayout xmlns:p="http://schemas.openxmlformats.org/presentationml/2006/main">
+  <p:cSld name="Title and Body">
+    <p:spTree>
+      <p:nvGrpSpPr>
+        <p:cNvPr id="1" name=""/>
+        <p:cNvGrpSpPr/>
+        <p:nvPr/>
+      </p:nvGrpSpPr>
+      <p:grpSpPr>
+        <a:xfrm xmlns:a="http://schemas.openxmlformats.org/drawingml/2006/main"/>
+      </p:grpSpPr>
+      <p:sp>
+        <p:nvSpPr>
+          <p:cNvPr id="3" name="Title">
+            <a:extLst xmlns:a="http://schemas.openxmlformats.org/drawingml/2006/main">
+              <a:ext uri="{FF2B5EF4-FFF2-40B4-BE49-F238E27FC236}">
+                <a16:creationId xmlns:a16="http://schemas.microsoft.com/office/drawing/2014/main" id="{4FB31564-A7EB-49F6-8E51-C14818367B45}"/>
+              </a:ext>
+            </a:extLst>
+          </p:cNvPr>
+          <p:cNvSpPr>
+            <a:spLocks xmlns:a="http://schemas.openxmlformats.org/drawingml/2006/main" noGrp="1"/>
+          </p:cNvSpPr>
+          <p:nvPr>
+            <p:ph type="title" idx="0"/>
+          </p:nvPr>
+        </p:nvSpPr>
+        <p:spPr>
+          <a:xfrm xmlns:a="http://schemas.openxmlformats.org/drawingml/2006/main">
+            <a:off x="685800" y="533400"/>
+            <a:ext cx="10820400" cy="838200"/>
+          </a:xfrm>
+          <a:prstGeom xmlns:a="http://schemas.openxmlformats.org/drawingml/2006/main" prst="rect">
+            <a:avLst/>
+          </a:prstGeom>
+          <a:noFill xmlns:a="http://schemas.openxmlformats.org/drawingml/2006/main"/>
+          <a:ln xmlns:a="http://schemas.openxmlformats.org/drawingml/2006/main">
+            <a:noFill/>
+            <a:prstDash val="solid"/>
+          </a:ln>
+        </p:spPr>
+        <p:txBody>
+          <a:bodyPr xmlns:a="http://schemas.openxmlformats.org/drawingml/2006/main" wrap="square" lIns="0" tIns="0" rIns="0" bIns="0" anchor="t">
+            <a:normAutofit/>
+          </a:bodyPr>
+          <a:lstStyle xmlns:a="http://schemas.openxmlformats.org/drawingml/2006/main">
+            <a:defPPr algn="l">
+              <a:defRPr sz="3300" b="1">
+                <a:solidFill>
+                  <a:schemeClr val="tx1"/>
+                </a:solidFill>
+                <a:latin typeface="+mj-lt"/>
+                <a:ea typeface="+mj-lt"/>
+                <a:cs typeface="+mj-lt"/>
+              </a:defRPr>
+            </a:defPPr>
+            <a:lvl1pPr marL="0" indent="0">
+              <a:lnSpc>
+                <a:spcPct val="110000"/>
+              </a:lnSpc>
+              <a:spcBef>
+                <a:spcPts val="0"/>
+              </a:spcBef>
+              <a:spcAft>
+                <a:spcPts val="0"/>
+              </a:spcAft>
+              <a:buNone/>
+            </a:lvl1pPr>
+            <a:lvl2pPr marL="0" indent="0">
+              <a:lnSpc>
+                <a:spcPct val="110000"/>
+              </a:lnSpc>
+              <a:spcBef>
+                <a:spcPts val="0"/>
+              </a:spcBef>
+              <a:spcAft>
+                <a:spcPts val="0"/>
+              </a:spcAft>
+              <a:buNone/>
+            </a:lvl2pPr>
+            <a:lvl3pPr marL="0" indent="0">
+              <a:lnSpc>
+                <a:spcPct val="110000"/>
+              </a:lnSpc>
+              <a:spcBef>
+                <a:spcPts val="0"/>
+              </a:spcBef>
+              <a:spcAft>
+                <a:spcPts val="0"/>
+              </a:spcAft>
+              <a:buNone/>
+            </a:lvl3pPr>
+            <a:lvl4pPr marL="0" indent="0">
+              <a:lnSpc>
+                <a:spcPct val="110000"/>
+              </a:lnSpc>
+              <a:spcBef>
+                <a:spcPts val="0"/>
+              </a:spcBef>
+              <a:spcAft>
+                <a:spcPts val="0"/>
+              </a:spcAft>
+              <a:buNone/>
+            </a:lvl4pPr>
+            <a:lvl5pPr marL="0" indent="0">
+              <a:lnSpc>
+                <a:spcPct val="110000"/>
+              </a:lnSpc>
+              <a:spcBef>
+                <a:spcPts val="0"/>
+              </a:spcBef>
+              <a:spcAft>
+                <a:spcPts val="0"/>
+              </a:spcAft>
+              <a:buNone/>
+            </a:lvl5pPr>
+            <a:lvl6pPr marL="0" indent="0">
+              <a:lnSpc>
+                <a:spcPct val="110000"/>
+              </a:lnSpc>
+              <a:spcBef>
+                <a:spcPts val="0"/>
+              </a:spcBef>
+              <a:spcAft>
+                <a:spcPts val="0"/>
+              </a:spcAft>
+              <a:buNone/>
+            </a:lvl6pPr>
+            <a:lvl7pPr marL="0" indent="0">
+              <a:lnSpc>
+                <a:spcPct val="110000"/>
+              </a:lnSpc>
+              <a:spcBef>
+                <a:spcPts val="0"/>
+              </a:spcBef>
+              <a:spcAft>
+                <a:spcPts val="0"/>
+              </a:spcAft>
+              <a:buNone/>
+            </a:lvl7pPr>
+            <a:lvl8pPr marL="0" indent="0">
+              <a:lnSpc>
+                <a:spcPct val="110000"/>
+              </a:lnSpc>
+              <a:spcBef>
+                <a:spcPts val="0"/>
+              </a:spcBef>
+              <a:spcAft>
+                <a:spcPts val="0"/>
+              </a:spcAft>
+              <a:buNone/>
+            </a:lvl8pPr>
+            <a:lvl9pPr marL="0" indent="0">
+              <a:lnSpc>
+                <a:spcPct val="110000"/>
+              </a:lnSpc>
+              <a:spcBef>
+                <a:spcPts val="0"/>
+              </a:spcBef>
+              <a:spcAft>
+                <a:spcPts val="0"/>
+              </a:spcAft>
+              <a:buNone/>
+            </a:lvl9pPr>
+          </a:lstStyle>
+          <a:p xmlns:a="http://schemas.openxmlformats.org/drawingml/2006/main"/>
+        </p:txBody>
+      </p:sp>
+      <p:sp>
+        <p:nvSpPr>
+          <p:cNvPr id="2" name="Body">
+            <a:extLst xmlns:a="http://schemas.openxmlformats.org/drawingml/2006/main">
+              <a:ext uri="{FF2B5EF4-FFF2-40B4-BE49-F238E27FC236}">
+                <a16:creationId xmlns:a16="http://schemas.microsoft.com/office/drawing/2014/main" id="{71F592C8-F7B3-424A-AC99-782135020B2B}"/>
+              </a:ext>
+            </a:extLst>
+          </p:cNvPr>
+          <p:cNvSpPr>
+            <a:spLocks xmlns:a="http://schemas.openxmlformats.org/drawingml/2006/main" noGrp="1"/>
+          </p:cNvSpPr>
+          <p:nvPr>
+            <p:ph type="body" idx="1"/>
+          </p:nvPr>
+        </p:nvSpPr>
+        <p:spPr>
+          <a:xfrm xmlns:a="http://schemas.openxmlformats.org/drawingml/2006/main">
+            <a:off x="685800" y="1905000"/>
+            <a:ext cx="10820400" cy="4267200"/>
+          </a:xfrm>
+          <a:prstGeom xmlns:a="http://schemas.openxmlformats.org/drawingml/2006/main" prst="rect">
+            <a:avLst/>
+          </a:prstGeom>
+          <a:noFill xmlns:a="http://schemas.openxmlformats.org/drawingml/2006/main"/>
+          <a:ln xmlns:a="http://schemas.openxmlformats.org/drawingml/2006/main">
+            <a:noFill/>
+            <a:prstDash val="solid"/>
+          </a:ln>
+        </p:spPr>
+        <p:txBody>
+          <a:bodyPr xmlns:a="http://schemas.openxmlformats.org/drawingml/2006/main" wrap="square" lIns="0" tIns="0" rIns="0" bIns="0" anchor="t">
+            <a:normAutofit/>
+          </a:bodyPr>
+          <a:lstStyle xmlns:a="http://schemas.openxmlformats.org/drawingml/2006/main">
+            <a:defPPr algn="l">
+              <a:defRPr sz="2250" b="0">
+                <a:solidFill>
+                  <a:schemeClr val="tx1"/>
+                </a:solidFill>
+                <a:latin typeface="+mn-lt"/>
+                <a:ea typeface="+mn-lt"/>
+                <a:cs typeface="+mn-lt"/>
+              </a:defRPr>
+            </a:defPPr>
+            <a:lvl1pPr marL="228600" indent="-228600">
+              <a:lnSpc>
+                <a:spcPct val="110000"/>
+              </a:lnSpc>
+              <a:spcBef>
+                <a:spcPts val="0"/>
+              </a:spcBef>
+              <a:spcAft>
+                <a:spcPts val="1200"/>
+              </a:spcAft>
+              <a:buChar char="•"/>
+            </a:lvl1pPr>
+            <a:lvl2pPr marL="533400" indent="-228600">
+              <a:lnSpc>
+                <a:spcPct val="110000"/>
+              </a:lnSpc>
+              <a:spcBef>
+                <a:spcPts val="0"/>
+              </a:spcBef>
+              <a:spcAft>
+                <a:spcPts val="1200"/>
+              </a:spcAft>
+              <a:buChar char="•"/>
+            </a:lvl2pPr>
+            <a:lvl3pPr marL="838200" indent="-228600">
+              <a:lnSpc>
+                <a:spcPct val="110000"/>
+              </a:lnSpc>
+              <a:spcBef>
+                <a:spcPts val="0"/>
+              </a:spcBef>
+              <a:spcAft>
+                <a:spcPts val="1200"/>
+              </a:spcAft>
+              <a:buChar char="•"/>
+            </a:lvl3pPr>
+            <a:lvl4pPr marL="1143000" indent="-228600">
+              <a:lnSpc>
+                <a:spcPct val="110000"/>
+              </a:lnSpc>
+              <a:spcBef>
+                <a:spcPts val="0"/>
+              </a:spcBef>
+              <a:spcAft>
+                <a:spcPts val="1200"/>
+              </a:spcAft>
+              <a:buChar char="•"/>
+            </a:lvl4pPr>
+            <a:lvl5pPr marL="1447800" indent="-228600">
+              <a:lnSpc>
+                <a:spcPct val="110000"/>
+              </a:lnSpc>
+              <a:spcBef>
+                <a:spcPts val="0"/>
+              </a:spcBef>
+              <a:spcAft>
+                <a:spcPts val="1200"/>
+              </a:spcAft>
+              <a:buChar char="•"/>
+            </a:lvl5pPr>
+            <a:lvl6pPr marL="1752600" indent="-228600">
+              <a:lnSpc>
+                <a:spcPct val="110000"/>
+              </a:lnSpc>
+              <a:spcBef>
+                <a:spcPts val="0"/>
+              </a:spcBef>
+              <a:spcAft>
+                <a:spcPts val="1200"/>
+              </a:spcAft>
+              <a:buChar char="•"/>
+            </a:lvl6pPr>
+            <a:lvl7pPr marL="2057400" indent="-228600">
+              <a:lnSpc>
+                <a:spcPct val="110000"/>
+              </a:lnSpc>
+              <a:spcBef>
+                <a:spcPts val="0"/>
+              </a:spcBef>
+              <a:spcAft>
+                <a:spcPts val="1200"/>
+              </a:spcAft>
+              <a:buChar char="•"/>
+            </a:lvl7pPr>
+            <a:lvl8pPr marL="2362200" indent="-228600">
+              <a:lnSpc>
+                <a:spcPct val="110000"/>
+              </a:lnSpc>
+              <a:spcBef>
+                <a:spcPts val="0"/>
+              </a:spcBef>
+              <a:spcAft>
+                <a:spcPts val="1200"/>
+              </a:spcAft>
+              <a:buChar char="•"/>
+            </a:lvl8pPr>
+            <a:lvl9pPr marL="2667000" indent="-228600">
+              <a:lnSpc>
+                <a:spcPct val="110000"/>
+              </a:lnSpc>
+              <a:spcBef>
+                <a:spcPts val="0"/>
+              </a:spcBef>
+              <a:spcAft>
+                <a:spcPts val="1200"/>
+              </a:spcAft>
+              <a:buChar char="•"/>
+            </a:lvl9pPr>
+          </a:lstStyle>
+          <a:p xmlns:a="http://schemas.openxmlformats.org/drawingml/2006/main"/>
+        </p:txBody>
+      </p:sp>
+    </p:spTree>
+  </p:cSld>
+</p:sldLayout>
+</file>
+
+<file path=ppt/slideLayouts/slideLayout4.xml><?xml version="1.0" encoding="utf-8"?>
+<p:sldLayout xmlns:p="http://schemas.openxmlformats.org/presentationml/2006/main">
+  <p:cSld name="Title and Two Column">
+    <p:spTree>
+      <p:nvGrpSpPr>
+        <p:cNvPr id="1" name=""/>
+        <p:cNvGrpSpPr/>
+        <p:nvPr/>
+      </p:nvGrpSpPr>
+      <p:grpSpPr>
+        <a:xfrm xmlns:a="http://schemas.openxmlformats.org/drawingml/2006/main"/>
+      </p:grpSpPr>
+      <p:sp>
+        <p:nvSpPr>
+          <p:cNvPr id="4" name="Title">
+            <a:extLst xmlns:a="http://schemas.openxmlformats.org/drawingml/2006/main">
+              <a:ext uri="{FF2B5EF4-FFF2-40B4-BE49-F238E27FC236}">
+                <a16:creationId xmlns:a16="http://schemas.microsoft.com/office/drawing/2014/main" id="{D7F2ABD1-7943-4DBE-865E-ACE2BA7C75E6}"/>
+              </a:ext>
+            </a:extLst>
+          </p:cNvPr>
+          <p:cNvSpPr>
+            <a:spLocks xmlns:a="http://schemas.openxmlformats.org/drawingml/2006/main" noGrp="1"/>
+          </p:cNvSpPr>
+          <p:nvPr>
+            <p:ph type="title" idx="0"/>
+          </p:nvPr>
+        </p:nvSpPr>
+        <p:spPr>
+          <a:xfrm xmlns:a="http://schemas.openxmlformats.org/drawingml/2006/main">
+            <a:off x="685800" y="533400"/>
+            <a:ext cx="10820400" cy="838200"/>
+          </a:xfrm>
+          <a:prstGeom xmlns:a="http://schemas.openxmlformats.org/drawingml/2006/main" prst="rect">
+            <a:avLst/>
+          </a:prstGeom>
+          <a:noFill xmlns:a="http://schemas.openxmlformats.org/drawingml/2006/main"/>
+          <a:ln xmlns:a="http://schemas.openxmlformats.org/drawingml/2006/main">
+            <a:noFill/>
+            <a:prstDash val="solid"/>
+          </a:ln>
+        </p:spPr>
+        <p:txBody>
+          <a:bodyPr xmlns:a="http://schemas.openxmlformats.org/drawingml/2006/main" wrap="square" lIns="0" tIns="0" rIns="0" bIns="0" anchor="t">
+            <a:normAutofit/>
+          </a:bodyPr>
+          <a:lstStyle xmlns:a="http://schemas.openxmlformats.org/drawingml/2006/main">
+            <a:defPPr algn="l">
+              <a:defRPr sz="3300" b="1">
+                <a:solidFill>
+                  <a:schemeClr val="tx1"/>
+                </a:solidFill>
+                <a:latin typeface="+mj-lt"/>
+                <a:ea typeface="+mj-lt"/>
+                <a:cs typeface="+mj-lt"/>
+              </a:defRPr>
+            </a:defPPr>
+            <a:lvl1pPr marL="0" indent="0">
+              <a:lnSpc>
+                <a:spcPct val="110000"/>
+              </a:lnSpc>
+              <a:spcBef>
+                <a:spcPts val="0"/>
+              </a:spcBef>
+              <a:spcAft>
+                <a:spcPts val="0"/>
+              </a:spcAft>
+              <a:buNone/>
+            </a:lvl1pPr>
+            <a:lvl2pPr marL="0" indent="0">
+              <a:lnSpc>
+                <a:spcPct val="110000"/>
+              </a:lnSpc>
+              <a:spcBef>
+                <a:spcPts val="0"/>
+              </a:spcBef>
+              <a:spcAft>
+                <a:spcPts val="0"/>
+              </a:spcAft>
+              <a:buNone/>
+            </a:lvl2pPr>
+            <a:lvl3pPr marL="0" indent="0">
+              <a:lnSpc>
+                <a:spcPct val="110000"/>
+              </a:lnSpc>
+              <a:spcBef>
+                <a:spcPts val="0"/>
+              </a:spcBef>
+              <a:spcAft>
+                <a:spcPts val="0"/>
+              </a:spcAft>
+              <a:buNone/>
+            </a:lvl3pPr>
+            <a:lvl4pPr marL="0" indent="0">
+              <a:lnSpc>
+                <a:spcPct val="110000"/>
+              </a:lnSpc>
+              <a:spcBef>
+                <a:spcPts val="0"/>
+              </a:spcBef>
+              <a:spcAft>
+                <a:spcPts val="0"/>
+              </a:spcAft>
+              <a:buNone/>
+            </a:lvl4pPr>
+            <a:lvl5pPr marL="0" indent="0">
+              <a:lnSpc>
+                <a:spcPct val="110000"/>
+              </a:lnSpc>
+              <a:spcBef>
+                <a:spcPts val="0"/>
+              </a:spcBef>
+              <a:spcAft>
+                <a:spcPts val="0"/>
+              </a:spcAft>
+              <a:buNone/>
+            </a:lvl5pPr>
+            <a:lvl6pPr marL="0" indent="0">
+              <a:lnSpc>
+                <a:spcPct val="110000"/>
+              </a:lnSpc>
+              <a:spcBef>
+                <a:spcPts val="0"/>
+              </a:spcBef>
+              <a:spcAft>
+                <a:spcPts val="0"/>
+              </a:spcAft>
+              <a:buNone/>
+            </a:lvl6pPr>
+            <a:lvl7pPr marL="0" indent="0">
+              <a:lnSpc>
+                <a:spcPct val="110000"/>
+              </a:lnSpc>
+              <a:spcBef>
+                <a:spcPts val="0"/>
+              </a:spcBef>
+              <a:spcAft>
+                <a:spcPts val="0"/>
+              </a:spcAft>
+              <a:buNone/>
+            </a:lvl7pPr>
+            <a:lvl8pPr marL="0" indent="0">
+              <a:lnSpc>
+                <a:spcPct val="110000"/>
+              </a:lnSpc>
+              <a:spcBef>
+                <a:spcPts val="0"/>
+              </a:spcBef>
+              <a:spcAft>
+                <a:spcPts val="0"/>
+              </a:spcAft>
+              <a:buNone/>
+            </a:lvl8pPr>
+            <a:lvl9pPr marL="0" indent="0">
+              <a:lnSpc>
+                <a:spcPct val="110000"/>
+              </a:lnSpc>
+              <a:spcBef>
+                <a:spcPts val="0"/>
+              </a:spcBef>
+              <a:spcAft>
+                <a:spcPts val="0"/>
+              </a:spcAft>
+              <a:buNone/>
+            </a:lvl9pPr>
+          </a:lstStyle>
+          <a:p xmlns:a="http://schemas.openxmlformats.org/drawingml/2006/main"/>
+        </p:txBody>
+      </p:sp>
+      <p:sp>
+        <p:nvSpPr>
+          <p:cNvPr id="2" name="Left column">
+            <a:extLst xmlns:a="http://schemas.openxmlformats.org/drawingml/2006/main">
+              <a:ext uri="{FF2B5EF4-FFF2-40B4-BE49-F238E27FC236}">
+                <a16:creationId xmlns:a16="http://schemas.microsoft.com/office/drawing/2014/main" id="{19044AD0-3682-42CA-B0F3-ABB299825A90}"/>
+              </a:ext>
+            </a:extLst>
+          </p:cNvPr>
+          <p:cNvSpPr>
+            <a:spLocks xmlns:a="http://schemas.openxmlformats.org/drawingml/2006/main" noGrp="1"/>
+          </p:cNvSpPr>
+          <p:nvPr>
+            <p:ph type="body" idx="1"/>
+          </p:nvPr>
+        </p:nvSpPr>
+        <p:spPr>
+          <a:xfrm xmlns:a="http://schemas.openxmlformats.org/drawingml/2006/main">
+            <a:off x="685800" y="1905000"/>
+            <a:ext cx="5029200" cy="4267200"/>
+          </a:xfrm>
+          <a:prstGeom xmlns:a="http://schemas.openxmlformats.org/drawingml/2006/main" prst="rect">
+            <a:avLst/>
+          </a:prstGeom>
+          <a:noFill xmlns:a="http://schemas.openxmlformats.org/drawingml/2006/main"/>
+          <a:ln xmlns:a="http://schemas.openxmlformats.org/drawingml/2006/main">
+            <a:noFill/>
+            <a:prstDash val="solid"/>
+          </a:ln>
+        </p:spPr>
+        <p:txBody>
+          <a:bodyPr xmlns:a="http://schemas.openxmlformats.org/drawingml/2006/main" wrap="square" lIns="0" tIns="0" rIns="0" bIns="0" anchor="t">
+            <a:normAutofit/>
+          </a:bodyPr>
+          <a:lstStyle xmlns:a="http://schemas.openxmlformats.org/drawingml/2006/main">
+            <a:defPPr algn="l">
+              <a:defRPr sz="2100" b="0">
+                <a:solidFill>
+                  <a:schemeClr val="tx1"/>
+                </a:solidFill>
+                <a:latin typeface="+mn-lt"/>
+                <a:ea typeface="+mn-lt"/>
+                <a:cs typeface="+mn-lt"/>
+              </a:defRPr>
+            </a:defPPr>
+            <a:lvl1pPr marL="228600" indent="-228600">
+              <a:lnSpc>
+                <a:spcPct val="110000"/>
+              </a:lnSpc>
+              <a:spcBef>
+                <a:spcPts val="0"/>
+              </a:spcBef>
+              <a:spcAft>
+                <a:spcPts val="1200"/>
+              </a:spcAft>
+              <a:buChar char="•"/>
+            </a:lvl1pPr>
+            <a:lvl2pPr marL="533400" indent="-228600">
+              <a:lnSpc>
+                <a:spcPct val="110000"/>
+              </a:lnSpc>
+              <a:spcBef>
+                <a:spcPts val="0"/>
+              </a:spcBef>
+              <a:spcAft>
+                <a:spcPts val="1200"/>
+              </a:spcAft>
+              <a:buChar char="•"/>
+            </a:lvl2pPr>
+            <a:lvl3pPr marL="838200" indent="-228600">
+              <a:lnSpc>
+                <a:spcPct val="110000"/>
+              </a:lnSpc>
+              <a:spcBef>
+                <a:spcPts val="0"/>
+              </a:spcBef>
+              <a:spcAft>
+                <a:spcPts val="1200"/>
+              </a:spcAft>
+              <a:buChar char="•"/>
+            </a:lvl3pPr>
+            <a:lvl4pPr marL="1143000" indent="-228600">
+              <a:lnSpc>
+                <a:spcPct val="110000"/>
+              </a:lnSpc>
+              <a:spcBef>
+                <a:spcPts val="0"/>
+              </a:spcBef>
+              <a:spcAft>
+                <a:spcPts val="1200"/>
+              </a:spcAft>
+              <a:buChar char="•"/>
+            </a:lvl4pPr>
+            <a:lvl5pPr marL="1447800" indent="-228600">
+              <a:lnSpc>
+                <a:spcPct val="110000"/>
+              </a:lnSpc>
+              <a:spcBef>
+                <a:spcPts val="0"/>
+              </a:spcBef>
+              <a:spcAft>
+                <a:spcPts val="1200"/>
+              </a:spcAft>
+              <a:buChar char="•"/>
+            </a:lvl5pPr>
+            <a:lvl6pPr marL="1752600" indent="-228600">
+              <a:lnSpc>
+                <a:spcPct val="110000"/>
+              </a:lnSpc>
+              <a:spcBef>
+                <a:spcPts val="0"/>
+              </a:spcBef>
+              <a:spcAft>
+                <a:spcPts val="1200"/>
+              </a:spcAft>
+              <a:buChar char="•"/>
+            </a:lvl6pPr>
+            <a:lvl7pPr marL="2057400" indent="-228600">
+              <a:lnSpc>
+                <a:spcPct val="110000"/>
+              </a:lnSpc>
+              <a:spcBef>
+                <a:spcPts val="0"/>
+              </a:spcBef>
+              <a:spcAft>
+                <a:spcPts val="1200"/>
+              </a:spcAft>
+              <a:buChar char="•"/>
+            </a:lvl7pPr>
+            <a:lvl8pPr marL="2362200" indent="-228600">
+              <a:lnSpc>
+                <a:spcPct val="110000"/>
+              </a:lnSpc>
+              <a:spcBef>
+                <a:spcPts val="0"/>
+              </a:spcBef>
+              <a:spcAft>
+                <a:spcPts val="1200"/>
+              </a:spcAft>
+              <a:buChar char="•"/>
+            </a:lvl8pPr>
+            <a:lvl9pPr marL="2667000" indent="-228600">
+              <a:lnSpc>
+                <a:spcPct val="110000"/>
+              </a:lnSpc>
+              <a:spcBef>
+                <a:spcPts val="0"/>
+              </a:spcBef>
+              <a:spcAft>
+                <a:spcPts val="1200"/>
+              </a:spcAft>
+              <a:buChar char="•"/>
+            </a:lvl9pPr>
+          </a:lstStyle>
+          <a:p xmlns:a="http://schemas.openxmlformats.org/drawingml/2006/main"/>
+        </p:txBody>
+      </p:sp>
+      <p:sp>
+        <p:nvSpPr>
+          <p:cNvPr id="3" name="Right column">
+            <a:extLst xmlns:a="http://schemas.openxmlformats.org/drawingml/2006/main">
+              <a:ext uri="{FF2B5EF4-FFF2-40B4-BE49-F238E27FC236}">
+                <a16:creationId xmlns:a16="http://schemas.microsoft.com/office/drawing/2014/main" id="{2EF22038-1AFA-4D3C-AF5A-AC57AB1E581F}"/>
+              </a:ext>
+            </a:extLst>
+          </p:cNvPr>
+          <p:cNvSpPr>
+            <a:spLocks xmlns:a="http://schemas.openxmlformats.org/drawingml/2006/main" noGrp="1"/>
+          </p:cNvSpPr>
+          <p:nvPr>
+            <p:ph type="body" idx="2"/>
+          </p:nvPr>
+        </p:nvSpPr>
+        <p:spPr>
+          <a:xfrm xmlns:a="http://schemas.openxmlformats.org/drawingml/2006/main">
+            <a:off x="6477000" y="1905000"/>
+            <a:ext cx="5029200" cy="4267200"/>
+          </a:xfrm>
+          <a:prstGeom xmlns:a="http://schemas.openxmlformats.org/drawingml/2006/main" prst="rect">
+            <a:avLst/>
+          </a:prstGeom>
+          <a:noFill xmlns:a="http://schemas.openxmlformats.org/drawingml/2006/main"/>
+          <a:ln xmlns:a="http://schemas.openxmlformats.org/drawingml/2006/main">
+            <a:noFill/>
+            <a:prstDash val="solid"/>
+          </a:ln>
+        </p:spPr>
+        <p:txBody>
+          <a:bodyPr xmlns:a="http://schemas.openxmlformats.org/drawingml/2006/main" wrap="square" lIns="0" tIns="0" rIns="0" bIns="0" anchor="t">
+            <a:normAutofit/>
+          </a:bodyPr>
+          <a:lstStyle xmlns:a="http://schemas.openxmlformats.org/drawingml/2006/main">
+            <a:defPPr algn="l">
+              <a:defRPr sz="2100" b="0">
+                <a:solidFill>
+                  <a:schemeClr val="tx1"/>
+                </a:solidFill>
+                <a:latin typeface="+mn-lt"/>
+                <a:ea typeface="+mn-lt"/>
+                <a:cs typeface="+mn-lt"/>
+              </a:defRPr>
+            </a:defPPr>
+            <a:lvl1pPr marL="228600" indent="-228600">
+              <a:lnSpc>
+                <a:spcPct val="110000"/>
+              </a:lnSpc>
+              <a:spcBef>
+                <a:spcPts val="0"/>
+              </a:spcBef>
+              <a:spcAft>
+                <a:spcPts val="1200"/>
+              </a:spcAft>
+              <a:buChar char="•"/>
+            </a:lvl1pPr>
+            <a:lvl2pPr marL="533400" indent="-228600">
+              <a:lnSpc>
+                <a:spcPct val="110000"/>
+              </a:lnSpc>
+              <a:spcBef>
+                <a:spcPts val="0"/>
+              </a:spcBef>
+              <a:spcAft>
+                <a:spcPts val="1200"/>
+              </a:spcAft>
+              <a:buChar char="•"/>
+            </a:lvl2pPr>
+            <a:lvl3pPr marL="838200" indent="-228600">
+              <a:lnSpc>
+                <a:spcPct val="110000"/>
+              </a:lnSpc>
+              <a:spcBef>
+                <a:spcPts val="0"/>
+              </a:spcBef>
+              <a:spcAft>
+                <a:spcPts val="1200"/>
+              </a:spcAft>
+              <a:buChar char="•"/>
+            </a:lvl3pPr>
+            <a:lvl4pPr marL="1143000" indent="-228600">
+              <a:lnSpc>
+                <a:spcPct val="110000"/>
+              </a:lnSpc>
+              <a:spcBef>
+                <a:spcPts val="0"/>
+              </a:spcBef>
+              <a:spcAft>
+                <a:spcPts val="1200"/>
+              </a:spcAft>
+              <a:buChar char="•"/>
+            </a:lvl4pPr>
+            <a:lvl5pPr marL="1447800" indent="-228600">
+              <a:lnSpc>
+                <a:spcPct val="110000"/>
+              </a:lnSpc>
+              <a:spcBef>
+                <a:spcPts val="0"/>
+              </a:spcBef>
+              <a:spcAft>
+                <a:spcPts val="1200"/>
+              </a:spcAft>
+              <a:buChar char="•"/>
+            </a:lvl5pPr>
+            <a:lvl6pPr marL="1752600" indent="-228600">
+              <a:lnSpc>
+                <a:spcPct val="110000"/>
+              </a:lnSpc>
+              <a:spcBef>
+                <a:spcPts val="0"/>
+              </a:spcBef>
+              <a:spcAft>
+                <a:spcPts val="1200"/>
+              </a:spcAft>
+              <a:buChar char="•"/>
+            </a:lvl6pPr>
+            <a:lvl7pPr marL="2057400" indent="-228600">
+              <a:lnSpc>
+                <a:spcPct val="110000"/>
+              </a:lnSpc>
+              <a:spcBef>
+                <a:spcPts val="0"/>
+              </a:spcBef>
+              <a:spcAft>
+                <a:spcPts val="1200"/>
+              </a:spcAft>
+              <a:buChar char="•"/>
+            </a:lvl7pPr>
+            <a:lvl8pPr marL="2362200" indent="-228600">
+              <a:lnSpc>
+                <a:spcPct val="110000"/>
+              </a:lnSpc>
+              <a:spcBef>
+                <a:spcPts val="0"/>
+              </a:spcBef>
+              <a:spcAft>
+                <a:spcPts val="1200"/>
+              </a:spcAft>
+              <a:buChar char="•"/>
+            </a:lvl8pPr>
+            <a:lvl9pPr marL="2667000" indent="-228600">
+              <a:lnSpc>
+                <a:spcPct val="110000"/>
+              </a:lnSpc>
+              <a:spcBef>
+                <a:spcPts val="0"/>
+              </a:spcBef>
+              <a:spcAft>
+                <a:spcPts val="1200"/>
+              </a:spcAft>
+              <a:buChar char="•"/>
+            </a:lvl9pPr>
+          </a:lstStyle>
+          <a:p xmlns:a="http://schemas.openxmlformats.org/drawingml/2006/main"/>
+        </p:txBody>
+      </p:sp>
+    </p:spTree>
+  </p:cSld>
+</p:sldLayout>
+</file>
+
+<file path=ppt/slideLayouts/slideLayout5.xml><?xml version="1.0" encoding="utf-8"?>
+<p:sldLayout xmlns:p="http://schemas.openxmlformats.org/presentationml/2006/main">
+  <p:cSld name="Title and One Column">
+    <p:spTree>
+      <p:nvGrpSpPr>
+        <p:cNvPr id="1" name=""/>
+        <p:cNvGrpSpPr/>
+        <p:nvPr/>
+      </p:nvGrpSpPr>
+      <p:grpSpPr>
+        <a:xfrm xmlns:a="http://schemas.openxmlformats.org/drawingml/2006/main"/>
+      </p:grpSpPr>
+      <p:sp>
+        <p:nvSpPr>
+          <p:cNvPr id="3" name="Title">
+            <a:extLst xmlns:a="http://schemas.openxmlformats.org/drawingml/2006/main">
+              <a:ext uri="{FF2B5EF4-FFF2-40B4-BE49-F238E27FC236}">
+                <a16:creationId xmlns:a16="http://schemas.microsoft.com/office/drawing/2014/main" id="{19762F1D-E4CD-48B5-98C4-BE27CBFCDC85}"/>
+              </a:ext>
+            </a:extLst>
+          </p:cNvPr>
+          <p:cNvSpPr>
+            <a:spLocks xmlns:a="http://schemas.openxmlformats.org/drawingml/2006/main" noGrp="1"/>
+          </p:cNvSpPr>
+          <p:nvPr>
+            <p:ph type="title" idx="0"/>
+          </p:nvPr>
+        </p:nvSpPr>
+        <p:spPr>
+          <a:xfrm xmlns:a="http://schemas.openxmlformats.org/drawingml/2006/main">
+            <a:off x="685800" y="533400"/>
+            <a:ext cx="10820400" cy="838200"/>
+          </a:xfrm>
+          <a:prstGeom xmlns:a="http://schemas.openxmlformats.org/drawingml/2006/main" prst="rect">
+            <a:avLst/>
+          </a:prstGeom>
+          <a:noFill xmlns:a="http://schemas.openxmlformats.org/drawingml/2006/main"/>
+          <a:ln xmlns:a="http://schemas.openxmlformats.org/drawingml/2006/main">
+            <a:noFill/>
+            <a:prstDash val="solid"/>
+          </a:ln>
+        </p:spPr>
+        <p:txBody>
+          <a:bodyPr xmlns:a="http://schemas.openxmlformats.org/drawingml/2006/main" wrap="square" lIns="0" tIns="0" rIns="0" bIns="0" anchor="t">
+            <a:normAutofit/>
+          </a:bodyPr>
+          <a:lstStyle xmlns:a="http://schemas.openxmlformats.org/drawingml/2006/main">
+            <a:defPPr algn="l">
+              <a:defRPr sz="3300" b="1">
+                <a:solidFill>
+                  <a:schemeClr val="tx1"/>
+                </a:solidFill>
+                <a:latin typeface="+mj-lt"/>
+                <a:ea typeface="+mj-lt"/>
+                <a:cs typeface="+mj-lt"/>
+              </a:defRPr>
+            </a:defPPr>
+            <a:lvl1pPr marL="0" indent="0">
+              <a:lnSpc>
+                <a:spcPct val="110000"/>
+              </a:lnSpc>
+              <a:spcBef>
+                <a:spcPts val="0"/>
+              </a:spcBef>
+              <a:spcAft>
+                <a:spcPts val="0"/>
+              </a:spcAft>
+              <a:buNone/>
+            </a:lvl1pPr>
+            <a:lvl2pPr marL="0" indent="0">
+              <a:lnSpc>
+                <a:spcPct val="110000"/>
+              </a:lnSpc>
+              <a:spcBef>
+                <a:spcPts val="0"/>
+              </a:spcBef>
+              <a:spcAft>
+                <a:spcPts val="0"/>
+              </a:spcAft>
+              <a:buNone/>
+            </a:lvl2pPr>
+            <a:lvl3pPr marL="0" indent="0">
+              <a:lnSpc>
+                <a:spcPct val="110000"/>
+              </a:lnSpc>
+              <a:spcBef>
+                <a:spcPts val="0"/>
+              </a:spcBef>
+              <a:spcAft>
+                <a:spcPts val="0"/>
+              </a:spcAft>
+              <a:buNone/>
+            </a:lvl3pPr>
+            <a:lvl4pPr marL="0" indent="0">
+              <a:lnSpc>
+                <a:spcPct val="110000"/>
+              </a:lnSpc>
+              <a:spcBef>
+                <a:spcPts val="0"/>
+              </a:spcBef>
+              <a:spcAft>
+                <a:spcPts val="0"/>
+              </a:spcAft>
+              <a:buNone/>
+            </a:lvl4pPr>
+            <a:lvl5pPr marL="0" indent="0">
+              <a:lnSpc>
+                <a:spcPct val="110000"/>
+              </a:lnSpc>
+              <a:spcBef>
+                <a:spcPts val="0"/>
+              </a:spcBef>
+              <a:spcAft>
+                <a:spcPts val="0"/>
+              </a:spcAft>
+              <a:buNone/>
+            </a:lvl5pPr>
+            <a:lvl6pPr marL="0" indent="0">
+              <a:lnSpc>
+                <a:spcPct val="110000"/>
+              </a:lnSpc>
+              <a:spcBef>
+                <a:spcPts val="0"/>
+              </a:spcBef>
+              <a:spcAft>
+                <a:spcPts val="0"/>
+              </a:spcAft>
+              <a:buNone/>
+            </a:lvl6pPr>
+            <a:lvl7pPr marL="0" indent="0">
+              <a:lnSpc>
+                <a:spcPct val="110000"/>
+              </a:lnSpc>
+              <a:spcBef>
+                <a:spcPts val="0"/>
+              </a:spcBef>
+              <a:spcAft>
+                <a:spcPts val="0"/>
+              </a:spcAft>
+              <a:buNone/>
+            </a:lvl7pPr>
+            <a:lvl8pPr marL="0" indent="0">
+              <a:lnSpc>
+                <a:spcPct val="110000"/>
+              </a:lnSpc>
+              <a:spcBef>
+                <a:spcPts val="0"/>
+              </a:spcBef>
+              <a:spcAft>
+                <a:spcPts val="0"/>
+              </a:spcAft>
+              <a:buNone/>
+            </a:lvl8pPr>
+            <a:lvl9pPr marL="0" indent="0">
+              <a:lnSpc>
+                <a:spcPct val="110000"/>
+              </a:lnSpc>
+              <a:spcBef>
+                <a:spcPts val="0"/>
+              </a:spcBef>
+              <a:spcAft>
+                <a:spcPts val="0"/>
+              </a:spcAft>
+              <a:buNone/>
+            </a:lvl9pPr>
+          </a:lstStyle>
+          <a:p xmlns:a="http://schemas.openxmlformats.org/drawingml/2006/main"/>
+        </p:txBody>
+      </p:sp>
+      <p:sp>
+        <p:nvSpPr>
+          <p:cNvPr id="2" name="Left column">
+            <a:extLst xmlns:a="http://schemas.openxmlformats.org/drawingml/2006/main">
+              <a:ext uri="{FF2B5EF4-FFF2-40B4-BE49-F238E27FC236}">
+                <a16:creationId xmlns:a16="http://schemas.microsoft.com/office/drawing/2014/main" id="{355FF583-D554-44FB-82FD-D719D3FC60B2}"/>
+              </a:ext>
+            </a:extLst>
+          </p:cNvPr>
+          <p:cNvSpPr>
+            <a:spLocks xmlns:a="http://schemas.openxmlformats.org/drawingml/2006/main" noGrp="1"/>
+          </p:cNvSpPr>
+          <p:nvPr>
+            <p:ph type="body" idx="1"/>
+          </p:nvPr>
+        </p:nvSpPr>
+        <p:spPr>
+          <a:xfrm xmlns:a="http://schemas.openxmlformats.org/drawingml/2006/main">
+            <a:off x="685800" y="1905000"/>
+            <a:ext cx="5029200" cy="4267200"/>
+          </a:xfrm>
+          <a:prstGeom xmlns:a="http://schemas.openxmlformats.org/drawingml/2006/main" prst="rect">
+            <a:avLst/>
+          </a:prstGeom>
+          <a:noFill xmlns:a="http://schemas.openxmlformats.org/drawingml/2006/main"/>
+          <a:ln xmlns:a="http://schemas.openxmlformats.org/drawingml/2006/main">
+            <a:noFill/>
+            <a:prstDash val="solid"/>
+          </a:ln>
+        </p:spPr>
+        <p:txBody>
+          <a:bodyPr xmlns:a="http://schemas.openxmlformats.org/drawingml/2006/main" wrap="square" lIns="0" tIns="0" rIns="0" bIns="0" anchor="t">
+            <a:normAutofit/>
+          </a:bodyPr>
+          <a:lstStyle xmlns:a="http://schemas.openxmlformats.org/drawingml/2006/main">
+            <a:defPPr algn="l">
+              <a:defRPr sz="2250" b="0">
+                <a:solidFill>
+                  <a:schemeClr val="tx1"/>
+                </a:solidFill>
+                <a:latin typeface="+mn-lt"/>
+                <a:ea typeface="+mn-lt"/>
+                <a:cs typeface="+mn-lt"/>
+              </a:defRPr>
+            </a:defPPr>
+            <a:lvl1pPr marL="228600" indent="-228600">
+              <a:lnSpc>
+                <a:spcPct val="110000"/>
+              </a:lnSpc>
+              <a:spcBef>
+                <a:spcPts val="0"/>
+              </a:spcBef>
+              <a:spcAft>
+                <a:spcPts val="1200"/>
+              </a:spcAft>
+              <a:buChar char="•"/>
+            </a:lvl1pPr>
+            <a:lvl2pPr marL="533400" indent="-228600">
+              <a:lnSpc>
+                <a:spcPct val="110000"/>
+              </a:lnSpc>
+              <a:spcBef>
+                <a:spcPts val="0"/>
+              </a:spcBef>
+              <a:spcAft>
+                <a:spcPts val="1200"/>
+              </a:spcAft>
+              <a:buChar char="•"/>
+            </a:lvl2pPr>
+            <a:lvl3pPr marL="838200" indent="-228600">
+              <a:lnSpc>
+                <a:spcPct val="110000"/>
+              </a:lnSpc>
+              <a:spcBef>
+                <a:spcPts val="0"/>
+              </a:spcBef>
+              <a:spcAft>
+                <a:spcPts val="1200"/>
+              </a:spcAft>
+              <a:buChar char="•"/>
+            </a:lvl3pPr>
+            <a:lvl4pPr marL="1143000" indent="-228600">
+              <a:lnSpc>
+                <a:spcPct val="110000"/>
+              </a:lnSpc>
+              <a:spcBef>
+                <a:spcPts val="0"/>
+              </a:spcBef>
+              <a:spcAft>
+                <a:spcPts val="1200"/>
+              </a:spcAft>
+              <a:buChar char="•"/>
+            </a:lvl4pPr>
+            <a:lvl5pPr marL="1447800" indent="-228600">
+              <a:lnSpc>
+                <a:spcPct val="110000"/>
+              </a:lnSpc>
+              <a:spcBef>
+                <a:spcPts val="0"/>
+              </a:spcBef>
+              <a:spcAft>
+                <a:spcPts val="1200"/>
+              </a:spcAft>
+              <a:buChar char="•"/>
+            </a:lvl5pPr>
+            <a:lvl6pPr marL="1752600" indent="-228600">
+              <a:lnSpc>
+                <a:spcPct val="110000"/>
+              </a:lnSpc>
+              <a:spcBef>
+                <a:spcPts val="0"/>
+              </a:spcBef>
+              <a:spcAft>
+                <a:spcPts val="1200"/>
+              </a:spcAft>
+              <a:buChar char="•"/>
+            </a:lvl6pPr>
+            <a:lvl7pPr marL="2057400" indent="-228600">
+              <a:lnSpc>
+                <a:spcPct val="110000"/>
+              </a:lnSpc>
+              <a:spcBef>
+                <a:spcPts val="0"/>
+              </a:spcBef>
+              <a:spcAft>
+                <a:spcPts val="1200"/>
+              </a:spcAft>
+              <a:buChar char="•"/>
+            </a:lvl7pPr>
+            <a:lvl8pPr marL="2362200" indent="-228600">
+              <a:lnSpc>
+                <a:spcPct val="110000"/>
+              </a:lnSpc>
+              <a:spcBef>
+                <a:spcPts val="0"/>
+              </a:spcBef>
+              <a:spcAft>
+                <a:spcPts val="1200"/>
+              </a:spcAft>
+              <a:buChar char="•"/>
+            </a:lvl8pPr>
+            <a:lvl9pPr marL="2667000" indent="-228600">
+              <a:lnSpc>
+                <a:spcPct val="110000"/>
+              </a:lnSpc>
+              <a:spcBef>
+                <a:spcPts val="0"/>
+              </a:spcBef>
+              <a:spcAft>
+                <a:spcPts val="1200"/>
+              </a:spcAft>
+              <a:buChar char="•"/>
+            </a:lvl9pPr>
+          </a:lstStyle>
+          <a:p xmlns:a="http://schemas.openxmlformats.org/drawingml/2006/main"/>
+        </p:txBody>
+      </p:sp>
+    </p:spTree>
+  </p:cSld>
+</p:sldLayout>
+</file>
+
+<file path=ppt/slideLayouts/slideLayout6.xml><?xml version="1.0" encoding="utf-8"?>
+<p:sldLayout xmlns:p="http://schemas.openxmlformats.org/presentationml/2006/main" type="blank">
+  <p:cSld name="Blank">
+    <p:spTree>
+      <p:nvGrpSpPr>
+        <p:cNvPr id="1" name=""/>
+        <p:cNvGrpSpPr/>
+        <p:nvPr/>
+      </p:nvGrpSpPr>
+      <p:grpSpPr>
+        <a:xfrm xmlns:a="http://schemas.openxmlformats.org/drawingml/2006/main"/>
+      </p:grpSpPr>
     </p:spTree>
   </p:cSld>
 </p:sldLayout>
@@ -895,7 +2550,12 @@
   </p:cSld>
   <p:clrMap bg1="lt1" tx1="dk1" bg2="lt2" tx2="dk2" accent1="accent1" accent2="accent2" accent3="accent3" accent4="accent4" accent5="accent5" accent6="accent6" hlink="hlink" folHlink="folHlink"/>
   <p:sldLayoutIdLst>
-    <p:sldLayoutId xmlns:r="http://schemas.openxmlformats.org/officeDocument/2006/relationships" id="2147483649" r:id="R495ec2172879485c"/>
+    <p:sldLayoutId xmlns:r="http://schemas.openxmlformats.org/officeDocument/2006/relationships" id="2147483649" r:id="R36ccb8aa85494639"/>
+    <p:sldLayoutId xmlns:r="http://schemas.openxmlformats.org/officeDocument/2006/relationships" id="2147483650" r:id="Rd1206d5184124468"/>
+    <p:sldLayoutId xmlns:r="http://schemas.openxmlformats.org/officeDocument/2006/relationships" id="2147483651" r:id="Rddf9d553421e4a83"/>
+    <p:sldLayoutId xmlns:r="http://schemas.openxmlformats.org/officeDocument/2006/relationships" id="2147483652" r:id="Rc9133cf6ebf84b1b"/>
+    <p:sldLayoutId xmlns:r="http://schemas.openxmlformats.org/officeDocument/2006/relationships" id="2147483653" r:id="Rc41cf46c760747e7"/>
+    <p:sldLayoutId xmlns:r="http://schemas.openxmlformats.org/officeDocument/2006/relationships" id="2147483654" r:id="R3a622154577d48cc"/>
   </p:sldLayoutIdLst>
   <p:txStyles>
     <p:titleStyle>
@@ -1218,16 +2878,16 @@
         <a:srgbClr val="96607D"/>
       </a:folHlink>
     </a:clrScheme>
-    <a:fontScheme name="Office">
+    <a:fontScheme name="">
       <a:majorFont>
-        <a:latin typeface="Calibri Light"/>
-        <a:ea typeface="Calibri Light"/>
-        <a:cs typeface="Calibri Light"/>
+        <a:latin typeface="Aptos"/>
+        <a:ea typeface=""/>
+        <a:cs typeface=""/>
       </a:majorFont>
       <a:minorFont>
-        <a:latin typeface="Calibri"/>
-        <a:ea typeface="Calibri"/>
-        <a:cs typeface="Calibri"/>
+        <a:latin typeface="Aptos"/>
+        <a:ea typeface=""/>
+        <a:cs typeface=""/>
       </a:minorFont>
     </a:fontScheme>
     <a:fmtScheme name="ChatGPT">
@@ -1446,7 +3106,7 @@
           <p:cNvPr id="5" name="">
             <a:extLst xmlns:a="http://schemas.openxmlformats.org/drawingml/2006/main">
               <a:ext uri="{FF2B5EF4-FFF2-40B4-BE49-F238E27FC236}">
-                <a16:creationId xmlns:a16="http://schemas.microsoft.com/office/drawing/2014/main" id="{C98B4BF4-55D6-4B43-8BAB-9C25DD1FE954}"/>
+                <a16:creationId xmlns:a16="http://schemas.microsoft.com/office/drawing/2014/main" id="{B4E3021D-C5E1-49C9-80E9-EE19134E63E5}"/>
               </a:ext>
             </a:extLst>
           </p:cNvPr>
@@ -1472,7 +3132,18 @@
           <a:bodyPr xmlns:a="http://schemas.openxmlformats.org/drawingml/2006/main" anchor="ctr">
             <a:noAutofit/>
           </a:bodyPr>
-          <a:lstStyle xmlns:a="http://schemas.openxmlformats.org/drawingml/2006/main"/>
+          <a:lstStyle xmlns:a="http://schemas.openxmlformats.org/drawingml/2006/main">
+            <a:defPPr algn="l">
+              <a:defRPr sz="2700" b="1">
+                <a:solidFill>
+                  <a:srgbClr val="161616"/>
+                </a:solidFill>
+                <a:latin typeface="Arial"/>
+                <a:ea typeface="Arial"/>
+                <a:cs typeface="Arial"/>
+              </a:defRPr>
+            </a:defPPr>
+          </a:lstStyle>
           <a:p xmlns:a="http://schemas.openxmlformats.org/drawingml/2006/main">
             <a:pPr algn="l">
               <a:defRPr sz="2700" b="1">
@@ -1503,7 +3174,7 @@
           <p:cNvPr id="2" name="">
             <a:extLst xmlns:a="http://schemas.openxmlformats.org/drawingml/2006/main">
               <a:ext uri="{FF2B5EF4-FFF2-40B4-BE49-F238E27FC236}">
-                <a16:creationId xmlns:a16="http://schemas.microsoft.com/office/drawing/2014/main" id="{5C72A839-F658-4B46-A6A4-E7769F60F48C}"/>
+                <a16:creationId xmlns:a16="http://schemas.microsoft.com/office/drawing/2014/main" id="{0151DC3A-FFB5-4903-AB07-43EB6433EE81}"/>
               </a:ext>
             </a:extLst>
           </p:cNvPr>
@@ -1529,7 +3200,18 @@
           <a:bodyPr xmlns:a="http://schemas.openxmlformats.org/drawingml/2006/main">
             <a:noAutofit/>
           </a:bodyPr>
-          <a:lstStyle xmlns:a="http://schemas.openxmlformats.org/drawingml/2006/main"/>
+          <a:lstStyle xmlns:a="http://schemas.openxmlformats.org/drawingml/2006/main">
+            <a:defPPr>
+              <a:defRPr sz="3750" b="1">
+                <a:solidFill>
+                  <a:srgbClr val="161616"/>
+                </a:solidFill>
+                <a:latin typeface="Arial"/>
+                <a:ea typeface="Arial"/>
+                <a:cs typeface="Arial"/>
+              </a:defRPr>
+            </a:defPPr>
+          </a:lstStyle>
           <a:p xmlns:a="http://schemas.openxmlformats.org/drawingml/2006/main">
             <a:pPr>
               <a:defRPr sz="3750" b="1">
@@ -1560,7 +3242,7 @@
           <p:cNvPr id="3" name="">
             <a:extLst xmlns:a="http://schemas.openxmlformats.org/drawingml/2006/main">
               <a:ext uri="{FF2B5EF4-FFF2-40B4-BE49-F238E27FC236}">
-                <a16:creationId xmlns:a16="http://schemas.microsoft.com/office/drawing/2014/main" id="{73111CBA-C65A-4710-8D56-8988C651D4FA}"/>
+                <a16:creationId xmlns:a16="http://schemas.microsoft.com/office/drawing/2014/main" id="{98AC03EA-DB0B-41CE-8B1D-D3DC9B2347C6}"/>
               </a:ext>
             </a:extLst>
           </p:cNvPr>
@@ -1586,7 +3268,18 @@
           <a:bodyPr xmlns:a="http://schemas.openxmlformats.org/drawingml/2006/main">
             <a:noAutofit/>
           </a:bodyPr>
-          <a:lstStyle xmlns:a="http://schemas.openxmlformats.org/drawingml/2006/main"/>
+          <a:lstStyle xmlns:a="http://schemas.openxmlformats.org/drawingml/2006/main">
+            <a:defPPr>
+              <a:defRPr sz="2250" b="0">
+                <a:solidFill>
+                  <a:srgbClr val="161616"/>
+                </a:solidFill>
+                <a:latin typeface="Arial"/>
+                <a:ea typeface="Arial"/>
+                <a:cs typeface="Arial"/>
+              </a:defRPr>
+            </a:defPPr>
+          </a:lstStyle>
           <a:p xmlns:a="http://schemas.openxmlformats.org/drawingml/2006/main">
             <a:pPr>
               <a:defRPr sz="2250" b="0">
@@ -1617,7 +3310,7 @@
           <p:cNvPr id="4" name="">
             <a:extLst xmlns:a="http://schemas.openxmlformats.org/drawingml/2006/main">
               <a:ext uri="{FF2B5EF4-FFF2-40B4-BE49-F238E27FC236}">
-                <a16:creationId xmlns:a16="http://schemas.microsoft.com/office/drawing/2014/main" id="{258CDA84-17F6-4F98-8BD5-1FB985B66CAA}"/>
+                <a16:creationId xmlns:a16="http://schemas.microsoft.com/office/drawing/2014/main" id="{90AA54A5-D98E-46C7-82A3-8C841C82EFE9}"/>
               </a:ext>
             </a:extLst>
           </p:cNvPr>
@@ -1643,7 +3336,18 @@
           <a:bodyPr xmlns:a="http://schemas.openxmlformats.org/drawingml/2006/main">
             <a:noAutofit/>
           </a:bodyPr>
-          <a:lstStyle xmlns:a="http://schemas.openxmlformats.org/drawingml/2006/main"/>
+          <a:lstStyle xmlns:a="http://schemas.openxmlformats.org/drawingml/2006/main">
+            <a:defPPr>
+              <a:defRPr sz="1800" b="0">
+                <a:solidFill>
+                  <a:srgbClr val="161616"/>
+                </a:solidFill>
+                <a:latin typeface="Arial"/>
+                <a:ea typeface="Arial"/>
+                <a:cs typeface="Arial"/>
+              </a:defRPr>
+            </a:defPPr>
+          </a:lstStyle>
           <a:p xmlns:a="http://schemas.openxmlformats.org/drawingml/2006/main">
             <a:pPr>
               <a:defRPr sz="1800" b="0">
@@ -1695,7 +3399,7 @@
     </p:spTree>
     <p:extLst>
       <p:ext uri="{BB962C8B-B14F-4D97-AF65-F5344CB8AC3E}">
-        <p14:creationId xmlns:p14="http://schemas.microsoft.com/office/powerpoint/2010/main" val="445576041"/>
+        <p14:creationId xmlns:p14="http://schemas.microsoft.com/office/powerpoint/2010/main" val="1438748724"/>
       </p:ext>
     </p:extLst>
   </p:cSld>
@@ -1723,10 +3427,10 @@
       </p:grpSpPr>
       <p:sp>
         <p:nvSpPr>
-          <p:cNvPr id="21" name="">
+          <p:cNvPr id="20" name="">
             <a:extLst xmlns:a="http://schemas.openxmlformats.org/drawingml/2006/main">
               <a:ext uri="{FF2B5EF4-FFF2-40B4-BE49-F238E27FC236}">
-                <a16:creationId xmlns:a16="http://schemas.microsoft.com/office/drawing/2014/main" id="{A3384AC1-8578-45E0-929B-054A87DD3B4D}"/>
+                <a16:creationId xmlns:a16="http://schemas.microsoft.com/office/drawing/2014/main" id="{248DEEEF-55FA-43B1-AC37-70C5B12F7040}"/>
               </a:ext>
             </a:extLst>
           </p:cNvPr>
@@ -1752,7 +3456,18 @@
           <a:bodyPr xmlns:a="http://schemas.openxmlformats.org/drawingml/2006/main" anchor="ctr">
             <a:noAutofit/>
           </a:bodyPr>
-          <a:lstStyle xmlns:a="http://schemas.openxmlformats.org/drawingml/2006/main"/>
+          <a:lstStyle xmlns:a="http://schemas.openxmlformats.org/drawingml/2006/main">
+            <a:defPPr algn="l">
+              <a:defRPr sz="2700" b="1">
+                <a:solidFill>
+                  <a:srgbClr val="161616"/>
+                </a:solidFill>
+                <a:latin typeface="Arial"/>
+                <a:ea typeface="Arial"/>
+                <a:cs typeface="Arial"/>
+              </a:defRPr>
+            </a:defPPr>
+          </a:lstStyle>
           <a:p xmlns:a="http://schemas.openxmlformats.org/drawingml/2006/main">
             <a:pPr algn="l">
               <a:defRPr sz="2700" b="1">
@@ -1783,7 +3498,7 @@
           <p:cNvPr id="2" name="">
             <a:extLst xmlns:a="http://schemas.openxmlformats.org/drawingml/2006/main">
               <a:ext uri="{FF2B5EF4-FFF2-40B4-BE49-F238E27FC236}">
-                <a16:creationId xmlns:a16="http://schemas.microsoft.com/office/drawing/2014/main" id="{8754E850-A399-4789-97FF-54617F585BED}"/>
+                <a16:creationId xmlns:a16="http://schemas.microsoft.com/office/drawing/2014/main" id="{9DF8398C-E9A2-4E5F-B697-F395DB40A12B}"/>
               </a:ext>
             </a:extLst>
           </p:cNvPr>
@@ -1811,7 +3526,15 @@
         </p:spPr>
         <p:txBody>
           <a:bodyPr xmlns:a="http://schemas.openxmlformats.org/drawingml/2006/main" anchor="ctr"/>
-          <a:lstStyle xmlns:a="http://schemas.openxmlformats.org/drawingml/2006/main"/>
+          <a:lstStyle xmlns:a="http://schemas.openxmlformats.org/drawingml/2006/main">
+            <a:defPPr algn="ctr">
+              <a:defRPr sz="1725">
+                <a:latin typeface="Arial"/>
+                <a:ea typeface="Arial"/>
+                <a:cs typeface="Arial"/>
+              </a:defRPr>
+            </a:defPPr>
+          </a:lstStyle>
           <a:p xmlns:a="http://schemas.openxmlformats.org/drawingml/2006/main">
             <a:pPr algn="ctr">
               <a:defRPr sz="1725">
@@ -1836,7 +3559,7 @@
           <p:cNvPr id="3" name="">
             <a:extLst xmlns:a="http://schemas.openxmlformats.org/drawingml/2006/main">
               <a:ext uri="{FF2B5EF4-FFF2-40B4-BE49-F238E27FC236}">
-                <a16:creationId xmlns:a16="http://schemas.microsoft.com/office/drawing/2014/main" id="{0BDDFA89-0079-49F6-B451-01B72D8B11A2}"/>
+                <a16:creationId xmlns:a16="http://schemas.microsoft.com/office/drawing/2014/main" id="{0C738BD4-67A7-442B-B3FA-CFF7BC161EA6}"/>
               </a:ext>
             </a:extLst>
           </p:cNvPr>
@@ -1857,6 +3580,7 @@
             <a:solidFill>
               <a:srgbClr val="888888"/>
             </a:solidFill>
+            <a:prstDash val="dash"/>
           </a:ln>
         </p:spPr>
       </p:sp>
@@ -1865,7 +3589,7 @@
           <p:cNvPr id="4" name="">
             <a:extLst xmlns:a="http://schemas.openxmlformats.org/drawingml/2006/main">
               <a:ext uri="{FF2B5EF4-FFF2-40B4-BE49-F238E27FC236}">
-                <a16:creationId xmlns:a16="http://schemas.microsoft.com/office/drawing/2014/main" id="{2421DE23-F428-4893-8917-987C4417EAF3}"/>
+                <a16:creationId xmlns:a16="http://schemas.microsoft.com/office/drawing/2014/main" id="{706E0A8C-0958-4B2B-B7BD-89125B53915A}"/>
               </a:ext>
             </a:extLst>
           </p:cNvPr>
@@ -1893,7 +3617,15 @@
         </p:spPr>
         <p:txBody>
           <a:bodyPr xmlns:a="http://schemas.openxmlformats.org/drawingml/2006/main" anchor="ctr"/>
-          <a:lstStyle xmlns:a="http://schemas.openxmlformats.org/drawingml/2006/main"/>
+          <a:lstStyle xmlns:a="http://schemas.openxmlformats.org/drawingml/2006/main">
+            <a:defPPr algn="ctr">
+              <a:defRPr sz="1725">
+                <a:latin typeface="Arial"/>
+                <a:ea typeface="Arial"/>
+                <a:cs typeface="Arial"/>
+              </a:defRPr>
+            </a:defPPr>
+          </a:lstStyle>
           <a:p xmlns:a="http://schemas.openxmlformats.org/drawingml/2006/main">
             <a:pPr algn="ctr">
               <a:defRPr sz="1725">
@@ -1918,7 +3650,7 @@
           <p:cNvPr id="5" name="">
             <a:extLst xmlns:a="http://schemas.openxmlformats.org/drawingml/2006/main">
               <a:ext uri="{FF2B5EF4-FFF2-40B4-BE49-F238E27FC236}">
-                <a16:creationId xmlns:a16="http://schemas.microsoft.com/office/drawing/2014/main" id="{3891EA69-2D10-4E8C-B8E0-8E76DAA9FE52}"/>
+                <a16:creationId xmlns:a16="http://schemas.microsoft.com/office/drawing/2014/main" id="{80251551-76B1-4ED7-B2E4-256580481AAB}"/>
               </a:ext>
             </a:extLst>
           </p:cNvPr>
@@ -1939,6 +3671,7 @@
             <a:solidFill>
               <a:srgbClr val="888888"/>
             </a:solidFill>
+            <a:prstDash val="dash"/>
           </a:ln>
         </p:spPr>
       </p:sp>
@@ -1947,7 +3680,7 @@
           <p:cNvPr id="6" name="">
             <a:extLst xmlns:a="http://schemas.openxmlformats.org/drawingml/2006/main">
               <a:ext uri="{FF2B5EF4-FFF2-40B4-BE49-F238E27FC236}">
-                <a16:creationId xmlns:a16="http://schemas.microsoft.com/office/drawing/2014/main" id="{5FEF5CA9-F861-4D83-A9C0-85767DBCF8FC}"/>
+                <a16:creationId xmlns:a16="http://schemas.microsoft.com/office/drawing/2014/main" id="{A91AFC5D-2625-4316-8F89-E60216C2476D}"/>
               </a:ext>
             </a:extLst>
           </p:cNvPr>
@@ -1975,7 +3708,15 @@
         </p:spPr>
         <p:txBody>
           <a:bodyPr xmlns:a="http://schemas.openxmlformats.org/drawingml/2006/main" anchor="ctr"/>
-          <a:lstStyle xmlns:a="http://schemas.openxmlformats.org/drawingml/2006/main"/>
+          <a:lstStyle xmlns:a="http://schemas.openxmlformats.org/drawingml/2006/main">
+            <a:defPPr algn="ctr">
+              <a:defRPr sz="1725">
+                <a:latin typeface="Arial"/>
+                <a:ea typeface="Arial"/>
+                <a:cs typeface="Arial"/>
+              </a:defRPr>
+            </a:defPPr>
+          </a:lstStyle>
           <a:p xmlns:a="http://schemas.openxmlformats.org/drawingml/2006/main">
             <a:pPr algn="ctr">
               <a:defRPr sz="1725">
@@ -2000,7 +3741,7 @@
           <p:cNvPr id="7" name="">
             <a:extLst xmlns:a="http://schemas.openxmlformats.org/drawingml/2006/main">
               <a:ext uri="{FF2B5EF4-FFF2-40B4-BE49-F238E27FC236}">
-                <a16:creationId xmlns:a16="http://schemas.microsoft.com/office/drawing/2014/main" id="{6583FFC6-C95D-435A-A6DC-787BE2F25546}"/>
+                <a16:creationId xmlns:a16="http://schemas.microsoft.com/office/drawing/2014/main" id="{430A96FC-CCDE-458C-A32A-4ACF97E573A7}"/>
               </a:ext>
             </a:extLst>
           </p:cNvPr>
@@ -2021,6 +3762,7 @@
             <a:solidFill>
               <a:srgbClr val="888888"/>
             </a:solidFill>
+            <a:prstDash val="dash"/>
           </a:ln>
         </p:spPr>
       </p:sp>
@@ -2029,7 +3771,7 @@
           <p:cNvPr id="8" name="">
             <a:extLst xmlns:a="http://schemas.openxmlformats.org/drawingml/2006/main">
               <a:ext uri="{FF2B5EF4-FFF2-40B4-BE49-F238E27FC236}">
-                <a16:creationId xmlns:a16="http://schemas.microsoft.com/office/drawing/2014/main" id="{11FA420C-8C53-4D6C-B79F-2543FE3E431A}"/>
+                <a16:creationId xmlns:a16="http://schemas.microsoft.com/office/drawing/2014/main" id="{86BF2A53-08FC-4E72-8490-F5C76D209C75}"/>
               </a:ext>
             </a:extLst>
           </p:cNvPr>
@@ -2057,7 +3799,15 @@
         </p:spPr>
         <p:txBody>
           <a:bodyPr xmlns:a="http://schemas.openxmlformats.org/drawingml/2006/main" anchor="ctr"/>
-          <a:lstStyle xmlns:a="http://schemas.openxmlformats.org/drawingml/2006/main"/>
+          <a:lstStyle xmlns:a="http://schemas.openxmlformats.org/drawingml/2006/main">
+            <a:defPPr algn="ctr">
+              <a:defRPr sz="1725">
+                <a:latin typeface="Arial"/>
+                <a:ea typeface="Arial"/>
+                <a:cs typeface="Arial"/>
+              </a:defRPr>
+            </a:defPPr>
+          </a:lstStyle>
           <a:p xmlns:a="http://schemas.openxmlformats.org/drawingml/2006/main">
             <a:pPr algn="ctr">
               <a:defRPr sz="1725">
@@ -2082,7 +3832,7 @@
           <p:cNvPr id="9" name="">
             <a:extLst xmlns:a="http://schemas.openxmlformats.org/drawingml/2006/main">
               <a:ext uri="{FF2B5EF4-FFF2-40B4-BE49-F238E27FC236}">
-                <a16:creationId xmlns:a16="http://schemas.microsoft.com/office/drawing/2014/main" id="{1F530DC7-91D6-40A2-B3CC-45CFB68C42BE}"/>
+                <a16:creationId xmlns:a16="http://schemas.microsoft.com/office/drawing/2014/main" id="{87BE7A36-815B-4DF5-8080-6C627FDECBE9}"/>
               </a:ext>
             </a:extLst>
           </p:cNvPr>
@@ -2103,45 +3853,45 @@
             <a:solidFill>
               <a:srgbClr val="888888"/>
             </a:solidFill>
+            <a:prstDash val="dash"/>
           </a:ln>
         </p:spPr>
       </p:sp>
-      <p:sp>
-        <p:nvSpPr>
+      <p:cxnSp>
+        <p:nvCxnSpPr>
           <p:cNvPr id="10" name="">
             <a:extLst xmlns:a="http://schemas.openxmlformats.org/drawingml/2006/main">
               <a:ext uri="{FF2B5EF4-FFF2-40B4-BE49-F238E27FC236}">
-                <a16:creationId xmlns:a16="http://schemas.microsoft.com/office/drawing/2014/main" id="{00CBAA62-1412-4601-857A-7B712EF4385D}"/>
+                <a16:creationId xmlns:a16="http://schemas.microsoft.com/office/drawing/2014/main" id="{FF57C385-C3AF-47C1-96F4-00AA53060598}"/>
               </a:ext>
             </a:extLst>
           </p:cNvPr>
-          <p:cNvSpPr>
-            <a:spLocks xmlns:a="http://schemas.openxmlformats.org/drawingml/2006/main" noGrp="1"/>
-          </p:cNvSpPr>
+          <p:cNvCxnSpPr/>
           <p:nvPr/>
-        </p:nvSpPr>
+        </p:nvCxnSpPr>
         <p:spPr>
           <a:xfrm xmlns:a="http://schemas.openxmlformats.org/drawingml/2006/main">
             <a:off x="1000125" y="2505075"/>
-            <a:ext cx="3397250" cy="104775"/>
+            <a:ext cx="3397250" cy="0"/>
           </a:xfrm>
-          <a:prstGeom xmlns:a="http://schemas.openxmlformats.org/drawingml/2006/main" prst="rightArrow">
+          <a:prstGeom xmlns:a="http://schemas.openxmlformats.org/drawingml/2006/main" prst="straightConnector1">
             <a:avLst/>
           </a:prstGeom>
-          <a:solidFill xmlns:a="http://schemas.openxmlformats.org/drawingml/2006/main">
-            <a:srgbClr val="333333"/>
-          </a:solidFill>
-          <a:ln xmlns:a="http://schemas.openxmlformats.org/drawingml/2006/main" w="0">
-            <a:noFill/>
+          <a:ln xmlns:a="http://schemas.openxmlformats.org/drawingml/2006/main" w="17145">
+            <a:solidFill>
+              <a:srgbClr val="111111"/>
+            </a:solidFill>
+            <a:prstDash val="solid"/>
+            <a:tailEnd type="triangle" w="med" len="med"/>
           </a:ln>
         </p:spPr>
-      </p:sp>
+      </p:cxnSp>
       <p:sp>
         <p:nvSpPr>
           <p:cNvPr id="11" name="">
             <a:extLst xmlns:a="http://schemas.openxmlformats.org/drawingml/2006/main">
               <a:ext uri="{FF2B5EF4-FFF2-40B4-BE49-F238E27FC236}">
-                <a16:creationId xmlns:a16="http://schemas.microsoft.com/office/drawing/2014/main" id="{41804227-5DAB-4510-B75D-1D481F0A56A7}"/>
+                <a16:creationId xmlns:a16="http://schemas.microsoft.com/office/drawing/2014/main" id="{83EE5ABF-5B55-47A4-8703-5859E3C91351}"/>
               </a:ext>
             </a:extLst>
           </p:cNvPr>
@@ -2167,7 +3917,18 @@
           <a:bodyPr xmlns:a="http://schemas.openxmlformats.org/drawingml/2006/main">
             <a:noAutofit/>
           </a:bodyPr>
-          <a:lstStyle xmlns:a="http://schemas.openxmlformats.org/drawingml/2006/main"/>
+          <a:lstStyle xmlns:a="http://schemas.openxmlformats.org/drawingml/2006/main">
+            <a:defPPr>
+              <a:defRPr sz="1650" b="0">
+                <a:solidFill>
+                  <a:srgbClr val="161616"/>
+                </a:solidFill>
+                <a:latin typeface="Arial"/>
+                <a:ea typeface="Arial"/>
+                <a:cs typeface="Arial"/>
+              </a:defRPr>
+            </a:defPPr>
+          </a:lstStyle>
           <a:p xmlns:a="http://schemas.openxmlformats.org/drawingml/2006/main">
             <a:pPr>
               <a:defRPr sz="1650" b="0">
@@ -2193,42 +3954,41 @@
           </a:p>
         </p:txBody>
       </p:sp>
-      <p:sp>
-        <p:nvSpPr>
+      <p:cxnSp>
+        <p:nvCxnSpPr>
           <p:cNvPr id="12" name="">
             <a:extLst xmlns:a="http://schemas.openxmlformats.org/drawingml/2006/main">
               <a:ext uri="{FF2B5EF4-FFF2-40B4-BE49-F238E27FC236}">
-                <a16:creationId xmlns:a16="http://schemas.microsoft.com/office/drawing/2014/main" id="{5DFC9221-0F0B-42FA-ABD9-206201058D10}"/>
+                <a16:creationId xmlns:a16="http://schemas.microsoft.com/office/drawing/2014/main" id="{2D0206F8-37D5-4C26-A8EF-32208A94305F}"/>
               </a:ext>
             </a:extLst>
           </p:cNvPr>
-          <p:cNvSpPr>
-            <a:spLocks xmlns:a="http://schemas.openxmlformats.org/drawingml/2006/main" noGrp="1"/>
-          </p:cNvSpPr>
+          <p:cNvCxnSpPr/>
           <p:nvPr/>
-        </p:nvSpPr>
+        </p:nvCxnSpPr>
         <p:spPr>
           <a:xfrm xmlns:a="http://schemas.openxmlformats.org/drawingml/2006/main">
             <a:off x="4397375" y="3124200"/>
-            <a:ext cx="3397250" cy="104775"/>
+            <a:ext cx="3397250" cy="0"/>
           </a:xfrm>
-          <a:prstGeom xmlns:a="http://schemas.openxmlformats.org/drawingml/2006/main" prst="rightArrow">
+          <a:prstGeom xmlns:a="http://schemas.openxmlformats.org/drawingml/2006/main" prst="straightConnector1">
             <a:avLst/>
           </a:prstGeom>
-          <a:solidFill xmlns:a="http://schemas.openxmlformats.org/drawingml/2006/main">
-            <a:srgbClr val="333333"/>
-          </a:solidFill>
-          <a:ln xmlns:a="http://schemas.openxmlformats.org/drawingml/2006/main" w="0">
-            <a:noFill/>
+          <a:ln xmlns:a="http://schemas.openxmlformats.org/drawingml/2006/main" w="17145">
+            <a:solidFill>
+              <a:srgbClr val="111111"/>
+            </a:solidFill>
+            <a:prstDash val="solid"/>
+            <a:tailEnd type="triangle" w="med" len="med"/>
           </a:ln>
         </p:spPr>
-      </p:sp>
+      </p:cxnSp>
       <p:sp>
         <p:nvSpPr>
           <p:cNvPr id="13" name="">
             <a:extLst xmlns:a="http://schemas.openxmlformats.org/drawingml/2006/main">
               <a:ext uri="{FF2B5EF4-FFF2-40B4-BE49-F238E27FC236}">
-                <a16:creationId xmlns:a16="http://schemas.microsoft.com/office/drawing/2014/main" id="{BC44E413-47F6-4071-AAE4-B8CB8B468A31}"/>
+                <a16:creationId xmlns:a16="http://schemas.microsoft.com/office/drawing/2014/main" id="{6A2A16B1-EF2E-475D-9AB8-78B7C9D3D15C}"/>
               </a:ext>
             </a:extLst>
           </p:cNvPr>
@@ -2254,7 +4014,18 @@
           <a:bodyPr xmlns:a="http://schemas.openxmlformats.org/drawingml/2006/main">
             <a:noAutofit/>
           </a:bodyPr>
-          <a:lstStyle xmlns:a="http://schemas.openxmlformats.org/drawingml/2006/main"/>
+          <a:lstStyle xmlns:a="http://schemas.openxmlformats.org/drawingml/2006/main">
+            <a:defPPr>
+              <a:defRPr sz="1650" b="0">
+                <a:solidFill>
+                  <a:srgbClr val="161616"/>
+                </a:solidFill>
+                <a:latin typeface="Arial"/>
+                <a:ea typeface="Arial"/>
+                <a:cs typeface="Arial"/>
+              </a:defRPr>
+            </a:defPPr>
+          </a:lstStyle>
           <a:p xmlns:a="http://schemas.openxmlformats.org/drawingml/2006/main">
             <a:pPr>
               <a:defRPr sz="1650" b="0">
@@ -2280,42 +4051,41 @@
           </a:p>
         </p:txBody>
       </p:sp>
-      <p:sp>
-        <p:nvSpPr>
+      <p:cxnSp>
+        <p:nvCxnSpPr>
           <p:cNvPr id="14" name="">
             <a:extLst xmlns:a="http://schemas.openxmlformats.org/drawingml/2006/main">
               <a:ext uri="{FF2B5EF4-FFF2-40B4-BE49-F238E27FC236}">
-                <a16:creationId xmlns:a16="http://schemas.microsoft.com/office/drawing/2014/main" id="{75C05846-EE6E-403B-97F4-DFCE796BEB28}"/>
+                <a16:creationId xmlns:a16="http://schemas.microsoft.com/office/drawing/2014/main" id="{2108FDF9-C3C4-489A-918B-C55E0FADCDED}"/>
               </a:ext>
             </a:extLst>
           </p:cNvPr>
-          <p:cNvSpPr>
-            <a:spLocks xmlns:a="http://schemas.openxmlformats.org/drawingml/2006/main" noGrp="1"/>
-          </p:cNvSpPr>
+          <p:cNvCxnSpPr/>
           <p:nvPr/>
-        </p:nvSpPr>
+        </p:nvCxnSpPr>
         <p:spPr>
           <a:xfrm xmlns:a="http://schemas.openxmlformats.org/drawingml/2006/main">
             <a:off x="7794625" y="3743325"/>
-            <a:ext cx="3397250" cy="104775"/>
+            <a:ext cx="3397250" cy="0"/>
           </a:xfrm>
-          <a:prstGeom xmlns:a="http://schemas.openxmlformats.org/drawingml/2006/main" prst="rightArrow">
+          <a:prstGeom xmlns:a="http://schemas.openxmlformats.org/drawingml/2006/main" prst="straightConnector1">
             <a:avLst/>
           </a:prstGeom>
-          <a:solidFill xmlns:a="http://schemas.openxmlformats.org/drawingml/2006/main">
-            <a:srgbClr val="333333"/>
-          </a:solidFill>
-          <a:ln xmlns:a="http://schemas.openxmlformats.org/drawingml/2006/main" w="0">
-            <a:noFill/>
+          <a:ln xmlns:a="http://schemas.openxmlformats.org/drawingml/2006/main" w="17145">
+            <a:solidFill>
+              <a:srgbClr val="111111"/>
+            </a:solidFill>
+            <a:prstDash val="solid"/>
+            <a:tailEnd type="triangle" w="med" len="med"/>
           </a:ln>
         </p:spPr>
-      </p:sp>
+      </p:cxnSp>
       <p:sp>
         <p:nvSpPr>
           <p:cNvPr id="15" name="">
             <a:extLst xmlns:a="http://schemas.openxmlformats.org/drawingml/2006/main">
               <a:ext uri="{FF2B5EF4-FFF2-40B4-BE49-F238E27FC236}">
-                <a16:creationId xmlns:a16="http://schemas.microsoft.com/office/drawing/2014/main" id="{93D0D044-8715-4050-9EA9-00ACC167A176}"/>
+                <a16:creationId xmlns:a16="http://schemas.microsoft.com/office/drawing/2014/main" id="{612A24C0-45AB-47E9-9B42-FD3BF47DB23C}"/>
               </a:ext>
             </a:extLst>
           </p:cNvPr>
@@ -2341,7 +4111,18 @@
           <a:bodyPr xmlns:a="http://schemas.openxmlformats.org/drawingml/2006/main">
             <a:noAutofit/>
           </a:bodyPr>
-          <a:lstStyle xmlns:a="http://schemas.openxmlformats.org/drawingml/2006/main"/>
+          <a:lstStyle xmlns:a="http://schemas.openxmlformats.org/drawingml/2006/main">
+            <a:defPPr>
+              <a:defRPr sz="1650" b="0">
+                <a:solidFill>
+                  <a:srgbClr val="161616"/>
+                </a:solidFill>
+                <a:latin typeface="Arial"/>
+                <a:ea typeface="Arial"/>
+                <a:cs typeface="Arial"/>
+              </a:defRPr>
+            </a:defPPr>
+          </a:lstStyle>
           <a:p xmlns:a="http://schemas.openxmlformats.org/drawingml/2006/main">
             <a:pPr>
               <a:defRPr sz="1650" b="0">
@@ -2367,42 +4148,41 @@
           </a:p>
         </p:txBody>
       </p:sp>
-      <p:sp>
-        <p:nvSpPr>
+      <p:cxnSp>
+        <p:nvCxnSpPr>
           <p:cNvPr id="16" name="">
             <a:extLst xmlns:a="http://schemas.openxmlformats.org/drawingml/2006/main">
               <a:ext uri="{FF2B5EF4-FFF2-40B4-BE49-F238E27FC236}">
-                <a16:creationId xmlns:a16="http://schemas.microsoft.com/office/drawing/2014/main" id="{CB75BEE4-0593-409B-9E21-9E7FC66FA740}"/>
+                <a16:creationId xmlns:a16="http://schemas.microsoft.com/office/drawing/2014/main" id="{590B0627-2284-42F1-AA35-ECD2EFBD5236}"/>
               </a:ext>
             </a:extLst>
           </p:cNvPr>
-          <p:cNvSpPr>
-            <a:spLocks xmlns:a="http://schemas.openxmlformats.org/drawingml/2006/main" noGrp="1"/>
-          </p:cNvSpPr>
+          <p:cNvCxnSpPr/>
           <p:nvPr/>
-        </p:nvSpPr>
+        </p:nvCxnSpPr>
         <p:spPr>
           <a:xfrm xmlns:a="http://schemas.openxmlformats.org/drawingml/2006/main">
             <a:off x="7794625" y="4362450"/>
-            <a:ext cx="3397250" cy="104775"/>
+            <a:ext cx="3397250" cy="0"/>
           </a:xfrm>
-          <a:prstGeom xmlns:a="http://schemas.openxmlformats.org/drawingml/2006/main" prst="leftArrow">
+          <a:prstGeom xmlns:a="http://schemas.openxmlformats.org/drawingml/2006/main" prst="straightConnector1">
             <a:avLst/>
           </a:prstGeom>
-          <a:solidFill xmlns:a="http://schemas.openxmlformats.org/drawingml/2006/main">
-            <a:srgbClr val="333333"/>
-          </a:solidFill>
-          <a:ln xmlns:a="http://schemas.openxmlformats.org/drawingml/2006/main" w="0">
-            <a:noFill/>
+          <a:ln xmlns:a="http://schemas.openxmlformats.org/drawingml/2006/main" w="17145">
+            <a:solidFill>
+              <a:srgbClr val="111111"/>
+            </a:solidFill>
+            <a:prstDash val="dash"/>
+            <a:headEnd type="arrow" w="med" len="med"/>
           </a:ln>
         </p:spPr>
-      </p:sp>
+      </p:cxnSp>
       <p:sp>
         <p:nvSpPr>
           <p:cNvPr id="17" name="">
             <a:extLst xmlns:a="http://schemas.openxmlformats.org/drawingml/2006/main">
               <a:ext uri="{FF2B5EF4-FFF2-40B4-BE49-F238E27FC236}">
-                <a16:creationId xmlns:a16="http://schemas.microsoft.com/office/drawing/2014/main" id="{C938962F-7B60-437E-B169-BFB2BBD278F9}"/>
+                <a16:creationId xmlns:a16="http://schemas.microsoft.com/office/drawing/2014/main" id="{6FFB90B3-BD31-43E4-9DB7-83FFF3F26789}"/>
               </a:ext>
             </a:extLst>
           </p:cNvPr>
@@ -2428,7 +4208,18 @@
           <a:bodyPr xmlns:a="http://schemas.openxmlformats.org/drawingml/2006/main">
             <a:noAutofit/>
           </a:bodyPr>
-          <a:lstStyle xmlns:a="http://schemas.openxmlformats.org/drawingml/2006/main"/>
+          <a:lstStyle xmlns:a="http://schemas.openxmlformats.org/drawingml/2006/main">
+            <a:defPPr>
+              <a:defRPr sz="1650" b="0">
+                <a:solidFill>
+                  <a:srgbClr val="161616"/>
+                </a:solidFill>
+                <a:latin typeface="Arial"/>
+                <a:ea typeface="Arial"/>
+                <a:cs typeface="Arial"/>
+              </a:defRPr>
+            </a:defPPr>
+          </a:lstStyle>
           <a:p xmlns:a="http://schemas.openxmlformats.org/drawingml/2006/main">
             <a:pPr>
               <a:defRPr sz="1650" b="0">
@@ -2454,42 +4245,41 @@
           </a:p>
         </p:txBody>
       </p:sp>
-      <p:sp>
-        <p:nvSpPr>
+      <p:cxnSp>
+        <p:nvCxnSpPr>
           <p:cNvPr id="18" name="">
             <a:extLst xmlns:a="http://schemas.openxmlformats.org/drawingml/2006/main">
               <a:ext uri="{FF2B5EF4-FFF2-40B4-BE49-F238E27FC236}">
-                <a16:creationId xmlns:a16="http://schemas.microsoft.com/office/drawing/2014/main" id="{6E6C7CE2-3BCF-407B-86DA-D6283D3C1887}"/>
+                <a16:creationId xmlns:a16="http://schemas.microsoft.com/office/drawing/2014/main" id="{76C5CEC4-6841-43FE-8DF9-3A8CA5CFB98D}"/>
               </a:ext>
             </a:extLst>
           </p:cNvPr>
-          <p:cNvSpPr>
-            <a:spLocks xmlns:a="http://schemas.openxmlformats.org/drawingml/2006/main" noGrp="1"/>
-          </p:cNvSpPr>
+          <p:cNvCxnSpPr/>
           <p:nvPr/>
-        </p:nvSpPr>
+        </p:nvCxnSpPr>
         <p:spPr>
           <a:xfrm xmlns:a="http://schemas.openxmlformats.org/drawingml/2006/main">
             <a:off x="4397375" y="4981575"/>
-            <a:ext cx="3397250" cy="104775"/>
+            <a:ext cx="3397250" cy="0"/>
           </a:xfrm>
-          <a:prstGeom xmlns:a="http://schemas.openxmlformats.org/drawingml/2006/main" prst="leftArrow">
+          <a:prstGeom xmlns:a="http://schemas.openxmlformats.org/drawingml/2006/main" prst="straightConnector1">
             <a:avLst/>
           </a:prstGeom>
-          <a:solidFill xmlns:a="http://schemas.openxmlformats.org/drawingml/2006/main">
-            <a:srgbClr val="333333"/>
-          </a:solidFill>
-          <a:ln xmlns:a="http://schemas.openxmlformats.org/drawingml/2006/main" w="0">
-            <a:noFill/>
+          <a:ln xmlns:a="http://schemas.openxmlformats.org/drawingml/2006/main" w="17145">
+            <a:solidFill>
+              <a:srgbClr val="111111"/>
+            </a:solidFill>
+            <a:prstDash val="dash"/>
+            <a:headEnd type="arrow" w="med" len="med"/>
           </a:ln>
         </p:spPr>
-      </p:sp>
+      </p:cxnSp>
       <p:sp>
         <p:nvSpPr>
           <p:cNvPr id="19" name="">
             <a:extLst xmlns:a="http://schemas.openxmlformats.org/drawingml/2006/main">
               <a:ext uri="{FF2B5EF4-FFF2-40B4-BE49-F238E27FC236}">
-                <a16:creationId xmlns:a16="http://schemas.microsoft.com/office/drawing/2014/main" id="{1969EA0E-8499-49C6-933C-DA407D06A8B7}"/>
+                <a16:creationId xmlns:a16="http://schemas.microsoft.com/office/drawing/2014/main" id="{C0FF935B-A48E-4825-9C68-6161B829C095}"/>
               </a:ext>
             </a:extLst>
           </p:cNvPr>
@@ -2515,7 +4305,18 @@
           <a:bodyPr xmlns:a="http://schemas.openxmlformats.org/drawingml/2006/main">
             <a:noAutofit/>
           </a:bodyPr>
-          <a:lstStyle xmlns:a="http://schemas.openxmlformats.org/drawingml/2006/main"/>
+          <a:lstStyle xmlns:a="http://schemas.openxmlformats.org/drawingml/2006/main">
+            <a:defPPr>
+              <a:defRPr sz="1650" b="0">
+                <a:solidFill>
+                  <a:srgbClr val="161616"/>
+                </a:solidFill>
+                <a:latin typeface="Arial"/>
+                <a:ea typeface="Arial"/>
+                <a:cs typeface="Arial"/>
+              </a:defRPr>
+            </a:defPPr>
+          </a:lstStyle>
           <a:p xmlns:a="http://schemas.openxmlformats.org/drawingml/2006/main">
             <a:pPr>
               <a:defRPr sz="1650" b="0">
@@ -2537,63 +4338,6 @@
                 <a:cs typeface="Arial"/>
               </a:rPr>
               <a:t>Проверенные записи</a:t>
-            </a:r>
-          </a:p>
-        </p:txBody>
-      </p:sp>
-      <p:sp>
-        <p:nvSpPr>
-          <p:cNvPr id="20" name="">
-            <a:extLst xmlns:a="http://schemas.openxmlformats.org/drawingml/2006/main">
-              <a:ext uri="{FF2B5EF4-FFF2-40B4-BE49-F238E27FC236}">
-                <a16:creationId xmlns:a16="http://schemas.microsoft.com/office/drawing/2014/main" id="{40000280-E197-4055-AE0E-E01E123100FE}"/>
-              </a:ext>
-            </a:extLst>
-          </p:cNvPr>
-          <p:cNvSpPr>
-            <a:spLocks xmlns:a="http://schemas.openxmlformats.org/drawingml/2006/main" noGrp="1"/>
-          </p:cNvSpPr>
-          <p:nvPr/>
-        </p:nvSpPr>
-        <p:spPr>
-          <a:xfrm xmlns:a="http://schemas.openxmlformats.org/drawingml/2006/main">
-            <a:off x="590550" y="6076950"/>
-            <a:ext cx="10953750" cy="619125"/>
-          </a:xfrm>
-          <a:prstGeom xmlns:a="http://schemas.openxmlformats.org/drawingml/2006/main" prst="rect">
-            <a:avLst/>
-          </a:prstGeom>
-          <a:noFill xmlns:a="http://schemas.openxmlformats.org/drawingml/2006/main"/>
-          <a:ln xmlns:a="http://schemas.openxmlformats.org/drawingml/2006/main" w="0">
-            <a:noFill/>
-          </a:ln>
-        </p:spPr>
-        <p:txBody>
-          <a:bodyPr xmlns:a="http://schemas.openxmlformats.org/drawingml/2006/main">
-            <a:noAutofit/>
-          </a:bodyPr>
-          <a:lstStyle xmlns:a="http://schemas.openxmlformats.org/drawingml/2006/main"/>
-          <a:p xmlns:a="http://schemas.openxmlformats.org/drawingml/2006/main">
-            <a:pPr>
-              <a:defRPr sz="1650" b="0">
-                <a:solidFill>
-                  <a:srgbClr val="161616"/>
-                </a:solidFill>
-                <a:latin typeface="Arial"/>
-                <a:ea typeface="Arial"/>
-                <a:cs typeface="Arial"/>
-              </a:defRPr>
-            </a:pPr>
-            <a:r>
-              <a:rPr sz="1650" b="0">
-                <a:solidFill>
-                  <a:srgbClr val="161616"/>
-                </a:solidFill>
-                <a:latin typeface="Arial"/>
-                <a:ea typeface="Arial"/>
-                <a:cs typeface="Arial"/>
-              </a:rPr>
-              <a:t>При временном сбое сохраняется прежняя дата данных. Канал поставщика требует согласования.</a:t>
             </a:r>
           </a:p>
         </p:txBody>
@@ -2601,7 +4345,7 @@
     </p:spTree>
     <p:extLst>
       <p:ext uri="{BB962C8B-B14F-4D97-AF65-F5344CB8AC3E}">
-        <p14:creationId xmlns:p14="http://schemas.microsoft.com/office/powerpoint/2010/main" val="1566217843"/>
+        <p14:creationId xmlns:p14="http://schemas.microsoft.com/office/powerpoint/2010/main" val="1531681794"/>
       </p:ext>
     </p:extLst>
   </p:cSld>
@@ -2629,10 +4373,10 @@
       </p:grpSpPr>
       <p:sp>
         <p:nvSpPr>
-          <p:cNvPr id="21" name="">
+          <p:cNvPr id="20" name="">
             <a:extLst xmlns:a="http://schemas.openxmlformats.org/drawingml/2006/main">
               <a:ext uri="{FF2B5EF4-FFF2-40B4-BE49-F238E27FC236}">
-                <a16:creationId xmlns:a16="http://schemas.microsoft.com/office/drawing/2014/main" id="{2D4C8C03-3A8C-4D33-806A-16F08E1127F0}"/>
+                <a16:creationId xmlns:a16="http://schemas.microsoft.com/office/drawing/2014/main" id="{E800749E-4A85-43D2-8DC8-E76A6D54EC71}"/>
               </a:ext>
             </a:extLst>
           </p:cNvPr>
@@ -2658,7 +4402,18 @@
           <a:bodyPr xmlns:a="http://schemas.openxmlformats.org/drawingml/2006/main" anchor="ctr">
             <a:noAutofit/>
           </a:bodyPr>
-          <a:lstStyle xmlns:a="http://schemas.openxmlformats.org/drawingml/2006/main"/>
+          <a:lstStyle xmlns:a="http://schemas.openxmlformats.org/drawingml/2006/main">
+            <a:defPPr algn="l">
+              <a:defRPr sz="2700" b="1">
+                <a:solidFill>
+                  <a:srgbClr val="161616"/>
+                </a:solidFill>
+                <a:latin typeface="Arial"/>
+                <a:ea typeface="Arial"/>
+                <a:cs typeface="Arial"/>
+              </a:defRPr>
+            </a:defPPr>
+          </a:lstStyle>
           <a:p xmlns:a="http://schemas.openxmlformats.org/drawingml/2006/main">
             <a:pPr algn="l">
               <a:defRPr sz="2700" b="1">
@@ -2689,7 +4444,7 @@
           <p:cNvPr id="2" name="">
             <a:extLst xmlns:a="http://schemas.openxmlformats.org/drawingml/2006/main">
               <a:ext uri="{FF2B5EF4-FFF2-40B4-BE49-F238E27FC236}">
-                <a16:creationId xmlns:a16="http://schemas.microsoft.com/office/drawing/2014/main" id="{3DCEF8D5-1BFB-4F1C-9CC9-CA073997F12A}"/>
+                <a16:creationId xmlns:a16="http://schemas.microsoft.com/office/drawing/2014/main" id="{D9CCAEBD-6790-49DE-84DE-CF40317D5985}"/>
               </a:ext>
             </a:extLst>
           </p:cNvPr>
@@ -2717,7 +4472,15 @@
         </p:spPr>
         <p:txBody>
           <a:bodyPr xmlns:a="http://schemas.openxmlformats.org/drawingml/2006/main" anchor="ctr"/>
-          <a:lstStyle xmlns:a="http://schemas.openxmlformats.org/drawingml/2006/main"/>
+          <a:lstStyle xmlns:a="http://schemas.openxmlformats.org/drawingml/2006/main">
+            <a:defPPr algn="ctr">
+              <a:defRPr sz="1725">
+                <a:latin typeface="Arial"/>
+                <a:ea typeface="Arial"/>
+                <a:cs typeface="Arial"/>
+              </a:defRPr>
+            </a:defPPr>
+          </a:lstStyle>
           <a:p xmlns:a="http://schemas.openxmlformats.org/drawingml/2006/main">
             <a:pPr algn="ctr">
               <a:defRPr sz="1725">
@@ -2742,7 +4505,7 @@
           <p:cNvPr id="3" name="">
             <a:extLst xmlns:a="http://schemas.openxmlformats.org/drawingml/2006/main">
               <a:ext uri="{FF2B5EF4-FFF2-40B4-BE49-F238E27FC236}">
-                <a16:creationId xmlns:a16="http://schemas.microsoft.com/office/drawing/2014/main" id="{13158C77-AA88-486A-BCCE-0736CC79B701}"/>
+                <a16:creationId xmlns:a16="http://schemas.microsoft.com/office/drawing/2014/main" id="{968A39F6-92F5-4CB7-AEBF-F313F4927F68}"/>
               </a:ext>
             </a:extLst>
           </p:cNvPr>
@@ -2763,6 +4526,7 @@
             <a:solidFill>
               <a:srgbClr val="888888"/>
             </a:solidFill>
+            <a:prstDash val="dash"/>
           </a:ln>
         </p:spPr>
       </p:sp>
@@ -2771,7 +4535,7 @@
           <p:cNvPr id="4" name="">
             <a:extLst xmlns:a="http://schemas.openxmlformats.org/drawingml/2006/main">
               <a:ext uri="{FF2B5EF4-FFF2-40B4-BE49-F238E27FC236}">
-                <a16:creationId xmlns:a16="http://schemas.microsoft.com/office/drawing/2014/main" id="{64B1FDF2-3CE5-443F-954C-6F0968F88E99}"/>
+                <a16:creationId xmlns:a16="http://schemas.microsoft.com/office/drawing/2014/main" id="{39B048C9-A3E5-4F26-942C-40EC741483B3}"/>
               </a:ext>
             </a:extLst>
           </p:cNvPr>
@@ -2799,7 +4563,15 @@
         </p:spPr>
         <p:txBody>
           <a:bodyPr xmlns:a="http://schemas.openxmlformats.org/drawingml/2006/main" anchor="ctr"/>
-          <a:lstStyle xmlns:a="http://schemas.openxmlformats.org/drawingml/2006/main"/>
+          <a:lstStyle xmlns:a="http://schemas.openxmlformats.org/drawingml/2006/main">
+            <a:defPPr algn="ctr">
+              <a:defRPr sz="1725">
+                <a:latin typeface="Arial"/>
+                <a:ea typeface="Arial"/>
+                <a:cs typeface="Arial"/>
+              </a:defRPr>
+            </a:defPPr>
+          </a:lstStyle>
           <a:p xmlns:a="http://schemas.openxmlformats.org/drawingml/2006/main">
             <a:pPr algn="ctr">
               <a:defRPr sz="1725">
@@ -2824,7 +4596,7 @@
           <p:cNvPr id="5" name="">
             <a:extLst xmlns:a="http://schemas.openxmlformats.org/drawingml/2006/main">
               <a:ext uri="{FF2B5EF4-FFF2-40B4-BE49-F238E27FC236}">
-                <a16:creationId xmlns:a16="http://schemas.microsoft.com/office/drawing/2014/main" id="{004C9D5E-654A-47FB-B1D4-F924A100CE28}"/>
+                <a16:creationId xmlns:a16="http://schemas.microsoft.com/office/drawing/2014/main" id="{77C18A18-DCB4-45B9-9A96-A4BA6276CDFB}"/>
               </a:ext>
             </a:extLst>
           </p:cNvPr>
@@ -2845,6 +4617,7 @@
             <a:solidFill>
               <a:srgbClr val="888888"/>
             </a:solidFill>
+            <a:prstDash val="dash"/>
           </a:ln>
         </p:spPr>
       </p:sp>
@@ -2853,7 +4626,7 @@
           <p:cNvPr id="6" name="">
             <a:extLst xmlns:a="http://schemas.openxmlformats.org/drawingml/2006/main">
               <a:ext uri="{FF2B5EF4-FFF2-40B4-BE49-F238E27FC236}">
-                <a16:creationId xmlns:a16="http://schemas.microsoft.com/office/drawing/2014/main" id="{6CB619CE-4462-45C5-A923-013B0D825025}"/>
+                <a16:creationId xmlns:a16="http://schemas.microsoft.com/office/drawing/2014/main" id="{57A2FCF8-7EC7-4951-A89C-1FF521C03147}"/>
               </a:ext>
             </a:extLst>
           </p:cNvPr>
@@ -2881,7 +4654,15 @@
         </p:spPr>
         <p:txBody>
           <a:bodyPr xmlns:a="http://schemas.openxmlformats.org/drawingml/2006/main" anchor="ctr"/>
-          <a:lstStyle xmlns:a="http://schemas.openxmlformats.org/drawingml/2006/main"/>
+          <a:lstStyle xmlns:a="http://schemas.openxmlformats.org/drawingml/2006/main">
+            <a:defPPr algn="ctr">
+              <a:defRPr sz="1725">
+                <a:latin typeface="Arial"/>
+                <a:ea typeface="Arial"/>
+                <a:cs typeface="Arial"/>
+              </a:defRPr>
+            </a:defPPr>
+          </a:lstStyle>
           <a:p xmlns:a="http://schemas.openxmlformats.org/drawingml/2006/main">
             <a:pPr algn="ctr">
               <a:defRPr sz="1725">
@@ -2906,7 +4687,7 @@
           <p:cNvPr id="7" name="">
             <a:extLst xmlns:a="http://schemas.openxmlformats.org/drawingml/2006/main">
               <a:ext uri="{FF2B5EF4-FFF2-40B4-BE49-F238E27FC236}">
-                <a16:creationId xmlns:a16="http://schemas.microsoft.com/office/drawing/2014/main" id="{F2D792CA-2113-4434-9103-73F19298B0A7}"/>
+                <a16:creationId xmlns:a16="http://schemas.microsoft.com/office/drawing/2014/main" id="{06C0ED58-A830-4C89-AE37-4B5ABE69E092}"/>
               </a:ext>
             </a:extLst>
           </p:cNvPr>
@@ -2927,6 +4708,7 @@
             <a:solidFill>
               <a:srgbClr val="888888"/>
             </a:solidFill>
+            <a:prstDash val="dash"/>
           </a:ln>
         </p:spPr>
       </p:sp>
@@ -2935,7 +4717,7 @@
           <p:cNvPr id="8" name="">
             <a:extLst xmlns:a="http://schemas.openxmlformats.org/drawingml/2006/main">
               <a:ext uri="{FF2B5EF4-FFF2-40B4-BE49-F238E27FC236}">
-                <a16:creationId xmlns:a16="http://schemas.microsoft.com/office/drawing/2014/main" id="{46492849-11FC-4323-88CF-AA7C29C95095}"/>
+                <a16:creationId xmlns:a16="http://schemas.microsoft.com/office/drawing/2014/main" id="{7C77D848-AC74-445C-A298-12B33106771D}"/>
               </a:ext>
             </a:extLst>
           </p:cNvPr>
@@ -2963,7 +4745,15 @@
         </p:spPr>
         <p:txBody>
           <a:bodyPr xmlns:a="http://schemas.openxmlformats.org/drawingml/2006/main" anchor="ctr"/>
-          <a:lstStyle xmlns:a="http://schemas.openxmlformats.org/drawingml/2006/main"/>
+          <a:lstStyle xmlns:a="http://schemas.openxmlformats.org/drawingml/2006/main">
+            <a:defPPr algn="ctr">
+              <a:defRPr sz="1725">
+                <a:latin typeface="Arial"/>
+                <a:ea typeface="Arial"/>
+                <a:cs typeface="Arial"/>
+              </a:defRPr>
+            </a:defPPr>
+          </a:lstStyle>
           <a:p xmlns:a="http://schemas.openxmlformats.org/drawingml/2006/main">
             <a:pPr algn="ctr">
               <a:defRPr sz="1725">
@@ -2988,7 +4778,7 @@
           <p:cNvPr id="9" name="">
             <a:extLst xmlns:a="http://schemas.openxmlformats.org/drawingml/2006/main">
               <a:ext uri="{FF2B5EF4-FFF2-40B4-BE49-F238E27FC236}">
-                <a16:creationId xmlns:a16="http://schemas.microsoft.com/office/drawing/2014/main" id="{723E73FE-E5DB-44D5-A988-6CDFEB7403C0}"/>
+                <a16:creationId xmlns:a16="http://schemas.microsoft.com/office/drawing/2014/main" id="{611F7394-5131-4BDE-AE23-0ACB7F73E402}"/>
               </a:ext>
             </a:extLst>
           </p:cNvPr>
@@ -3009,45 +4799,45 @@
             <a:solidFill>
               <a:srgbClr val="888888"/>
             </a:solidFill>
+            <a:prstDash val="dash"/>
           </a:ln>
         </p:spPr>
       </p:sp>
-      <p:sp>
-        <p:nvSpPr>
+      <p:cxnSp>
+        <p:nvCxnSpPr>
           <p:cNvPr id="10" name="">
             <a:extLst xmlns:a="http://schemas.openxmlformats.org/drawingml/2006/main">
               <a:ext uri="{FF2B5EF4-FFF2-40B4-BE49-F238E27FC236}">
-                <a16:creationId xmlns:a16="http://schemas.microsoft.com/office/drawing/2014/main" id="{E79241D4-FB6A-45F0-88FC-25B9ECF7E0E7}"/>
+                <a16:creationId xmlns:a16="http://schemas.microsoft.com/office/drawing/2014/main" id="{5C3D6FAA-FF6F-45AE-8D7E-140890BBF982}"/>
               </a:ext>
             </a:extLst>
           </p:cNvPr>
-          <p:cNvSpPr>
-            <a:spLocks xmlns:a="http://schemas.openxmlformats.org/drawingml/2006/main" noGrp="1"/>
-          </p:cNvSpPr>
+          <p:cNvCxnSpPr/>
           <p:nvPr/>
-        </p:nvSpPr>
+        </p:nvCxnSpPr>
         <p:spPr>
           <a:xfrm xmlns:a="http://schemas.openxmlformats.org/drawingml/2006/main">
             <a:off x="1000125" y="2505075"/>
-            <a:ext cx="3397250" cy="104775"/>
+            <a:ext cx="3397250" cy="0"/>
           </a:xfrm>
-          <a:prstGeom xmlns:a="http://schemas.openxmlformats.org/drawingml/2006/main" prst="rightArrow">
+          <a:prstGeom xmlns:a="http://schemas.openxmlformats.org/drawingml/2006/main" prst="straightConnector1">
             <a:avLst/>
           </a:prstGeom>
-          <a:solidFill xmlns:a="http://schemas.openxmlformats.org/drawingml/2006/main">
-            <a:srgbClr val="333333"/>
-          </a:solidFill>
-          <a:ln xmlns:a="http://schemas.openxmlformats.org/drawingml/2006/main" w="0">
-            <a:noFill/>
+          <a:ln xmlns:a="http://schemas.openxmlformats.org/drawingml/2006/main" w="17145">
+            <a:solidFill>
+              <a:srgbClr val="111111"/>
+            </a:solidFill>
+            <a:prstDash val="solid"/>
+            <a:tailEnd type="triangle" w="med" len="med"/>
           </a:ln>
         </p:spPr>
-      </p:sp>
+      </p:cxnSp>
       <p:sp>
         <p:nvSpPr>
           <p:cNvPr id="11" name="">
             <a:extLst xmlns:a="http://schemas.openxmlformats.org/drawingml/2006/main">
               <a:ext uri="{FF2B5EF4-FFF2-40B4-BE49-F238E27FC236}">
-                <a16:creationId xmlns:a16="http://schemas.microsoft.com/office/drawing/2014/main" id="{08CC0646-2D73-4956-9015-1BB14B33876C}"/>
+                <a16:creationId xmlns:a16="http://schemas.microsoft.com/office/drawing/2014/main" id="{06A771F5-208B-4BB7-8DBD-FD69928DB1FF}"/>
               </a:ext>
             </a:extLst>
           </p:cNvPr>
@@ -3073,7 +4863,18 @@
           <a:bodyPr xmlns:a="http://schemas.openxmlformats.org/drawingml/2006/main">
             <a:noAutofit/>
           </a:bodyPr>
-          <a:lstStyle xmlns:a="http://schemas.openxmlformats.org/drawingml/2006/main"/>
+          <a:lstStyle xmlns:a="http://schemas.openxmlformats.org/drawingml/2006/main">
+            <a:defPPr>
+              <a:defRPr sz="1650" b="0">
+                <a:solidFill>
+                  <a:srgbClr val="161616"/>
+                </a:solidFill>
+                <a:latin typeface="Arial"/>
+                <a:ea typeface="Arial"/>
+                <a:cs typeface="Arial"/>
+              </a:defRPr>
+            </a:defPPr>
+          </a:lstStyle>
           <a:p xmlns:a="http://schemas.openxmlformats.org/drawingml/2006/main">
             <a:pPr>
               <a:defRPr sz="1650" b="0">
@@ -3099,42 +4900,41 @@
           </a:p>
         </p:txBody>
       </p:sp>
-      <p:sp>
-        <p:nvSpPr>
+      <p:cxnSp>
+        <p:nvCxnSpPr>
           <p:cNvPr id="12" name="">
             <a:extLst xmlns:a="http://schemas.openxmlformats.org/drawingml/2006/main">
               <a:ext uri="{FF2B5EF4-FFF2-40B4-BE49-F238E27FC236}">
-                <a16:creationId xmlns:a16="http://schemas.microsoft.com/office/drawing/2014/main" id="{8D5A142E-250D-4C45-BC9A-EE89F60A148A}"/>
+                <a16:creationId xmlns:a16="http://schemas.microsoft.com/office/drawing/2014/main" id="{B93C0AD5-BB92-40D9-A062-B89BA64AAED7}"/>
               </a:ext>
             </a:extLst>
           </p:cNvPr>
-          <p:cNvSpPr>
-            <a:spLocks xmlns:a="http://schemas.openxmlformats.org/drawingml/2006/main" noGrp="1"/>
-          </p:cNvSpPr>
+          <p:cNvCxnSpPr/>
           <p:nvPr/>
-        </p:nvSpPr>
+        </p:nvCxnSpPr>
         <p:spPr>
           <a:xfrm xmlns:a="http://schemas.openxmlformats.org/drawingml/2006/main">
             <a:off x="4397375" y="3124200"/>
-            <a:ext cx="3397250" cy="104775"/>
+            <a:ext cx="3397250" cy="0"/>
           </a:xfrm>
-          <a:prstGeom xmlns:a="http://schemas.openxmlformats.org/drawingml/2006/main" prst="rightArrow">
+          <a:prstGeom xmlns:a="http://schemas.openxmlformats.org/drawingml/2006/main" prst="straightConnector1">
             <a:avLst/>
           </a:prstGeom>
-          <a:solidFill xmlns:a="http://schemas.openxmlformats.org/drawingml/2006/main">
-            <a:srgbClr val="333333"/>
-          </a:solidFill>
-          <a:ln xmlns:a="http://schemas.openxmlformats.org/drawingml/2006/main" w="0">
-            <a:noFill/>
+          <a:ln xmlns:a="http://schemas.openxmlformats.org/drawingml/2006/main" w="17145">
+            <a:solidFill>
+              <a:srgbClr val="111111"/>
+            </a:solidFill>
+            <a:prstDash val="solid"/>
+            <a:tailEnd type="triangle" w="med" len="med"/>
           </a:ln>
         </p:spPr>
-      </p:sp>
+      </p:cxnSp>
       <p:sp>
         <p:nvSpPr>
           <p:cNvPr id="13" name="">
             <a:extLst xmlns:a="http://schemas.openxmlformats.org/drawingml/2006/main">
               <a:ext uri="{FF2B5EF4-FFF2-40B4-BE49-F238E27FC236}">
-                <a16:creationId xmlns:a16="http://schemas.microsoft.com/office/drawing/2014/main" id="{79F16F68-A036-4C24-A6BE-72BB1259A935}"/>
+                <a16:creationId xmlns:a16="http://schemas.microsoft.com/office/drawing/2014/main" id="{649E4CB9-ED96-4F74-AFD9-07A145B54CD4}"/>
               </a:ext>
             </a:extLst>
           </p:cNvPr>
@@ -3160,7 +4960,18 @@
           <a:bodyPr xmlns:a="http://schemas.openxmlformats.org/drawingml/2006/main">
             <a:noAutofit/>
           </a:bodyPr>
-          <a:lstStyle xmlns:a="http://schemas.openxmlformats.org/drawingml/2006/main"/>
+          <a:lstStyle xmlns:a="http://schemas.openxmlformats.org/drawingml/2006/main">
+            <a:defPPr>
+              <a:defRPr sz="1650" b="0">
+                <a:solidFill>
+                  <a:srgbClr val="161616"/>
+                </a:solidFill>
+                <a:latin typeface="Arial"/>
+                <a:ea typeface="Arial"/>
+                <a:cs typeface="Arial"/>
+              </a:defRPr>
+            </a:defPPr>
+          </a:lstStyle>
           <a:p xmlns:a="http://schemas.openxmlformats.org/drawingml/2006/main">
             <a:pPr>
               <a:defRPr sz="1650" b="0">
@@ -3186,42 +4997,41 @@
           </a:p>
         </p:txBody>
       </p:sp>
-      <p:sp>
-        <p:nvSpPr>
+      <p:cxnSp>
+        <p:nvCxnSpPr>
           <p:cNvPr id="14" name="">
             <a:extLst xmlns:a="http://schemas.openxmlformats.org/drawingml/2006/main">
               <a:ext uri="{FF2B5EF4-FFF2-40B4-BE49-F238E27FC236}">
-                <a16:creationId xmlns:a16="http://schemas.microsoft.com/office/drawing/2014/main" id="{7957AAA6-15F4-4114-8143-1063E9E9B02C}"/>
+                <a16:creationId xmlns:a16="http://schemas.microsoft.com/office/drawing/2014/main" id="{985B55FF-E504-4425-8F8C-536CAF515112}"/>
               </a:ext>
             </a:extLst>
           </p:cNvPr>
-          <p:cNvSpPr>
-            <a:spLocks xmlns:a="http://schemas.openxmlformats.org/drawingml/2006/main" noGrp="1"/>
-          </p:cNvSpPr>
+          <p:cNvCxnSpPr/>
           <p:nvPr/>
-        </p:nvSpPr>
+        </p:nvCxnSpPr>
         <p:spPr>
           <a:xfrm xmlns:a="http://schemas.openxmlformats.org/drawingml/2006/main">
             <a:off x="7794625" y="3743325"/>
-            <a:ext cx="3397250" cy="104775"/>
+            <a:ext cx="3397250" cy="0"/>
           </a:xfrm>
-          <a:prstGeom xmlns:a="http://schemas.openxmlformats.org/drawingml/2006/main" prst="rightArrow">
+          <a:prstGeom xmlns:a="http://schemas.openxmlformats.org/drawingml/2006/main" prst="straightConnector1">
             <a:avLst/>
           </a:prstGeom>
-          <a:solidFill xmlns:a="http://schemas.openxmlformats.org/drawingml/2006/main">
-            <a:srgbClr val="333333"/>
-          </a:solidFill>
-          <a:ln xmlns:a="http://schemas.openxmlformats.org/drawingml/2006/main" w="0">
-            <a:noFill/>
+          <a:ln xmlns:a="http://schemas.openxmlformats.org/drawingml/2006/main" w="17145">
+            <a:solidFill>
+              <a:srgbClr val="111111"/>
+            </a:solidFill>
+            <a:prstDash val="solid"/>
+            <a:tailEnd type="triangle" w="med" len="med"/>
           </a:ln>
         </p:spPr>
-      </p:sp>
+      </p:cxnSp>
       <p:sp>
         <p:nvSpPr>
           <p:cNvPr id="15" name="">
             <a:extLst xmlns:a="http://schemas.openxmlformats.org/drawingml/2006/main">
               <a:ext uri="{FF2B5EF4-FFF2-40B4-BE49-F238E27FC236}">
-                <a16:creationId xmlns:a16="http://schemas.microsoft.com/office/drawing/2014/main" id="{E7BD7052-EF57-4329-B63A-0C59EABB558A}"/>
+                <a16:creationId xmlns:a16="http://schemas.microsoft.com/office/drawing/2014/main" id="{DB94DB3E-5C37-4203-A9B5-1803CDBFA370}"/>
               </a:ext>
             </a:extLst>
           </p:cNvPr>
@@ -3247,7 +5057,18 @@
           <a:bodyPr xmlns:a="http://schemas.openxmlformats.org/drawingml/2006/main">
             <a:noAutofit/>
           </a:bodyPr>
-          <a:lstStyle xmlns:a="http://schemas.openxmlformats.org/drawingml/2006/main"/>
+          <a:lstStyle xmlns:a="http://schemas.openxmlformats.org/drawingml/2006/main">
+            <a:defPPr>
+              <a:defRPr sz="1650" b="0">
+                <a:solidFill>
+                  <a:srgbClr val="161616"/>
+                </a:solidFill>
+                <a:latin typeface="Arial"/>
+                <a:ea typeface="Arial"/>
+                <a:cs typeface="Arial"/>
+              </a:defRPr>
+            </a:defPPr>
+          </a:lstStyle>
           <a:p xmlns:a="http://schemas.openxmlformats.org/drawingml/2006/main">
             <a:pPr>
               <a:defRPr sz="1650" b="0">
@@ -3273,42 +5094,41 @@
           </a:p>
         </p:txBody>
       </p:sp>
-      <p:sp>
-        <p:nvSpPr>
+      <p:cxnSp>
+        <p:nvCxnSpPr>
           <p:cNvPr id="16" name="">
             <a:extLst xmlns:a="http://schemas.openxmlformats.org/drawingml/2006/main">
               <a:ext uri="{FF2B5EF4-FFF2-40B4-BE49-F238E27FC236}">
-                <a16:creationId xmlns:a16="http://schemas.microsoft.com/office/drawing/2014/main" id="{5F26E3C3-A9DC-4B6D-AE69-C3C40B17EA77}"/>
+                <a16:creationId xmlns:a16="http://schemas.microsoft.com/office/drawing/2014/main" id="{86A076E7-2751-4202-B1FF-1D22164C9AF8}"/>
               </a:ext>
             </a:extLst>
           </p:cNvPr>
-          <p:cNvSpPr>
-            <a:spLocks xmlns:a="http://schemas.openxmlformats.org/drawingml/2006/main" noGrp="1"/>
-          </p:cNvSpPr>
+          <p:cNvCxnSpPr/>
           <p:nvPr/>
-        </p:nvSpPr>
+        </p:nvCxnSpPr>
         <p:spPr>
           <a:xfrm xmlns:a="http://schemas.openxmlformats.org/drawingml/2006/main">
             <a:off x="7794625" y="4362450"/>
-            <a:ext cx="3397250" cy="104775"/>
+            <a:ext cx="3397250" cy="0"/>
           </a:xfrm>
-          <a:prstGeom xmlns:a="http://schemas.openxmlformats.org/drawingml/2006/main" prst="leftArrow">
+          <a:prstGeom xmlns:a="http://schemas.openxmlformats.org/drawingml/2006/main" prst="straightConnector1">
             <a:avLst/>
           </a:prstGeom>
-          <a:solidFill xmlns:a="http://schemas.openxmlformats.org/drawingml/2006/main">
-            <a:srgbClr val="333333"/>
-          </a:solidFill>
-          <a:ln xmlns:a="http://schemas.openxmlformats.org/drawingml/2006/main" w="0">
-            <a:noFill/>
+          <a:ln xmlns:a="http://schemas.openxmlformats.org/drawingml/2006/main" w="17145">
+            <a:solidFill>
+              <a:srgbClr val="111111"/>
+            </a:solidFill>
+            <a:prstDash val="dash"/>
+            <a:headEnd type="arrow" w="med" len="med"/>
           </a:ln>
         </p:spPr>
-      </p:sp>
+      </p:cxnSp>
       <p:sp>
         <p:nvSpPr>
           <p:cNvPr id="17" name="">
             <a:extLst xmlns:a="http://schemas.openxmlformats.org/drawingml/2006/main">
               <a:ext uri="{FF2B5EF4-FFF2-40B4-BE49-F238E27FC236}">
-                <a16:creationId xmlns:a16="http://schemas.microsoft.com/office/drawing/2014/main" id="{3A05D7C3-D6C8-4828-BD9F-8F023E64DE76}"/>
+                <a16:creationId xmlns:a16="http://schemas.microsoft.com/office/drawing/2014/main" id="{BE267FD9-ED96-4817-AF8A-29D8076270DB}"/>
               </a:ext>
             </a:extLst>
           </p:cNvPr>
@@ -3334,7 +5154,18 @@
           <a:bodyPr xmlns:a="http://schemas.openxmlformats.org/drawingml/2006/main">
             <a:noAutofit/>
           </a:bodyPr>
-          <a:lstStyle xmlns:a="http://schemas.openxmlformats.org/drawingml/2006/main"/>
+          <a:lstStyle xmlns:a="http://schemas.openxmlformats.org/drawingml/2006/main">
+            <a:defPPr>
+              <a:defRPr sz="1650" b="0">
+                <a:solidFill>
+                  <a:srgbClr val="161616"/>
+                </a:solidFill>
+                <a:latin typeface="Arial"/>
+                <a:ea typeface="Arial"/>
+                <a:cs typeface="Arial"/>
+              </a:defRPr>
+            </a:defPPr>
+          </a:lstStyle>
           <a:p xmlns:a="http://schemas.openxmlformats.org/drawingml/2006/main">
             <a:pPr>
               <a:defRPr sz="1650" b="0">
@@ -3360,42 +5191,41 @@
           </a:p>
         </p:txBody>
       </p:sp>
-      <p:sp>
-        <p:nvSpPr>
+      <p:cxnSp>
+        <p:nvCxnSpPr>
           <p:cNvPr id="18" name="">
             <a:extLst xmlns:a="http://schemas.openxmlformats.org/drawingml/2006/main">
               <a:ext uri="{FF2B5EF4-FFF2-40B4-BE49-F238E27FC236}">
-                <a16:creationId xmlns:a16="http://schemas.microsoft.com/office/drawing/2014/main" id="{354067F3-08C8-4D85-BE9E-397BBEE94743}"/>
+                <a16:creationId xmlns:a16="http://schemas.microsoft.com/office/drawing/2014/main" id="{04D6001F-688C-4632-8219-9F7C18147B9F}"/>
               </a:ext>
             </a:extLst>
           </p:cNvPr>
-          <p:cNvSpPr>
-            <a:spLocks xmlns:a="http://schemas.openxmlformats.org/drawingml/2006/main" noGrp="1"/>
-          </p:cNvSpPr>
+          <p:cNvCxnSpPr/>
           <p:nvPr/>
-        </p:nvSpPr>
+        </p:nvCxnSpPr>
         <p:spPr>
           <a:xfrm xmlns:a="http://schemas.openxmlformats.org/drawingml/2006/main">
             <a:off x="7794625" y="4981575"/>
-            <a:ext cx="3397250" cy="104775"/>
+            <a:ext cx="3397250" cy="0"/>
           </a:xfrm>
-          <a:prstGeom xmlns:a="http://schemas.openxmlformats.org/drawingml/2006/main" prst="rightArrow">
+          <a:prstGeom xmlns:a="http://schemas.openxmlformats.org/drawingml/2006/main" prst="straightConnector1">
             <a:avLst/>
           </a:prstGeom>
-          <a:solidFill xmlns:a="http://schemas.openxmlformats.org/drawingml/2006/main">
-            <a:srgbClr val="333333"/>
-          </a:solidFill>
-          <a:ln xmlns:a="http://schemas.openxmlformats.org/drawingml/2006/main" w="0">
-            <a:noFill/>
+          <a:ln xmlns:a="http://schemas.openxmlformats.org/drawingml/2006/main" w="17145">
+            <a:solidFill>
+              <a:srgbClr val="111111"/>
+            </a:solidFill>
+            <a:prstDash val="solid"/>
+            <a:tailEnd type="triangle" w="med" len="med"/>
           </a:ln>
         </p:spPr>
-      </p:sp>
+      </p:cxnSp>
       <p:sp>
         <p:nvSpPr>
           <p:cNvPr id="19" name="">
             <a:extLst xmlns:a="http://schemas.openxmlformats.org/drawingml/2006/main">
               <a:ext uri="{FF2B5EF4-FFF2-40B4-BE49-F238E27FC236}">
-                <a16:creationId xmlns:a16="http://schemas.microsoft.com/office/drawing/2014/main" id="{1F6FD0A4-40BD-4558-AA1B-988ABCDD5005}"/>
+                <a16:creationId xmlns:a16="http://schemas.microsoft.com/office/drawing/2014/main" id="{77FA916C-4A8E-4DBD-B49B-0748BC5810D5}"/>
               </a:ext>
             </a:extLst>
           </p:cNvPr>
@@ -3421,7 +5251,18 @@
           <a:bodyPr xmlns:a="http://schemas.openxmlformats.org/drawingml/2006/main">
             <a:noAutofit/>
           </a:bodyPr>
-          <a:lstStyle xmlns:a="http://schemas.openxmlformats.org/drawingml/2006/main"/>
+          <a:lstStyle xmlns:a="http://schemas.openxmlformats.org/drawingml/2006/main">
+            <a:defPPr>
+              <a:defRPr sz="1650" b="0">
+                <a:solidFill>
+                  <a:srgbClr val="161616"/>
+                </a:solidFill>
+                <a:latin typeface="Arial"/>
+                <a:ea typeface="Arial"/>
+                <a:cs typeface="Arial"/>
+              </a:defRPr>
+            </a:defPPr>
+          </a:lstStyle>
           <a:p xmlns:a="http://schemas.openxmlformats.org/drawingml/2006/main">
             <a:pPr>
               <a:defRPr sz="1650" b="0">
@@ -3443,63 +5284,6 @@
                 <a:cs typeface="Arial"/>
               </a:rPr>
               <a:t>Сверить результат</a:t>
-            </a:r>
-          </a:p>
-        </p:txBody>
-      </p:sp>
-      <p:sp>
-        <p:nvSpPr>
-          <p:cNvPr id="20" name="">
-            <a:extLst xmlns:a="http://schemas.openxmlformats.org/drawingml/2006/main">
-              <a:ext uri="{FF2B5EF4-FFF2-40B4-BE49-F238E27FC236}">
-                <a16:creationId xmlns:a16="http://schemas.microsoft.com/office/drawing/2014/main" id="{76237A29-2434-484D-B292-FD5CFE2CA25F}"/>
-              </a:ext>
-            </a:extLst>
-          </p:cNvPr>
-          <p:cNvSpPr>
-            <a:spLocks xmlns:a="http://schemas.openxmlformats.org/drawingml/2006/main" noGrp="1"/>
-          </p:cNvSpPr>
-          <p:nvPr/>
-        </p:nvSpPr>
-        <p:spPr>
-          <a:xfrm xmlns:a="http://schemas.openxmlformats.org/drawingml/2006/main">
-            <a:off x="590550" y="6076950"/>
-            <a:ext cx="10953750" cy="619125"/>
-          </a:xfrm>
-          <a:prstGeom xmlns:a="http://schemas.openxmlformats.org/drawingml/2006/main" prst="rect">
-            <a:avLst/>
-          </a:prstGeom>
-          <a:noFill xmlns:a="http://schemas.openxmlformats.org/drawingml/2006/main"/>
-          <a:ln xmlns:a="http://schemas.openxmlformats.org/drawingml/2006/main" w="0">
-            <a:noFill/>
-          </a:ln>
-        </p:spPr>
-        <p:txBody>
-          <a:bodyPr xmlns:a="http://schemas.openxmlformats.org/drawingml/2006/main">
-            <a:noAutofit/>
-          </a:bodyPr>
-          <a:lstStyle xmlns:a="http://schemas.openxmlformats.org/drawingml/2006/main"/>
-          <a:p xmlns:a="http://schemas.openxmlformats.org/drawingml/2006/main">
-            <a:pPr>
-              <a:defRPr sz="1650" b="0">
-                <a:solidFill>
-                  <a:srgbClr val="161616"/>
-                </a:solidFill>
-                <a:latin typeface="Arial"/>
-                <a:ea typeface="Arial"/>
-                <a:cs typeface="Arial"/>
-              </a:defRPr>
-            </a:pPr>
-            <a:r>
-              <a:rPr sz="1650" b="0">
-                <a:solidFill>
-                  <a:srgbClr val="161616"/>
-                </a:solidFill>
-                <a:latin typeface="Arial"/>
-                <a:ea typeface="Arial"/>
-                <a:cs typeface="Arial"/>
-              </a:rPr>
-              <a:t>Потеря ответа требует сверки. Локальный ключ не гарантирует идемпотентность Ozon.</a:t>
             </a:r>
           </a:p>
         </p:txBody>
@@ -3507,7 +5291,7 @@
     </p:spTree>
     <p:extLst>
       <p:ext uri="{BB962C8B-B14F-4D97-AF65-F5344CB8AC3E}">
-        <p14:creationId xmlns:p14="http://schemas.microsoft.com/office/powerpoint/2010/main" val="1970608996"/>
+        <p14:creationId xmlns:p14="http://schemas.microsoft.com/office/powerpoint/2010/main" val="1103676062"/>
       </p:ext>
     </p:extLst>
   </p:cSld>
@@ -3538,7 +5322,7 @@
           <p:cNvPr id="3" name="">
             <a:extLst xmlns:a="http://schemas.openxmlformats.org/drawingml/2006/main">
               <a:ext uri="{FF2B5EF4-FFF2-40B4-BE49-F238E27FC236}">
-                <a16:creationId xmlns:a16="http://schemas.microsoft.com/office/drawing/2014/main" id="{17F39BA5-1E4C-4B80-93C7-6F6EF249C39C}"/>
+                <a16:creationId xmlns:a16="http://schemas.microsoft.com/office/drawing/2014/main" id="{5D09F2F2-3A73-46E7-B4F0-ABF587B8F229}"/>
               </a:ext>
             </a:extLst>
           </p:cNvPr>
@@ -3564,7 +5348,18 @@
           <a:bodyPr xmlns:a="http://schemas.openxmlformats.org/drawingml/2006/main" anchor="ctr">
             <a:noAutofit/>
           </a:bodyPr>
-          <a:lstStyle xmlns:a="http://schemas.openxmlformats.org/drawingml/2006/main"/>
+          <a:lstStyle xmlns:a="http://schemas.openxmlformats.org/drawingml/2006/main">
+            <a:defPPr algn="l">
+              <a:defRPr sz="2700" b="1">
+                <a:solidFill>
+                  <a:srgbClr val="161616"/>
+                </a:solidFill>
+                <a:latin typeface="Arial"/>
+                <a:ea typeface="Arial"/>
+                <a:cs typeface="Arial"/>
+              </a:defRPr>
+            </a:defPPr>
+          </a:lstStyle>
           <a:p xmlns:a="http://schemas.openxmlformats.org/drawingml/2006/main">
             <a:pPr algn="l">
               <a:defRPr sz="2700" b="1">
@@ -3592,7 +5387,13 @@
       </p:sp>
       <p:graphicFrame>
         <p:nvGraphicFramePr>
-          <p:cNvPr id="4" name=""/>
+          <p:cNvPr id="2" name="">
+            <a:extLst xmlns:a="http://schemas.openxmlformats.org/drawingml/2006/main">
+              <a:ext uri="{FF2B5EF4-FFF2-40B4-BE49-F238E27FC236}">
+                <a16:creationId xmlns:a16="http://schemas.microsoft.com/office/drawing/2014/main" id="{C75DDA12-A55C-40A8-B9DF-D40F49DED4DF}"/>
+              </a:ext>
+            </a:extLst>
+          </p:cNvPr>
           <p:cNvGraphicFramePr/>
           <p:nvPr/>
         </p:nvGraphicFramePr>
@@ -3629,6 +5430,30 @@
                     </a:p>
                   </a:txBody>
                   <a:tcPr marL="91440" marR="91440" marT="45720" marB="45720">
+                    <a:lnL w="9525">
+                      <a:solidFill>
+                        <a:srgbClr val="888888"/>
+                      </a:solidFill>
+                      <a:prstDash val="solid"/>
+                    </a:lnL>
+                    <a:lnR w="9525">
+                      <a:solidFill>
+                        <a:srgbClr val="888888"/>
+                      </a:solidFill>
+                      <a:prstDash val="solid"/>
+                    </a:lnR>
+                    <a:lnT w="9525">
+                      <a:solidFill>
+                        <a:srgbClr val="888888"/>
+                      </a:solidFill>
+                      <a:prstDash val="solid"/>
+                    </a:lnT>
+                    <a:lnB w="9525">
+                      <a:solidFill>
+                        <a:srgbClr val="888888"/>
+                      </a:solidFill>
+                      <a:prstDash val="solid"/>
+                    </a:lnB>
                     <a:solidFill>
                       <a:srgbClr val="F1F1F1"/>
                     </a:solidFill>
@@ -3653,6 +5478,24 @@
                     </a:p>
                   </a:txBody>
                   <a:tcPr marL="91440" marR="91440" marT="45720" marB="45720">
+                    <a:lnR w="9525">
+                      <a:solidFill>
+                        <a:srgbClr val="888888"/>
+                      </a:solidFill>
+                      <a:prstDash val="solid"/>
+                    </a:lnR>
+                    <a:lnT w="9525">
+                      <a:solidFill>
+                        <a:srgbClr val="888888"/>
+                      </a:solidFill>
+                      <a:prstDash val="solid"/>
+                    </a:lnT>
+                    <a:lnB w="9525">
+                      <a:solidFill>
+                        <a:srgbClr val="888888"/>
+                      </a:solidFill>
+                      <a:prstDash val="solid"/>
+                    </a:lnB>
                     <a:solidFill>
                       <a:srgbClr val="F1F1F1"/>
                     </a:solidFill>
@@ -3677,6 +5520,24 @@
                     </a:p>
                   </a:txBody>
                   <a:tcPr marL="91440" marR="91440" marT="45720" marB="45720">
+                    <a:lnR w="9525">
+                      <a:solidFill>
+                        <a:srgbClr val="888888"/>
+                      </a:solidFill>
+                      <a:prstDash val="solid"/>
+                    </a:lnR>
+                    <a:lnT w="9525">
+                      <a:solidFill>
+                        <a:srgbClr val="888888"/>
+                      </a:solidFill>
+                      <a:prstDash val="solid"/>
+                    </a:lnT>
+                    <a:lnB w="9525">
+                      <a:solidFill>
+                        <a:srgbClr val="888888"/>
+                      </a:solidFill>
+                      <a:prstDash val="solid"/>
+                    </a:lnB>
                     <a:solidFill>
                       <a:srgbClr val="F1F1F1"/>
                     </a:solidFill>
@@ -3703,6 +5564,24 @@
                     </a:p>
                   </a:txBody>
                   <a:tcPr marL="91440" marR="91440" marT="45720" marB="45720">
+                    <a:lnL w="9525">
+                      <a:solidFill>
+                        <a:srgbClr val="888888"/>
+                      </a:solidFill>
+                      <a:prstDash val="solid"/>
+                    </a:lnL>
+                    <a:lnR w="9525">
+                      <a:solidFill>
+                        <a:srgbClr val="888888"/>
+                      </a:solidFill>
+                      <a:prstDash val="solid"/>
+                    </a:lnR>
+                    <a:lnB w="9525">
+                      <a:solidFill>
+                        <a:srgbClr val="888888"/>
+                      </a:solidFill>
+                      <a:prstDash val="solid"/>
+                    </a:lnB>
                     <a:solidFill>
                       <a:srgbClr val="FFFFFF"/>
                     </a:solidFill>
@@ -3727,6 +5606,18 @@
                     </a:p>
                   </a:txBody>
                   <a:tcPr marL="91440" marR="91440" marT="45720" marB="45720">
+                    <a:lnR w="9525">
+                      <a:solidFill>
+                        <a:srgbClr val="888888"/>
+                      </a:solidFill>
+                      <a:prstDash val="solid"/>
+                    </a:lnR>
+                    <a:lnB w="9525">
+                      <a:solidFill>
+                        <a:srgbClr val="888888"/>
+                      </a:solidFill>
+                      <a:prstDash val="solid"/>
+                    </a:lnB>
                     <a:solidFill>
                       <a:srgbClr val="FFFFFF"/>
                     </a:solidFill>
@@ -3751,6 +5642,18 @@
                     </a:p>
                   </a:txBody>
                   <a:tcPr marL="91440" marR="91440" marT="45720" marB="45720">
+                    <a:lnR w="9525">
+                      <a:solidFill>
+                        <a:srgbClr val="888888"/>
+                      </a:solidFill>
+                      <a:prstDash val="solid"/>
+                    </a:lnR>
+                    <a:lnB w="9525">
+                      <a:solidFill>
+                        <a:srgbClr val="888888"/>
+                      </a:solidFill>
+                      <a:prstDash val="solid"/>
+                    </a:lnB>
                     <a:solidFill>
                       <a:srgbClr val="FFFFFF"/>
                     </a:solidFill>
@@ -3777,6 +5680,24 @@
                     </a:p>
                   </a:txBody>
                   <a:tcPr marL="91440" marR="91440" marT="45720" marB="45720">
+                    <a:lnL w="9525">
+                      <a:solidFill>
+                        <a:srgbClr val="888888"/>
+                      </a:solidFill>
+                      <a:prstDash val="solid"/>
+                    </a:lnL>
+                    <a:lnR w="9525">
+                      <a:solidFill>
+                        <a:srgbClr val="888888"/>
+                      </a:solidFill>
+                      <a:prstDash val="solid"/>
+                    </a:lnR>
+                    <a:lnB w="9525">
+                      <a:solidFill>
+                        <a:srgbClr val="888888"/>
+                      </a:solidFill>
+                      <a:prstDash val="solid"/>
+                    </a:lnB>
                     <a:solidFill>
                       <a:srgbClr val="FFFFFF"/>
                     </a:solidFill>
@@ -3801,6 +5722,18 @@
                     </a:p>
                   </a:txBody>
                   <a:tcPr marL="91440" marR="91440" marT="45720" marB="45720">
+                    <a:lnR w="9525">
+                      <a:solidFill>
+                        <a:srgbClr val="888888"/>
+                      </a:solidFill>
+                      <a:prstDash val="solid"/>
+                    </a:lnR>
+                    <a:lnB w="9525">
+                      <a:solidFill>
+                        <a:srgbClr val="888888"/>
+                      </a:solidFill>
+                      <a:prstDash val="solid"/>
+                    </a:lnB>
                     <a:solidFill>
                       <a:srgbClr val="FFFFFF"/>
                     </a:solidFill>
@@ -3825,6 +5758,18 @@
                     </a:p>
                   </a:txBody>
                   <a:tcPr marL="91440" marR="91440" marT="45720" marB="45720">
+                    <a:lnR w="9525">
+                      <a:solidFill>
+                        <a:srgbClr val="888888"/>
+                      </a:solidFill>
+                      <a:prstDash val="solid"/>
+                    </a:lnR>
+                    <a:lnB w="9525">
+                      <a:solidFill>
+                        <a:srgbClr val="888888"/>
+                      </a:solidFill>
+                      <a:prstDash val="solid"/>
+                    </a:lnB>
                     <a:solidFill>
                       <a:srgbClr val="FFFFFF"/>
                     </a:solidFill>
@@ -3851,6 +5796,24 @@
                     </a:p>
                   </a:txBody>
                   <a:tcPr marL="91440" marR="91440" marT="45720" marB="45720">
+                    <a:lnL w="9525">
+                      <a:solidFill>
+                        <a:srgbClr val="888888"/>
+                      </a:solidFill>
+                      <a:prstDash val="solid"/>
+                    </a:lnL>
+                    <a:lnR w="9525">
+                      <a:solidFill>
+                        <a:srgbClr val="888888"/>
+                      </a:solidFill>
+                      <a:prstDash val="solid"/>
+                    </a:lnR>
+                    <a:lnB w="9525">
+                      <a:solidFill>
+                        <a:srgbClr val="888888"/>
+                      </a:solidFill>
+                      <a:prstDash val="solid"/>
+                    </a:lnB>
                     <a:solidFill>
                       <a:srgbClr val="FFFFFF"/>
                     </a:solidFill>
@@ -3875,6 +5838,18 @@
                     </a:p>
                   </a:txBody>
                   <a:tcPr marL="91440" marR="91440" marT="45720" marB="45720">
+                    <a:lnR w="9525">
+                      <a:solidFill>
+                        <a:srgbClr val="888888"/>
+                      </a:solidFill>
+                      <a:prstDash val="solid"/>
+                    </a:lnR>
+                    <a:lnB w="9525">
+                      <a:solidFill>
+                        <a:srgbClr val="888888"/>
+                      </a:solidFill>
+                      <a:prstDash val="solid"/>
+                    </a:lnB>
                     <a:solidFill>
                       <a:srgbClr val="FFFFFF"/>
                     </a:solidFill>
@@ -3899,6 +5874,18 @@
                     </a:p>
                   </a:txBody>
                   <a:tcPr marL="91440" marR="91440" marT="45720" marB="45720">
+                    <a:lnR w="9525">
+                      <a:solidFill>
+                        <a:srgbClr val="888888"/>
+                      </a:solidFill>
+                      <a:prstDash val="solid"/>
+                    </a:lnR>
+                    <a:lnB w="9525">
+                      <a:solidFill>
+                        <a:srgbClr val="888888"/>
+                      </a:solidFill>
+                      <a:prstDash val="solid"/>
+                    </a:lnB>
                     <a:solidFill>
                       <a:srgbClr val="FFFFFF"/>
                     </a:solidFill>
@@ -3925,6 +5912,24 @@
                     </a:p>
                   </a:txBody>
                   <a:tcPr marL="91440" marR="91440" marT="45720" marB="45720">
+                    <a:lnL w="9525">
+                      <a:solidFill>
+                        <a:srgbClr val="888888"/>
+                      </a:solidFill>
+                      <a:prstDash val="solid"/>
+                    </a:lnL>
+                    <a:lnR w="9525">
+                      <a:solidFill>
+                        <a:srgbClr val="888888"/>
+                      </a:solidFill>
+                      <a:prstDash val="solid"/>
+                    </a:lnR>
+                    <a:lnB w="9525">
+                      <a:solidFill>
+                        <a:srgbClr val="888888"/>
+                      </a:solidFill>
+                      <a:prstDash val="solid"/>
+                    </a:lnB>
                     <a:solidFill>
                       <a:srgbClr val="FFFFFF"/>
                     </a:solidFill>
@@ -3949,6 +5954,18 @@
                     </a:p>
                   </a:txBody>
                   <a:tcPr marL="91440" marR="91440" marT="45720" marB="45720">
+                    <a:lnR w="9525">
+                      <a:solidFill>
+                        <a:srgbClr val="888888"/>
+                      </a:solidFill>
+                      <a:prstDash val="solid"/>
+                    </a:lnR>
+                    <a:lnB w="9525">
+                      <a:solidFill>
+                        <a:srgbClr val="888888"/>
+                      </a:solidFill>
+                      <a:prstDash val="solid"/>
+                    </a:lnB>
                     <a:solidFill>
                       <a:srgbClr val="FFFFFF"/>
                     </a:solidFill>
@@ -3973,6 +5990,18 @@
                     </a:p>
                   </a:txBody>
                   <a:tcPr marL="91440" marR="91440" marT="45720" marB="45720">
+                    <a:lnR w="9525">
+                      <a:solidFill>
+                        <a:srgbClr val="888888"/>
+                      </a:solidFill>
+                      <a:prstDash val="solid"/>
+                    </a:lnR>
+                    <a:lnB w="9525">
+                      <a:solidFill>
+                        <a:srgbClr val="888888"/>
+                      </a:solidFill>
+                      <a:prstDash val="solid"/>
+                    </a:lnB>
                     <a:solidFill>
                       <a:srgbClr val="FFFFFF"/>
                     </a:solidFill>
@@ -3999,6 +6028,24 @@
                     </a:p>
                   </a:txBody>
                   <a:tcPr marL="91440" marR="91440" marT="45720" marB="45720">
+                    <a:lnL w="9525">
+                      <a:solidFill>
+                        <a:srgbClr val="888888"/>
+                      </a:solidFill>
+                      <a:prstDash val="solid"/>
+                    </a:lnL>
+                    <a:lnR w="9525">
+                      <a:solidFill>
+                        <a:srgbClr val="888888"/>
+                      </a:solidFill>
+                      <a:prstDash val="solid"/>
+                    </a:lnR>
+                    <a:lnB w="9525">
+                      <a:solidFill>
+                        <a:srgbClr val="888888"/>
+                      </a:solidFill>
+                      <a:prstDash val="solid"/>
+                    </a:lnB>
                     <a:solidFill>
                       <a:srgbClr val="FFFFFF"/>
                     </a:solidFill>
@@ -4023,6 +6070,18 @@
                     </a:p>
                   </a:txBody>
                   <a:tcPr marL="91440" marR="91440" marT="45720" marB="45720">
+                    <a:lnR w="9525">
+                      <a:solidFill>
+                        <a:srgbClr val="888888"/>
+                      </a:solidFill>
+                      <a:prstDash val="solid"/>
+                    </a:lnR>
+                    <a:lnB w="9525">
+                      <a:solidFill>
+                        <a:srgbClr val="888888"/>
+                      </a:solidFill>
+                      <a:prstDash val="solid"/>
+                    </a:lnB>
                     <a:solidFill>
                       <a:srgbClr val="FFFFFF"/>
                     </a:solidFill>
@@ -4047,6 +6106,18 @@
                     </a:p>
                   </a:txBody>
                   <a:tcPr marL="91440" marR="91440" marT="45720" marB="45720">
+                    <a:lnR w="9525">
+                      <a:solidFill>
+                        <a:srgbClr val="888888"/>
+                      </a:solidFill>
+                      <a:prstDash val="solid"/>
+                    </a:lnR>
+                    <a:lnB w="9525">
+                      <a:solidFill>
+                        <a:srgbClr val="888888"/>
+                      </a:solidFill>
+                      <a:prstDash val="solid"/>
+                    </a:lnB>
                     <a:solidFill>
                       <a:srgbClr val="FFFFFF"/>
                     </a:solidFill>
@@ -4060,7 +6131,7 @@
     </p:spTree>
     <p:extLst>
       <p:ext uri="{BB962C8B-B14F-4D97-AF65-F5344CB8AC3E}">
-        <p14:creationId xmlns:p14="http://schemas.microsoft.com/office/powerpoint/2010/main" val="80720"/>
+        <p14:creationId xmlns:p14="http://schemas.microsoft.com/office/powerpoint/2010/main" val="912246105"/>
       </p:ext>
     </p:extLst>
   </p:cSld>
@@ -4091,7 +6162,7 @@
           <p:cNvPr id="3" name="">
             <a:extLst xmlns:a="http://schemas.openxmlformats.org/drawingml/2006/main">
               <a:ext uri="{FF2B5EF4-FFF2-40B4-BE49-F238E27FC236}">
-                <a16:creationId xmlns:a16="http://schemas.microsoft.com/office/drawing/2014/main" id="{CB3EA5DD-9BF7-4573-9212-04B66560F407}"/>
+                <a16:creationId xmlns:a16="http://schemas.microsoft.com/office/drawing/2014/main" id="{12BD432E-5D76-44DF-AE98-DE6F53C3EFFF}"/>
               </a:ext>
             </a:extLst>
           </p:cNvPr>
@@ -4117,7 +6188,18 @@
           <a:bodyPr xmlns:a="http://schemas.openxmlformats.org/drawingml/2006/main" anchor="ctr">
             <a:noAutofit/>
           </a:bodyPr>
-          <a:lstStyle xmlns:a="http://schemas.openxmlformats.org/drawingml/2006/main"/>
+          <a:lstStyle xmlns:a="http://schemas.openxmlformats.org/drawingml/2006/main">
+            <a:defPPr algn="l">
+              <a:defRPr sz="2700" b="1">
+                <a:solidFill>
+                  <a:srgbClr val="161616"/>
+                </a:solidFill>
+                <a:latin typeface="Arial"/>
+                <a:ea typeface="Arial"/>
+                <a:cs typeface="Arial"/>
+              </a:defRPr>
+            </a:defPPr>
+          </a:lstStyle>
           <a:p xmlns:a="http://schemas.openxmlformats.org/drawingml/2006/main">
             <a:pPr algn="l">
               <a:defRPr sz="2700" b="1">
@@ -4145,7 +6227,13 @@
       </p:sp>
       <p:graphicFrame>
         <p:nvGraphicFramePr>
-          <p:cNvPr id="4" name=""/>
+          <p:cNvPr id="2" name="">
+            <a:extLst xmlns:a="http://schemas.openxmlformats.org/drawingml/2006/main">
+              <a:ext uri="{FF2B5EF4-FFF2-40B4-BE49-F238E27FC236}">
+                <a16:creationId xmlns:a16="http://schemas.microsoft.com/office/drawing/2014/main" id="{88EC4D12-34D9-49DB-B0FA-DC905676C22E}"/>
+              </a:ext>
+            </a:extLst>
+          </p:cNvPr>
           <p:cNvGraphicFramePr/>
           <p:nvPr/>
         </p:nvGraphicFramePr>
@@ -4181,6 +6269,30 @@
                     </a:p>
                   </a:txBody>
                   <a:tcPr marL="91440" marR="91440" marT="45720" marB="45720">
+                    <a:lnL w="9525">
+                      <a:solidFill>
+                        <a:srgbClr val="888888"/>
+                      </a:solidFill>
+                      <a:prstDash val="solid"/>
+                    </a:lnL>
+                    <a:lnR w="9525">
+                      <a:solidFill>
+                        <a:srgbClr val="888888"/>
+                      </a:solidFill>
+                      <a:prstDash val="solid"/>
+                    </a:lnR>
+                    <a:lnT w="9525">
+                      <a:solidFill>
+                        <a:srgbClr val="888888"/>
+                      </a:solidFill>
+                      <a:prstDash val="solid"/>
+                    </a:lnT>
+                    <a:lnB w="9525">
+                      <a:solidFill>
+                        <a:srgbClr val="888888"/>
+                      </a:solidFill>
+                      <a:prstDash val="solid"/>
+                    </a:lnB>
                     <a:solidFill>
                       <a:srgbClr val="F1F1F1"/>
                     </a:solidFill>
@@ -4205,6 +6317,24 @@
                     </a:p>
                   </a:txBody>
                   <a:tcPr marL="91440" marR="91440" marT="45720" marB="45720">
+                    <a:lnR w="9525">
+                      <a:solidFill>
+                        <a:srgbClr val="888888"/>
+                      </a:solidFill>
+                      <a:prstDash val="solid"/>
+                    </a:lnR>
+                    <a:lnT w="9525">
+                      <a:solidFill>
+                        <a:srgbClr val="888888"/>
+                      </a:solidFill>
+                      <a:prstDash val="solid"/>
+                    </a:lnT>
+                    <a:lnB w="9525">
+                      <a:solidFill>
+                        <a:srgbClr val="888888"/>
+                      </a:solidFill>
+                      <a:prstDash val="solid"/>
+                    </a:lnB>
                     <a:solidFill>
                       <a:srgbClr val="F1F1F1"/>
                     </a:solidFill>
@@ -4231,6 +6361,24 @@
                     </a:p>
                   </a:txBody>
                   <a:tcPr marL="91440" marR="91440" marT="45720" marB="45720">
+                    <a:lnL w="9525">
+                      <a:solidFill>
+                        <a:srgbClr val="888888"/>
+                      </a:solidFill>
+                      <a:prstDash val="solid"/>
+                    </a:lnL>
+                    <a:lnR w="9525">
+                      <a:solidFill>
+                        <a:srgbClr val="888888"/>
+                      </a:solidFill>
+                      <a:prstDash val="solid"/>
+                    </a:lnR>
+                    <a:lnB w="9525">
+                      <a:solidFill>
+                        <a:srgbClr val="888888"/>
+                      </a:solidFill>
+                      <a:prstDash val="solid"/>
+                    </a:lnB>
                     <a:solidFill>
                       <a:srgbClr val="FFFFFF"/>
                     </a:solidFill>
@@ -4255,6 +6403,18 @@
                     </a:p>
                   </a:txBody>
                   <a:tcPr marL="91440" marR="91440" marT="45720" marB="45720">
+                    <a:lnR w="9525">
+                      <a:solidFill>
+                        <a:srgbClr val="888888"/>
+                      </a:solidFill>
+                      <a:prstDash val="solid"/>
+                    </a:lnR>
+                    <a:lnB w="9525">
+                      <a:solidFill>
+                        <a:srgbClr val="888888"/>
+                      </a:solidFill>
+                      <a:prstDash val="solid"/>
+                    </a:lnB>
                     <a:solidFill>
                       <a:srgbClr val="FFFFFF"/>
                     </a:solidFill>
@@ -4281,6 +6441,24 @@
                     </a:p>
                   </a:txBody>
                   <a:tcPr marL="91440" marR="91440" marT="45720" marB="45720">
+                    <a:lnL w="9525">
+                      <a:solidFill>
+                        <a:srgbClr val="888888"/>
+                      </a:solidFill>
+                      <a:prstDash val="solid"/>
+                    </a:lnL>
+                    <a:lnR w="9525">
+                      <a:solidFill>
+                        <a:srgbClr val="888888"/>
+                      </a:solidFill>
+                      <a:prstDash val="solid"/>
+                    </a:lnR>
+                    <a:lnB w="9525">
+                      <a:solidFill>
+                        <a:srgbClr val="888888"/>
+                      </a:solidFill>
+                      <a:prstDash val="solid"/>
+                    </a:lnB>
                     <a:solidFill>
                       <a:srgbClr val="FFFFFF"/>
                     </a:solidFill>
@@ -4305,6 +6483,18 @@
                     </a:p>
                   </a:txBody>
                   <a:tcPr marL="91440" marR="91440" marT="45720" marB="45720">
+                    <a:lnR w="9525">
+                      <a:solidFill>
+                        <a:srgbClr val="888888"/>
+                      </a:solidFill>
+                      <a:prstDash val="solid"/>
+                    </a:lnR>
+                    <a:lnB w="9525">
+                      <a:solidFill>
+                        <a:srgbClr val="888888"/>
+                      </a:solidFill>
+                      <a:prstDash val="solid"/>
+                    </a:lnB>
                     <a:solidFill>
                       <a:srgbClr val="FFFFFF"/>
                     </a:solidFill>
@@ -4331,6 +6521,24 @@
                     </a:p>
                   </a:txBody>
                   <a:tcPr marL="91440" marR="91440" marT="45720" marB="45720">
+                    <a:lnL w="9525">
+                      <a:solidFill>
+                        <a:srgbClr val="888888"/>
+                      </a:solidFill>
+                      <a:prstDash val="solid"/>
+                    </a:lnL>
+                    <a:lnR w="9525">
+                      <a:solidFill>
+                        <a:srgbClr val="888888"/>
+                      </a:solidFill>
+                      <a:prstDash val="solid"/>
+                    </a:lnR>
+                    <a:lnB w="9525">
+                      <a:solidFill>
+                        <a:srgbClr val="888888"/>
+                      </a:solidFill>
+                      <a:prstDash val="solid"/>
+                    </a:lnB>
                     <a:solidFill>
                       <a:srgbClr val="FFFFFF"/>
                     </a:solidFill>
@@ -4355,6 +6563,18 @@
                     </a:p>
                   </a:txBody>
                   <a:tcPr marL="91440" marR="91440" marT="45720" marB="45720">
+                    <a:lnR w="9525">
+                      <a:solidFill>
+                        <a:srgbClr val="888888"/>
+                      </a:solidFill>
+                      <a:prstDash val="solid"/>
+                    </a:lnR>
+                    <a:lnB w="9525">
+                      <a:solidFill>
+                        <a:srgbClr val="888888"/>
+                      </a:solidFill>
+                      <a:prstDash val="solid"/>
+                    </a:lnB>
                     <a:solidFill>
                       <a:srgbClr val="FFFFFF"/>
                     </a:solidFill>
@@ -4381,6 +6601,24 @@
                     </a:p>
                   </a:txBody>
                   <a:tcPr marL="91440" marR="91440" marT="45720" marB="45720">
+                    <a:lnL w="9525">
+                      <a:solidFill>
+                        <a:srgbClr val="888888"/>
+                      </a:solidFill>
+                      <a:prstDash val="solid"/>
+                    </a:lnL>
+                    <a:lnR w="9525">
+                      <a:solidFill>
+                        <a:srgbClr val="888888"/>
+                      </a:solidFill>
+                      <a:prstDash val="solid"/>
+                    </a:lnR>
+                    <a:lnB w="9525">
+                      <a:solidFill>
+                        <a:srgbClr val="888888"/>
+                      </a:solidFill>
+                      <a:prstDash val="solid"/>
+                    </a:lnB>
                     <a:solidFill>
                       <a:srgbClr val="FFFFFF"/>
                     </a:solidFill>
@@ -4405,6 +6643,18 @@
                     </a:p>
                   </a:txBody>
                   <a:tcPr marL="91440" marR="91440" marT="45720" marB="45720">
+                    <a:lnR w="9525">
+                      <a:solidFill>
+                        <a:srgbClr val="888888"/>
+                      </a:solidFill>
+                      <a:prstDash val="solid"/>
+                    </a:lnR>
+                    <a:lnB w="9525">
+                      <a:solidFill>
+                        <a:srgbClr val="888888"/>
+                      </a:solidFill>
+                      <a:prstDash val="solid"/>
+                    </a:lnB>
                     <a:solidFill>
                       <a:srgbClr val="FFFFFF"/>
                     </a:solidFill>
@@ -4418,7 +6668,7 @@
     </p:spTree>
     <p:extLst>
       <p:ext uri="{BB962C8B-B14F-4D97-AF65-F5344CB8AC3E}">
-        <p14:creationId xmlns:p14="http://schemas.microsoft.com/office/powerpoint/2010/main" val="57975275"/>
+        <p14:creationId xmlns:p14="http://schemas.microsoft.com/office/powerpoint/2010/main" val="862182281"/>
       </p:ext>
     </p:extLst>
   </p:cSld>
@@ -4449,7 +6699,7 @@
           <p:cNvPr id="6" name="">
             <a:extLst xmlns:a="http://schemas.openxmlformats.org/drawingml/2006/main">
               <a:ext uri="{FF2B5EF4-FFF2-40B4-BE49-F238E27FC236}">
-                <a16:creationId xmlns:a16="http://schemas.microsoft.com/office/drawing/2014/main" id="{CD75C6BB-3392-4101-A21E-1CBD6F59F6DA}"/>
+                <a16:creationId xmlns:a16="http://schemas.microsoft.com/office/drawing/2014/main" id="{6C97FFE7-DE15-43E1-855D-37A241063F08}"/>
               </a:ext>
             </a:extLst>
           </p:cNvPr>
@@ -4475,7 +6725,18 @@
           <a:bodyPr xmlns:a="http://schemas.openxmlformats.org/drawingml/2006/main" anchor="ctr">
             <a:noAutofit/>
           </a:bodyPr>
-          <a:lstStyle xmlns:a="http://schemas.openxmlformats.org/drawingml/2006/main"/>
+          <a:lstStyle xmlns:a="http://schemas.openxmlformats.org/drawingml/2006/main">
+            <a:defPPr algn="l">
+              <a:defRPr sz="2700" b="1">
+                <a:solidFill>
+                  <a:srgbClr val="161616"/>
+                </a:solidFill>
+                <a:latin typeface="Arial"/>
+                <a:ea typeface="Arial"/>
+                <a:cs typeface="Arial"/>
+              </a:defRPr>
+            </a:defPPr>
+          </a:lstStyle>
           <a:p xmlns:a="http://schemas.openxmlformats.org/drawingml/2006/main">
             <a:pPr algn="l">
               <a:defRPr sz="2700" b="1">
@@ -4506,7 +6767,7 @@
           <p:cNvPr id="2" name="">
             <a:extLst xmlns:a="http://schemas.openxmlformats.org/drawingml/2006/main">
               <a:ext uri="{FF2B5EF4-FFF2-40B4-BE49-F238E27FC236}">
-                <a16:creationId xmlns:a16="http://schemas.microsoft.com/office/drawing/2014/main" id="{5455C53B-FBCC-4C01-B497-ACD504D7B750}"/>
+                <a16:creationId xmlns:a16="http://schemas.microsoft.com/office/drawing/2014/main" id="{5C838AD6-D8CF-4D63-B2CE-522B2809AEE1}"/>
               </a:ext>
             </a:extLst>
           </p:cNvPr>
@@ -4532,7 +6793,18 @@
           <a:bodyPr xmlns:a="http://schemas.openxmlformats.org/drawingml/2006/main">
             <a:noAutofit/>
           </a:bodyPr>
-          <a:lstStyle xmlns:a="http://schemas.openxmlformats.org/drawingml/2006/main"/>
+          <a:lstStyle xmlns:a="http://schemas.openxmlformats.org/drawingml/2006/main">
+            <a:defPPr>
+              <a:defRPr sz="2175" b="0">
+                <a:solidFill>
+                  <a:srgbClr val="161616"/>
+                </a:solidFill>
+                <a:latin typeface="Arial"/>
+                <a:ea typeface="Arial"/>
+                <a:cs typeface="Arial"/>
+              </a:defRPr>
+            </a:defPPr>
+          </a:lstStyle>
           <a:p xmlns:a="http://schemas.openxmlformats.org/drawingml/2006/main">
             <a:pPr>
               <a:defRPr sz="2175" b="0">
@@ -4563,7 +6835,7 @@
           <p:cNvPr id="3" name="">
             <a:extLst xmlns:a="http://schemas.openxmlformats.org/drawingml/2006/main">
               <a:ext uri="{FF2B5EF4-FFF2-40B4-BE49-F238E27FC236}">
-                <a16:creationId xmlns:a16="http://schemas.microsoft.com/office/drawing/2014/main" id="{916AFC91-9137-4B84-A29E-717E22DD1248}"/>
+                <a16:creationId xmlns:a16="http://schemas.microsoft.com/office/drawing/2014/main" id="{B5C863F9-611E-4B1E-A099-5798A66B5271}"/>
               </a:ext>
             </a:extLst>
           </p:cNvPr>
@@ -4589,7 +6861,18 @@
           <a:bodyPr xmlns:a="http://schemas.openxmlformats.org/drawingml/2006/main">
             <a:noAutofit/>
           </a:bodyPr>
-          <a:lstStyle xmlns:a="http://schemas.openxmlformats.org/drawingml/2006/main"/>
+          <a:lstStyle xmlns:a="http://schemas.openxmlformats.org/drawingml/2006/main">
+            <a:defPPr>
+              <a:defRPr sz="2175" b="0">
+                <a:solidFill>
+                  <a:srgbClr val="161616"/>
+                </a:solidFill>
+                <a:latin typeface="Arial"/>
+                <a:ea typeface="Arial"/>
+                <a:cs typeface="Arial"/>
+              </a:defRPr>
+            </a:defPPr>
+          </a:lstStyle>
           <a:p xmlns:a="http://schemas.openxmlformats.org/drawingml/2006/main">
             <a:pPr>
               <a:defRPr sz="2175" b="0">
@@ -4620,7 +6903,7 @@
           <p:cNvPr id="4" name="">
             <a:extLst xmlns:a="http://schemas.openxmlformats.org/drawingml/2006/main">
               <a:ext uri="{FF2B5EF4-FFF2-40B4-BE49-F238E27FC236}">
-                <a16:creationId xmlns:a16="http://schemas.microsoft.com/office/drawing/2014/main" id="{8FA128F9-F668-4A87-A2EF-19B57F823825}"/>
+                <a16:creationId xmlns:a16="http://schemas.microsoft.com/office/drawing/2014/main" id="{DC2ED4A7-C70B-4782-9793-4923DF7F0D7B}"/>
               </a:ext>
             </a:extLst>
           </p:cNvPr>
@@ -4646,7 +6929,18 @@
           <a:bodyPr xmlns:a="http://schemas.openxmlformats.org/drawingml/2006/main">
             <a:noAutofit/>
           </a:bodyPr>
-          <a:lstStyle xmlns:a="http://schemas.openxmlformats.org/drawingml/2006/main"/>
+          <a:lstStyle xmlns:a="http://schemas.openxmlformats.org/drawingml/2006/main">
+            <a:defPPr>
+              <a:defRPr sz="2175" b="0">
+                <a:solidFill>
+                  <a:srgbClr val="161616"/>
+                </a:solidFill>
+                <a:latin typeface="Arial"/>
+                <a:ea typeface="Arial"/>
+                <a:cs typeface="Arial"/>
+              </a:defRPr>
+            </a:defPPr>
+          </a:lstStyle>
           <a:p xmlns:a="http://schemas.openxmlformats.org/drawingml/2006/main">
             <a:pPr>
               <a:defRPr sz="2175" b="0">
@@ -4677,7 +6971,7 @@
           <p:cNvPr id="5" name="">
             <a:extLst xmlns:a="http://schemas.openxmlformats.org/drawingml/2006/main">
               <a:ext uri="{FF2B5EF4-FFF2-40B4-BE49-F238E27FC236}">
-                <a16:creationId xmlns:a16="http://schemas.microsoft.com/office/drawing/2014/main" id="{8055B35E-984E-4B68-B3E5-F065A163AD30}"/>
+                <a16:creationId xmlns:a16="http://schemas.microsoft.com/office/drawing/2014/main" id="{4FD1B9F4-97C7-4220-8DA5-92D0CC8D29F1}"/>
               </a:ext>
             </a:extLst>
           </p:cNvPr>
@@ -4703,7 +6997,18 @@
           <a:bodyPr xmlns:a="http://schemas.openxmlformats.org/drawingml/2006/main">
             <a:noAutofit/>
           </a:bodyPr>
-          <a:lstStyle xmlns:a="http://schemas.openxmlformats.org/drawingml/2006/main"/>
+          <a:lstStyle xmlns:a="http://schemas.openxmlformats.org/drawingml/2006/main">
+            <a:defPPr>
+              <a:defRPr sz="2175" b="0">
+                <a:solidFill>
+                  <a:srgbClr val="161616"/>
+                </a:solidFill>
+                <a:latin typeface="Arial"/>
+                <a:ea typeface="Arial"/>
+                <a:cs typeface="Arial"/>
+              </a:defRPr>
+            </a:defPPr>
+          </a:lstStyle>
           <a:p xmlns:a="http://schemas.openxmlformats.org/drawingml/2006/main">
             <a:pPr>
               <a:defRPr sz="2175" b="0">
@@ -4732,7 +7037,7 @@
     </p:spTree>
     <p:extLst>
       <p:ext uri="{BB962C8B-B14F-4D97-AF65-F5344CB8AC3E}">
-        <p14:creationId xmlns:p14="http://schemas.microsoft.com/office/powerpoint/2010/main" val="1126086528"/>
+        <p14:creationId xmlns:p14="http://schemas.microsoft.com/office/powerpoint/2010/main" val="1117038222"/>
       </p:ext>
     </p:extLst>
   </p:cSld>
@@ -4780,16 +7085,16 @@
         <a:srgbClr val="96607D"/>
       </a:folHlink>
     </a:clrScheme>
-    <a:fontScheme name="Office">
+    <a:fontScheme name="">
       <a:majorFont>
-        <a:latin typeface="Calibri Light"/>
-        <a:ea typeface="Calibri Light"/>
-        <a:cs typeface="Calibri Light"/>
+        <a:latin typeface="Aptos"/>
+        <a:ea typeface=""/>
+        <a:cs typeface=""/>
       </a:majorFont>
       <a:minorFont>
-        <a:latin typeface="Calibri"/>
-        <a:ea typeface="Calibri"/>
-        <a:cs typeface="Calibri"/>
+        <a:latin typeface="Aptos"/>
+        <a:ea typeface=""/>
+        <a:cs typeface=""/>
       </a:minorFont>
     </a:fontScheme>
     <a:fmtScheme name="ChatGPT">
